--- a/presentation.pptx
+++ b/presentation.pptx
@@ -11,9 +11,9 @@
     <p:sldId id="256" r:id="rId2"/>
     <p:sldId id="257" r:id="rId3"/>
     <p:sldId id="258" r:id="rId4"/>
-    <p:sldId id="259" r:id="rId5"/>
-    <p:sldId id="261" r:id="rId6"/>
-    <p:sldId id="267" r:id="rId7"/>
+    <p:sldId id="267" r:id="rId5"/>
+    <p:sldId id="268" r:id="rId6"/>
+    <p:sldId id="261" r:id="rId7"/>
     <p:sldId id="262" r:id="rId8"/>
     <p:sldId id="263" r:id="rId9"/>
     <p:sldId id="264" r:id="rId10"/>
@@ -116,6 +116,11 @@
       </a:defRPr>
     </a:lvl9pPr>
   </p:defaultTextStyle>
+  <p:extLst>
+    <p:ext uri="{EFAFB233-063F-42B5-8137-9DF3F51BA10A}">
+      <p15:sldGuideLst xmlns:p15="http://schemas.microsoft.com/office/powerpoint/2012/main"/>
+    </p:ext>
+  </p:extLst>
 </p:presentation>
 </file>
 
@@ -591,156 +596,6 @@
 </file>
 
 <file path=ppt/notesSlides/notesSlide4.xml><?xml version="1.0" encoding="utf-8"?>
-<p:notes xmlns:a="http://schemas.openxmlformats.org/drawingml/2006/main" xmlns:r="http://schemas.openxmlformats.org/officeDocument/2006/relationships" xmlns:p="http://schemas.openxmlformats.org/presentationml/2006/main">
-  <p:cSld>
-    <p:spTree>
-      <p:nvGrpSpPr>
-        <p:cNvPr id="1" name=""/>
-        <p:cNvGrpSpPr/>
-        <p:nvPr/>
-      </p:nvGrpSpPr>
-      <p:grpSpPr>
-        <a:xfrm>
-          <a:off x="0" y="0"/>
-          <a:ext cx="0" cy="0"/>
-          <a:chOff x="0" y="0"/>
-          <a:chExt cx="0" cy="0"/>
-        </a:xfrm>
-      </p:grpSpPr>
-      <p:sp>
-        <p:nvSpPr>
-          <p:cNvPr id="2" name="Slide Image Placeholder 1"/>
-          <p:cNvSpPr>
-            <a:spLocks noGrp="1" noRot="1" noChangeAspect="1"/>
-          </p:cNvSpPr>
-          <p:nvPr>
-            <p:ph type="sldImg"/>
-          </p:nvPr>
-        </p:nvSpPr>
-        <p:spPr/>
-      </p:sp>
-      <p:sp>
-        <p:nvSpPr>
-          <p:cNvPr id="3" name="Notes Placeholder 2"/>
-          <p:cNvSpPr>
-            <a:spLocks noGrp="1"/>
-          </p:cNvSpPr>
-          <p:nvPr>
-            <p:ph type="body" idx="1"/>
-          </p:nvPr>
-        </p:nvSpPr>
-        <p:spPr/>
-        <p:txBody>
-          <a:bodyPr/>
-          <a:lstStyle/>
-          <a:p>
-            <a:endParaRPr/>
-          </a:p>
-        </p:txBody>
-      </p:sp>
-      <p:sp>
-        <p:nvSpPr>
-          <p:cNvPr id="4" name="Slide Number Placeholder 3"/>
-          <p:cNvSpPr>
-            <a:spLocks noGrp="1"/>
-          </p:cNvSpPr>
-          <p:nvPr>
-            <p:ph type="sldNum" idx="5"/>
-          </p:nvPr>
-        </p:nvSpPr>
-        <p:spPr/>
-        <p:txBody>
-          <a:bodyPr/>
-          <a:lstStyle/>
-          <a:p>
-            <a:endParaRPr/>
-          </a:p>
-        </p:txBody>
-      </p:sp>
-    </p:spTree>
-  </p:cSld>
-  <p:clrMapOvr>
-    <a:masterClrMapping/>
-  </p:clrMapOvr>
-</p:notes>
-</file>
-
-<file path=ppt/notesSlides/notesSlide5.xml><?xml version="1.0" encoding="utf-8"?>
-<p:notes xmlns:a="http://schemas.openxmlformats.org/drawingml/2006/main" xmlns:r="http://schemas.openxmlformats.org/officeDocument/2006/relationships" xmlns:p="http://schemas.openxmlformats.org/presentationml/2006/main">
-  <p:cSld>
-    <p:spTree>
-      <p:nvGrpSpPr>
-        <p:cNvPr id="1" name=""/>
-        <p:cNvGrpSpPr/>
-        <p:nvPr/>
-      </p:nvGrpSpPr>
-      <p:grpSpPr>
-        <a:xfrm>
-          <a:off x="0" y="0"/>
-          <a:ext cx="0" cy="0"/>
-          <a:chOff x="0" y="0"/>
-          <a:chExt cx="0" cy="0"/>
-        </a:xfrm>
-      </p:grpSpPr>
-      <p:sp>
-        <p:nvSpPr>
-          <p:cNvPr id="2" name="Slide Image Placeholder 1"/>
-          <p:cNvSpPr>
-            <a:spLocks noGrp="1" noRot="1" noChangeAspect="1"/>
-          </p:cNvSpPr>
-          <p:nvPr>
-            <p:ph type="sldImg"/>
-          </p:nvPr>
-        </p:nvSpPr>
-        <p:spPr/>
-      </p:sp>
-      <p:sp>
-        <p:nvSpPr>
-          <p:cNvPr id="3" name="Notes Placeholder 2"/>
-          <p:cNvSpPr>
-            <a:spLocks noGrp="1"/>
-          </p:cNvSpPr>
-          <p:nvPr>
-            <p:ph type="body" idx="1"/>
-          </p:nvPr>
-        </p:nvSpPr>
-        <p:spPr/>
-        <p:txBody>
-          <a:bodyPr/>
-          <a:lstStyle/>
-          <a:p>
-            <a:endParaRPr/>
-          </a:p>
-        </p:txBody>
-      </p:sp>
-      <p:sp>
-        <p:nvSpPr>
-          <p:cNvPr id="4" name="Slide Number Placeholder 3"/>
-          <p:cNvSpPr>
-            <a:spLocks noGrp="1"/>
-          </p:cNvSpPr>
-          <p:nvPr>
-            <p:ph type="sldNum" idx="5"/>
-          </p:nvPr>
-        </p:nvSpPr>
-        <p:spPr/>
-        <p:txBody>
-          <a:bodyPr/>
-          <a:lstStyle/>
-          <a:p>
-            <a:endParaRPr/>
-          </a:p>
-        </p:txBody>
-      </p:sp>
-    </p:spTree>
-  </p:cSld>
-  <p:clrMapOvr>
-    <a:masterClrMapping/>
-  </p:clrMapOvr>
-</p:notes>
-</file>
-
-<file path=ppt/notesSlides/notesSlide6.xml><?xml version="1.0" encoding="utf-8"?>
 <p:notes xmlns:a="http://schemas.openxmlformats.org/drawingml/2006/main" xmlns:r="http://schemas.openxmlformats.org/officeDocument/2006/relationships" xmlns:p="http://schemas.openxmlformats.org/presentationml/2006/main">
   <p:cSld>
     <p:spTree>
@@ -837,6 +692,185 @@
         <p14:creationId xmlns:p14="http://schemas.microsoft.com/office/powerpoint/2010/main" val="106534563"/>
       </p:ext>
     </p:extLst>
+  </p:cSld>
+  <p:clrMapOvr>
+    <a:masterClrMapping/>
+  </p:clrMapOvr>
+</p:notes>
+</file>
+
+<file path=ppt/notesSlides/notesSlide5.xml><?xml version="1.0" encoding="utf-8"?>
+<p:notes xmlns:a="http://schemas.openxmlformats.org/drawingml/2006/main" xmlns:r="http://schemas.openxmlformats.org/officeDocument/2006/relationships" xmlns:p="http://schemas.openxmlformats.org/presentationml/2006/main">
+  <p:cSld>
+    <p:spTree>
+      <p:nvGrpSpPr>
+        <p:cNvPr id="1" name="">
+          <a:extLst>
+            <a:ext uri="{FF2B5EF4-FFF2-40B4-BE49-F238E27FC236}">
+              <a16:creationId xmlns:a16="http://schemas.microsoft.com/office/drawing/2014/main" id="{8F5155C5-5C25-D3E2-350F-0D03D8D49DBC}"/>
+            </a:ext>
+          </a:extLst>
+        </p:cNvPr>
+        <p:cNvGrpSpPr/>
+        <p:nvPr/>
+      </p:nvGrpSpPr>
+      <p:grpSpPr>
+        <a:xfrm>
+          <a:off x="0" y="0"/>
+          <a:ext cx="0" cy="0"/>
+          <a:chOff x="0" y="0"/>
+          <a:chExt cx="0" cy="0"/>
+        </a:xfrm>
+      </p:grpSpPr>
+      <p:sp>
+        <p:nvSpPr>
+          <p:cNvPr id="2" name="Slide Image Placeholder 1">
+            <a:extLst>
+              <a:ext uri="{FF2B5EF4-FFF2-40B4-BE49-F238E27FC236}">
+                <a16:creationId xmlns:a16="http://schemas.microsoft.com/office/drawing/2014/main" id="{87019EC8-F62E-7B1F-20A5-214E1D595C9F}"/>
+              </a:ext>
+            </a:extLst>
+          </p:cNvPr>
+          <p:cNvSpPr>
+            <a:spLocks noGrp="1" noRot="1" noChangeAspect="1"/>
+          </p:cNvSpPr>
+          <p:nvPr>
+            <p:ph type="sldImg"/>
+          </p:nvPr>
+        </p:nvSpPr>
+        <p:spPr/>
+      </p:sp>
+      <p:sp>
+        <p:nvSpPr>
+          <p:cNvPr id="3" name="Notes Placeholder 2">
+            <a:extLst>
+              <a:ext uri="{FF2B5EF4-FFF2-40B4-BE49-F238E27FC236}">
+                <a16:creationId xmlns:a16="http://schemas.microsoft.com/office/drawing/2014/main" id="{D95B027A-4648-BC49-BAF6-E542467E3A60}"/>
+              </a:ext>
+            </a:extLst>
+          </p:cNvPr>
+          <p:cNvSpPr>
+            <a:spLocks noGrp="1"/>
+          </p:cNvSpPr>
+          <p:nvPr>
+            <p:ph type="body" idx="1"/>
+          </p:nvPr>
+        </p:nvSpPr>
+        <p:spPr/>
+        <p:txBody>
+          <a:bodyPr/>
+          <a:lstStyle/>
+          <a:p>
+            <a:endParaRPr/>
+          </a:p>
+        </p:txBody>
+      </p:sp>
+      <p:sp>
+        <p:nvSpPr>
+          <p:cNvPr id="4" name="Slide Number Placeholder 3">
+            <a:extLst>
+              <a:ext uri="{FF2B5EF4-FFF2-40B4-BE49-F238E27FC236}">
+                <a16:creationId xmlns:a16="http://schemas.microsoft.com/office/drawing/2014/main" id="{2E9437A2-76AC-2673-FF22-09A9EEB83743}"/>
+              </a:ext>
+            </a:extLst>
+          </p:cNvPr>
+          <p:cNvSpPr>
+            <a:spLocks noGrp="1"/>
+          </p:cNvSpPr>
+          <p:nvPr>
+            <p:ph type="sldNum" idx="5"/>
+          </p:nvPr>
+        </p:nvSpPr>
+        <p:spPr/>
+        <p:txBody>
+          <a:bodyPr/>
+          <a:lstStyle/>
+          <a:p>
+            <a:endParaRPr/>
+          </a:p>
+        </p:txBody>
+      </p:sp>
+    </p:spTree>
+    <p:extLst>
+      <p:ext uri="{BB962C8B-B14F-4D97-AF65-F5344CB8AC3E}">
+        <p14:creationId xmlns:p14="http://schemas.microsoft.com/office/powerpoint/2010/main" val="3478771460"/>
+      </p:ext>
+    </p:extLst>
+  </p:cSld>
+  <p:clrMapOvr>
+    <a:masterClrMapping/>
+  </p:clrMapOvr>
+</p:notes>
+</file>
+
+<file path=ppt/notesSlides/notesSlide6.xml><?xml version="1.0" encoding="utf-8"?>
+<p:notes xmlns:a="http://schemas.openxmlformats.org/drawingml/2006/main" xmlns:r="http://schemas.openxmlformats.org/officeDocument/2006/relationships" xmlns:p="http://schemas.openxmlformats.org/presentationml/2006/main">
+  <p:cSld>
+    <p:spTree>
+      <p:nvGrpSpPr>
+        <p:cNvPr id="1" name=""/>
+        <p:cNvGrpSpPr/>
+        <p:nvPr/>
+      </p:nvGrpSpPr>
+      <p:grpSpPr>
+        <a:xfrm>
+          <a:off x="0" y="0"/>
+          <a:ext cx="0" cy="0"/>
+          <a:chOff x="0" y="0"/>
+          <a:chExt cx="0" cy="0"/>
+        </a:xfrm>
+      </p:grpSpPr>
+      <p:sp>
+        <p:nvSpPr>
+          <p:cNvPr id="2" name="Slide Image Placeholder 1"/>
+          <p:cNvSpPr>
+            <a:spLocks noGrp="1" noRot="1" noChangeAspect="1"/>
+          </p:cNvSpPr>
+          <p:nvPr>
+            <p:ph type="sldImg"/>
+          </p:nvPr>
+        </p:nvSpPr>
+        <p:spPr/>
+      </p:sp>
+      <p:sp>
+        <p:nvSpPr>
+          <p:cNvPr id="3" name="Notes Placeholder 2"/>
+          <p:cNvSpPr>
+            <a:spLocks noGrp="1"/>
+          </p:cNvSpPr>
+          <p:nvPr>
+            <p:ph type="body" idx="1"/>
+          </p:nvPr>
+        </p:nvSpPr>
+        <p:spPr/>
+        <p:txBody>
+          <a:bodyPr/>
+          <a:lstStyle/>
+          <a:p>
+            <a:endParaRPr/>
+          </a:p>
+        </p:txBody>
+      </p:sp>
+      <p:sp>
+        <p:nvSpPr>
+          <p:cNvPr id="4" name="Slide Number Placeholder 3"/>
+          <p:cNvSpPr>
+            <a:spLocks noGrp="1"/>
+          </p:cNvSpPr>
+          <p:nvPr>
+            <p:ph type="sldNum" idx="5"/>
+          </p:nvPr>
+        </p:nvSpPr>
+        <p:spPr/>
+        <p:txBody>
+          <a:bodyPr/>
+          <a:lstStyle/>
+          <a:p>
+            <a:endParaRPr/>
+          </a:p>
+        </p:txBody>
+      </p:sp>
+    </p:spTree>
   </p:cSld>
   <p:clrMapOvr>
     <a:masterClrMapping/>
@@ -1712,13 +1746,1748 @@
               </a:defRPr>
             </a:pPr>
             <a:r>
-              <a:rPr sz="3300" b="1">
+              <a:rPr lang="pl-PL" sz="3300" b="1" dirty="0" err="1">
                 <a:solidFill>
                   <a:srgbClr val="F6F7FB"/>
                 </a:solidFill>
               </a:rPr>
+              <a:t>Final</a:t>
+            </a:r>
+            <a:r>
+              <a:rPr lang="pl-PL" sz="3300" b="1" dirty="0">
+                <a:solidFill>
+                  <a:srgbClr val="F6F7FB"/>
+                </a:solidFill>
+              </a:rPr>
+              <a:t> </a:t>
+            </a:r>
+            <a:r>
+              <a:rPr sz="3300" b="1" dirty="0">
+                <a:solidFill>
+                  <a:srgbClr val="F6F7FB"/>
+                </a:solidFill>
+              </a:rPr>
               <a:t>Conclusions</a:t>
             </a:r>
+          </a:p>
+        </p:txBody>
+      </p:sp>
+      <p:sp>
+        <p:nvSpPr>
+          <p:cNvPr id="3" name="pole tekstowe 2">
+            <a:extLst>
+              <a:ext uri="{FF2B5EF4-FFF2-40B4-BE49-F238E27FC236}">
+                <a16:creationId xmlns:a16="http://schemas.microsoft.com/office/drawing/2014/main" id="{A66ECED0-FDE7-059F-3088-C48007F091F8}"/>
+              </a:ext>
+            </a:extLst>
+          </p:cNvPr>
+          <p:cNvSpPr txBox="1"/>
+          <p:nvPr/>
+        </p:nvSpPr>
+        <p:spPr>
+          <a:xfrm>
+            <a:off x="609600" y="1085850"/>
+            <a:ext cx="11353801" cy="5216813"/>
+          </a:xfrm>
+          <a:prstGeom prst="rect">
+            <a:avLst/>
+          </a:prstGeom>
+          <a:noFill/>
+        </p:spPr>
+        <p:txBody>
+          <a:bodyPr wrap="square">
+            <a:spAutoFit/>
+          </a:bodyPr>
+          <a:lstStyle/>
+          <a:p>
+            <a:pPr>
+              <a:lnSpc>
+                <a:spcPct val="150000"/>
+              </a:lnSpc>
+              <a:buNone/>
+            </a:pPr>
+            <a:r>
+              <a:rPr lang="pl-PL" b="1" dirty="0">
+                <a:solidFill>
+                  <a:schemeClr val="bg1">
+                    <a:lumMod val="85000"/>
+                  </a:schemeClr>
+                </a:solidFill>
+              </a:rPr>
+              <a:t>1. </a:t>
+            </a:r>
+            <a:r>
+              <a:rPr lang="pl-PL" b="1" dirty="0" err="1">
+                <a:solidFill>
+                  <a:schemeClr val="bg1">
+                    <a:lumMod val="85000"/>
+                  </a:schemeClr>
+                </a:solidFill>
+              </a:rPr>
+              <a:t>Conditional</a:t>
+            </a:r>
+            <a:r>
+              <a:rPr lang="pl-PL" b="1" dirty="0">
+                <a:solidFill>
+                  <a:schemeClr val="bg1">
+                    <a:lumMod val="85000"/>
+                  </a:schemeClr>
+                </a:solidFill>
+              </a:rPr>
+              <a:t> </a:t>
+            </a:r>
+            <a:r>
+              <a:rPr lang="pl-PL" b="1" dirty="0" err="1">
+                <a:solidFill>
+                  <a:schemeClr val="bg1">
+                    <a:lumMod val="85000"/>
+                  </a:schemeClr>
+                </a:solidFill>
+              </a:rPr>
+              <a:t>generation</a:t>
+            </a:r>
+            <a:r>
+              <a:rPr lang="pl-PL" b="1" dirty="0">
+                <a:solidFill>
+                  <a:schemeClr val="bg1">
+                    <a:lumMod val="85000"/>
+                  </a:schemeClr>
+                </a:solidFill>
+              </a:rPr>
+              <a:t> was </a:t>
+            </a:r>
+            <a:r>
+              <a:rPr lang="pl-PL" b="1" dirty="0" err="1">
+                <a:solidFill>
+                  <a:schemeClr val="bg1">
+                    <a:lumMod val="85000"/>
+                  </a:schemeClr>
+                </a:solidFill>
+              </a:rPr>
+              <a:t>successful</a:t>
+            </a:r>
+            <a:endParaRPr lang="pl-PL" b="1" dirty="0">
+              <a:solidFill>
+                <a:schemeClr val="bg1">
+                  <a:lumMod val="85000"/>
+                </a:schemeClr>
+              </a:solidFill>
+            </a:endParaRPr>
+          </a:p>
+          <a:p>
+            <a:pPr marL="285750" indent="-285750">
+              <a:buFont typeface="Arial" panose="020B0604020202020204" pitchFamily="34" charset="0"/>
+              <a:buChar char="•"/>
+            </a:pPr>
+            <a:r>
+              <a:rPr lang="pl-PL" dirty="0">
+                <a:solidFill>
+                  <a:schemeClr val="bg1">
+                    <a:lumMod val="85000"/>
+                  </a:schemeClr>
+                </a:solidFill>
+              </a:rPr>
+              <a:t> The CVAE </a:t>
+            </a:r>
+            <a:r>
+              <a:rPr lang="pl-PL" dirty="0" err="1">
+                <a:solidFill>
+                  <a:schemeClr val="bg1">
+                    <a:lumMod val="85000"/>
+                  </a:schemeClr>
+                </a:solidFill>
+              </a:rPr>
+              <a:t>learned</a:t>
+            </a:r>
+            <a:r>
+              <a:rPr lang="pl-PL" dirty="0">
+                <a:solidFill>
+                  <a:schemeClr val="bg1">
+                    <a:lumMod val="85000"/>
+                  </a:schemeClr>
+                </a:solidFill>
+              </a:rPr>
+              <a:t> </a:t>
+            </a:r>
+            <a:r>
+              <a:rPr lang="pl-PL" dirty="0" err="1">
+                <a:solidFill>
+                  <a:schemeClr val="bg1">
+                    <a:lumMod val="85000"/>
+                  </a:schemeClr>
+                </a:solidFill>
+              </a:rPr>
+              <a:t>meaningful</a:t>
+            </a:r>
+            <a:r>
+              <a:rPr lang="pl-PL" dirty="0">
+                <a:solidFill>
+                  <a:schemeClr val="bg1">
+                    <a:lumMod val="85000"/>
+                  </a:schemeClr>
+                </a:solidFill>
+              </a:rPr>
+              <a:t> </a:t>
+            </a:r>
+            <a:r>
+              <a:rPr lang="pl-PL" dirty="0" err="1">
+                <a:solidFill>
+                  <a:schemeClr val="bg1">
+                    <a:lumMod val="85000"/>
+                  </a:schemeClr>
+                </a:solidFill>
+              </a:rPr>
+              <a:t>relationships</a:t>
+            </a:r>
+            <a:r>
+              <a:rPr lang="pl-PL" dirty="0">
+                <a:solidFill>
+                  <a:schemeClr val="bg1">
+                    <a:lumMod val="85000"/>
+                  </a:schemeClr>
+                </a:solidFill>
+              </a:rPr>
+              <a:t> </a:t>
+            </a:r>
+            <a:r>
+              <a:rPr lang="pl-PL" dirty="0" err="1">
+                <a:solidFill>
+                  <a:schemeClr val="bg1">
+                    <a:lumMod val="85000"/>
+                  </a:schemeClr>
+                </a:solidFill>
+              </a:rPr>
+              <a:t>between</a:t>
+            </a:r>
+            <a:r>
+              <a:rPr lang="pl-PL" dirty="0">
+                <a:solidFill>
+                  <a:schemeClr val="bg1">
+                    <a:lumMod val="85000"/>
+                  </a:schemeClr>
+                </a:solidFill>
+              </a:rPr>
+              <a:t> </a:t>
+            </a:r>
+            <a:r>
+              <a:rPr lang="pl-PL" dirty="0" err="1">
+                <a:solidFill>
+                  <a:schemeClr val="bg1">
+                    <a:lumMod val="85000"/>
+                  </a:schemeClr>
+                </a:solidFill>
+              </a:rPr>
+              <a:t>facial</a:t>
+            </a:r>
+            <a:r>
+              <a:rPr lang="pl-PL" dirty="0">
+                <a:solidFill>
+                  <a:schemeClr val="bg1">
+                    <a:lumMod val="85000"/>
+                  </a:schemeClr>
+                </a:solidFill>
+              </a:rPr>
+              <a:t> </a:t>
+            </a:r>
+            <a:r>
+              <a:rPr lang="pl-PL" dirty="0" err="1">
+                <a:solidFill>
+                  <a:schemeClr val="bg1">
+                    <a:lumMod val="85000"/>
+                  </a:schemeClr>
+                </a:solidFill>
+              </a:rPr>
+              <a:t>attributes</a:t>
+            </a:r>
+            <a:r>
+              <a:rPr lang="pl-PL" dirty="0">
+                <a:solidFill>
+                  <a:schemeClr val="bg1">
+                    <a:lumMod val="85000"/>
+                  </a:schemeClr>
+                </a:solidFill>
+              </a:rPr>
+              <a:t> and image </a:t>
+            </a:r>
+            <a:r>
+              <a:rPr lang="pl-PL" dirty="0" err="1">
+                <a:solidFill>
+                  <a:schemeClr val="bg1">
+                    <a:lumMod val="85000"/>
+                  </a:schemeClr>
+                </a:solidFill>
+              </a:rPr>
+              <a:t>appearance</a:t>
+            </a:r>
+            <a:r>
+              <a:rPr lang="pl-PL" dirty="0">
+                <a:solidFill>
+                  <a:schemeClr val="bg1">
+                    <a:lumMod val="85000"/>
+                  </a:schemeClr>
+                </a:solidFill>
+              </a:rPr>
+              <a:t>. </a:t>
+            </a:r>
+          </a:p>
+          <a:p>
+            <a:pPr marL="285750" indent="-285750">
+              <a:buFont typeface="Arial" panose="020B0604020202020204" pitchFamily="34" charset="0"/>
+              <a:buChar char="•"/>
+            </a:pPr>
+            <a:r>
+              <a:rPr lang="pl-PL" dirty="0">
+                <a:solidFill>
+                  <a:schemeClr val="bg1">
+                    <a:lumMod val="85000"/>
+                  </a:schemeClr>
+                </a:solidFill>
+              </a:rPr>
+              <a:t> </a:t>
+            </a:r>
+            <a:r>
+              <a:rPr lang="pl-PL" dirty="0" err="1">
+                <a:solidFill>
+                  <a:schemeClr val="bg1">
+                    <a:lumMod val="85000"/>
+                  </a:schemeClr>
+                </a:solidFill>
+              </a:rPr>
+              <a:t>Generated</a:t>
+            </a:r>
+            <a:r>
+              <a:rPr lang="pl-PL" dirty="0">
+                <a:solidFill>
+                  <a:schemeClr val="bg1">
+                    <a:lumMod val="85000"/>
+                  </a:schemeClr>
+                </a:solidFill>
+              </a:rPr>
+              <a:t> </a:t>
+            </a:r>
+            <a:r>
+              <a:rPr lang="pl-PL" dirty="0" err="1">
+                <a:solidFill>
+                  <a:schemeClr val="bg1">
+                    <a:lumMod val="85000"/>
+                  </a:schemeClr>
+                </a:solidFill>
+              </a:rPr>
+              <a:t>faces</a:t>
+            </a:r>
+            <a:r>
+              <a:rPr lang="pl-PL" dirty="0">
+                <a:solidFill>
+                  <a:schemeClr val="bg1">
+                    <a:lumMod val="85000"/>
+                  </a:schemeClr>
+                </a:solidFill>
+              </a:rPr>
+              <a:t> </a:t>
+            </a:r>
+            <a:r>
+              <a:rPr lang="pl-PL" dirty="0" err="1">
+                <a:solidFill>
+                  <a:schemeClr val="bg1">
+                    <a:lumMod val="85000"/>
+                  </a:schemeClr>
+                </a:solidFill>
+              </a:rPr>
+              <a:t>generally</a:t>
+            </a:r>
+            <a:r>
+              <a:rPr lang="pl-PL" dirty="0">
+                <a:solidFill>
+                  <a:schemeClr val="bg1">
+                    <a:lumMod val="85000"/>
+                  </a:schemeClr>
+                </a:solidFill>
+              </a:rPr>
+              <a:t> </a:t>
+            </a:r>
+            <a:r>
+              <a:rPr lang="pl-PL" dirty="0" err="1">
+                <a:solidFill>
+                  <a:schemeClr val="bg1">
+                    <a:lumMod val="85000"/>
+                  </a:schemeClr>
+                </a:solidFill>
+              </a:rPr>
+              <a:t>matched</a:t>
+            </a:r>
+            <a:r>
+              <a:rPr lang="pl-PL" dirty="0">
+                <a:solidFill>
+                  <a:schemeClr val="bg1">
+                    <a:lumMod val="85000"/>
+                  </a:schemeClr>
+                </a:solidFill>
+              </a:rPr>
+              <a:t> the </a:t>
+            </a:r>
+            <a:r>
+              <a:rPr lang="pl-PL" dirty="0" err="1">
+                <a:solidFill>
+                  <a:schemeClr val="bg1">
+                    <a:lumMod val="85000"/>
+                  </a:schemeClr>
+                </a:solidFill>
+              </a:rPr>
+              <a:t>requested</a:t>
+            </a:r>
+            <a:r>
+              <a:rPr lang="pl-PL" dirty="0">
+                <a:solidFill>
+                  <a:schemeClr val="bg1">
+                    <a:lumMod val="85000"/>
+                  </a:schemeClr>
+                </a:solidFill>
+              </a:rPr>
+              <a:t> </a:t>
+            </a:r>
+            <a:r>
+              <a:rPr lang="pl-PL" dirty="0" err="1">
+                <a:solidFill>
+                  <a:schemeClr val="bg1">
+                    <a:lumMod val="85000"/>
+                  </a:schemeClr>
+                </a:solidFill>
+              </a:rPr>
+              <a:t>attribute</a:t>
+            </a:r>
+            <a:r>
+              <a:rPr lang="pl-PL" dirty="0">
+                <a:solidFill>
+                  <a:schemeClr val="bg1">
+                    <a:lumMod val="85000"/>
+                  </a:schemeClr>
+                </a:solidFill>
+              </a:rPr>
+              <a:t> </a:t>
+            </a:r>
+            <a:r>
+              <a:rPr lang="pl-PL" dirty="0" err="1">
+                <a:solidFill>
+                  <a:schemeClr val="bg1">
+                    <a:lumMod val="85000"/>
+                  </a:schemeClr>
+                </a:solidFill>
+              </a:rPr>
+              <a:t>combinations</a:t>
+            </a:r>
+            <a:r>
+              <a:rPr lang="pl-PL" dirty="0">
+                <a:solidFill>
+                  <a:schemeClr val="bg1">
+                    <a:lumMod val="85000"/>
+                  </a:schemeClr>
+                </a:solidFill>
+              </a:rPr>
+              <a:t>. </a:t>
+            </a:r>
+          </a:p>
+          <a:p>
+            <a:pPr marL="285750" indent="-285750">
+              <a:buFont typeface="Arial" panose="020B0604020202020204" pitchFamily="34" charset="0"/>
+              <a:buChar char="•"/>
+            </a:pPr>
+            <a:r>
+              <a:rPr lang="pl-PL" dirty="0">
+                <a:solidFill>
+                  <a:schemeClr val="bg1">
+                    <a:lumMod val="85000"/>
+                  </a:schemeClr>
+                </a:solidFill>
+              </a:rPr>
+              <a:t> </a:t>
+            </a:r>
+            <a:r>
+              <a:rPr lang="pl-PL" dirty="0" err="1">
+                <a:solidFill>
+                  <a:schemeClr val="bg1">
+                    <a:lumMod val="85000"/>
+                  </a:schemeClr>
+                </a:solidFill>
+              </a:rPr>
+              <a:t>Common</a:t>
+            </a:r>
+            <a:r>
+              <a:rPr lang="pl-PL" dirty="0">
+                <a:solidFill>
+                  <a:schemeClr val="bg1">
+                    <a:lumMod val="85000"/>
+                  </a:schemeClr>
+                </a:solidFill>
+              </a:rPr>
+              <a:t> </a:t>
+            </a:r>
+            <a:r>
+              <a:rPr lang="pl-PL" dirty="0" err="1">
+                <a:solidFill>
+                  <a:schemeClr val="bg1">
+                    <a:lumMod val="85000"/>
+                  </a:schemeClr>
+                </a:solidFill>
+              </a:rPr>
+              <a:t>attribute</a:t>
+            </a:r>
+            <a:r>
+              <a:rPr lang="pl-PL" dirty="0">
+                <a:solidFill>
+                  <a:schemeClr val="bg1">
+                    <a:lumMod val="85000"/>
+                  </a:schemeClr>
+                </a:solidFill>
+              </a:rPr>
+              <a:t> </a:t>
+            </a:r>
+            <a:r>
+              <a:rPr lang="pl-PL" dirty="0" err="1">
+                <a:solidFill>
+                  <a:schemeClr val="bg1">
+                    <a:lumMod val="85000"/>
+                  </a:schemeClr>
+                </a:solidFill>
+              </a:rPr>
+              <a:t>combinations</a:t>
+            </a:r>
+            <a:r>
+              <a:rPr lang="pl-PL" dirty="0">
+                <a:solidFill>
+                  <a:schemeClr val="bg1">
+                    <a:lumMod val="85000"/>
+                  </a:schemeClr>
+                </a:solidFill>
+              </a:rPr>
+              <a:t> </a:t>
+            </a:r>
+            <a:r>
+              <a:rPr lang="pl-PL" dirty="0" err="1">
+                <a:solidFill>
+                  <a:schemeClr val="bg1">
+                    <a:lumMod val="85000"/>
+                  </a:schemeClr>
+                </a:solidFill>
+              </a:rPr>
+              <a:t>produced</a:t>
+            </a:r>
+            <a:r>
+              <a:rPr lang="pl-PL" dirty="0">
+                <a:solidFill>
+                  <a:schemeClr val="bg1">
+                    <a:lumMod val="85000"/>
+                  </a:schemeClr>
+                </a:solidFill>
+              </a:rPr>
+              <a:t> the most </a:t>
+            </a:r>
+            <a:r>
+              <a:rPr lang="pl-PL" dirty="0" err="1">
+                <a:solidFill>
+                  <a:schemeClr val="bg1">
+                    <a:lumMod val="85000"/>
+                  </a:schemeClr>
+                </a:solidFill>
+              </a:rPr>
+              <a:t>realistic</a:t>
+            </a:r>
+            <a:r>
+              <a:rPr lang="pl-PL" dirty="0">
+                <a:solidFill>
+                  <a:schemeClr val="bg1">
+                    <a:lumMod val="85000"/>
+                  </a:schemeClr>
+                </a:solidFill>
+              </a:rPr>
+              <a:t> </a:t>
+            </a:r>
+            <a:r>
+              <a:rPr lang="pl-PL" dirty="0" err="1">
+                <a:solidFill>
+                  <a:schemeClr val="bg1">
+                    <a:lumMod val="85000"/>
+                  </a:schemeClr>
+                </a:solidFill>
+              </a:rPr>
+              <a:t>results</a:t>
+            </a:r>
+            <a:r>
+              <a:rPr lang="pl-PL" dirty="0">
+                <a:solidFill>
+                  <a:schemeClr val="bg1">
+                    <a:lumMod val="85000"/>
+                  </a:schemeClr>
+                </a:solidFill>
+              </a:rPr>
+              <a:t>.</a:t>
+            </a:r>
+          </a:p>
+          <a:p>
+            <a:pPr>
+              <a:buFont typeface="Arial" panose="020B0604020202020204" pitchFamily="34" charset="0"/>
+              <a:buChar char="•"/>
+            </a:pPr>
+            <a:endParaRPr lang="pl-PL" dirty="0">
+              <a:solidFill>
+                <a:schemeClr val="bg1">
+                  <a:lumMod val="85000"/>
+                </a:schemeClr>
+              </a:solidFill>
+            </a:endParaRPr>
+          </a:p>
+          <a:p>
+            <a:pPr>
+              <a:buFont typeface="Arial" panose="020B0604020202020204" pitchFamily="34" charset="0"/>
+              <a:buChar char="•"/>
+            </a:pPr>
+            <a:endParaRPr lang="pl-PL" dirty="0">
+              <a:solidFill>
+                <a:schemeClr val="bg1">
+                  <a:lumMod val="85000"/>
+                </a:schemeClr>
+              </a:solidFill>
+            </a:endParaRPr>
+          </a:p>
+          <a:p>
+            <a:pPr>
+              <a:lnSpc>
+                <a:spcPct val="150000"/>
+              </a:lnSpc>
+            </a:pPr>
+            <a:r>
+              <a:rPr lang="pl-PL" b="1" dirty="0">
+                <a:solidFill>
+                  <a:schemeClr val="bg1">
+                    <a:lumMod val="85000"/>
+                  </a:schemeClr>
+                </a:solidFill>
+              </a:rPr>
+              <a:t>2. The </a:t>
+            </a:r>
+            <a:r>
+              <a:rPr lang="pl-PL" b="1" dirty="0" err="1">
+                <a:solidFill>
+                  <a:schemeClr val="bg1">
+                    <a:lumMod val="85000"/>
+                  </a:schemeClr>
+                </a:solidFill>
+              </a:rPr>
+              <a:t>latent</a:t>
+            </a:r>
+            <a:r>
+              <a:rPr lang="pl-PL" b="1" dirty="0">
+                <a:solidFill>
+                  <a:schemeClr val="bg1">
+                    <a:lumMod val="85000"/>
+                  </a:schemeClr>
+                </a:solidFill>
+              </a:rPr>
+              <a:t> </a:t>
+            </a:r>
+            <a:r>
+              <a:rPr lang="pl-PL" b="1" dirty="0" err="1">
+                <a:solidFill>
+                  <a:schemeClr val="bg1">
+                    <a:lumMod val="85000"/>
+                  </a:schemeClr>
+                </a:solidFill>
+              </a:rPr>
+              <a:t>space</a:t>
+            </a:r>
+            <a:r>
+              <a:rPr lang="pl-PL" b="1" dirty="0">
+                <a:solidFill>
+                  <a:schemeClr val="bg1">
+                    <a:lumMod val="85000"/>
+                  </a:schemeClr>
+                </a:solidFill>
+              </a:rPr>
+              <a:t> </a:t>
+            </a:r>
+            <a:r>
+              <a:rPr lang="pl-PL" b="1" dirty="0" err="1">
+                <a:solidFill>
+                  <a:schemeClr val="bg1">
+                    <a:lumMod val="85000"/>
+                  </a:schemeClr>
+                </a:solidFill>
+              </a:rPr>
+              <a:t>allows</a:t>
+            </a:r>
+            <a:r>
+              <a:rPr lang="pl-PL" b="1" dirty="0">
+                <a:solidFill>
+                  <a:schemeClr val="bg1">
+                    <a:lumMod val="85000"/>
+                  </a:schemeClr>
+                </a:solidFill>
+              </a:rPr>
+              <a:t> </a:t>
+            </a:r>
+            <a:r>
+              <a:rPr lang="pl-PL" b="1" dirty="0" err="1">
+                <a:solidFill>
+                  <a:schemeClr val="bg1">
+                    <a:lumMod val="85000"/>
+                  </a:schemeClr>
+                </a:solidFill>
+              </a:rPr>
+              <a:t>controllable</a:t>
+            </a:r>
+            <a:r>
+              <a:rPr lang="pl-PL" b="1" dirty="0">
+                <a:solidFill>
+                  <a:schemeClr val="bg1">
+                    <a:lumMod val="85000"/>
+                  </a:schemeClr>
+                </a:solidFill>
+              </a:rPr>
+              <a:t> </a:t>
+            </a:r>
+            <a:r>
+              <a:rPr lang="pl-PL" b="1" dirty="0" err="1">
+                <a:solidFill>
+                  <a:schemeClr val="bg1">
+                    <a:lumMod val="85000"/>
+                  </a:schemeClr>
+                </a:solidFill>
+              </a:rPr>
+              <a:t>editing</a:t>
+            </a:r>
+            <a:endParaRPr lang="pl-PL" b="1" dirty="0">
+              <a:solidFill>
+                <a:schemeClr val="bg1">
+                  <a:lumMod val="85000"/>
+                </a:schemeClr>
+              </a:solidFill>
+            </a:endParaRPr>
+          </a:p>
+          <a:p>
+            <a:pPr marL="285750" indent="-285750">
+              <a:buFont typeface="Arial" panose="020B0604020202020204" pitchFamily="34" charset="0"/>
+              <a:buChar char="•"/>
+            </a:pPr>
+            <a:r>
+              <a:rPr lang="pl-PL" dirty="0" err="1">
+                <a:solidFill>
+                  <a:schemeClr val="bg1">
+                    <a:lumMod val="85000"/>
+                  </a:schemeClr>
+                </a:solidFill>
+              </a:rPr>
+              <a:t>Modifying</a:t>
+            </a:r>
+            <a:r>
+              <a:rPr lang="pl-PL" dirty="0">
+                <a:solidFill>
+                  <a:schemeClr val="bg1">
+                    <a:lumMod val="85000"/>
+                  </a:schemeClr>
+                </a:solidFill>
+              </a:rPr>
+              <a:t> the </a:t>
+            </a:r>
+            <a:r>
+              <a:rPr lang="pl-PL" dirty="0" err="1">
+                <a:solidFill>
+                  <a:schemeClr val="bg1">
+                    <a:lumMod val="85000"/>
+                  </a:schemeClr>
+                </a:solidFill>
+              </a:rPr>
+              <a:t>attribute</a:t>
+            </a:r>
+            <a:r>
+              <a:rPr lang="pl-PL" dirty="0">
+                <a:solidFill>
+                  <a:schemeClr val="bg1">
+                    <a:lumMod val="85000"/>
+                  </a:schemeClr>
+                </a:solidFill>
+              </a:rPr>
+              <a:t> </a:t>
+            </a:r>
+            <a:r>
+              <a:rPr lang="pl-PL" dirty="0" err="1">
+                <a:solidFill>
+                  <a:schemeClr val="bg1">
+                    <a:lumMod val="85000"/>
+                  </a:schemeClr>
+                </a:solidFill>
+              </a:rPr>
+              <a:t>vector</a:t>
+            </a:r>
+            <a:r>
+              <a:rPr lang="pl-PL" dirty="0">
+                <a:solidFill>
+                  <a:schemeClr val="bg1">
+                    <a:lumMod val="85000"/>
+                  </a:schemeClr>
+                </a:solidFill>
+              </a:rPr>
+              <a:t> </a:t>
+            </a:r>
+            <a:r>
+              <a:rPr lang="pl-PL" dirty="0" err="1">
+                <a:solidFill>
+                  <a:schemeClr val="bg1">
+                    <a:lumMod val="85000"/>
+                  </a:schemeClr>
+                </a:solidFill>
+              </a:rPr>
+              <a:t>changes</a:t>
+            </a:r>
+            <a:r>
+              <a:rPr lang="pl-PL" dirty="0">
+                <a:solidFill>
+                  <a:schemeClr val="bg1">
+                    <a:lumMod val="85000"/>
+                  </a:schemeClr>
+                </a:solidFill>
+              </a:rPr>
+              <a:t> </a:t>
+            </a:r>
+            <a:r>
+              <a:rPr lang="pl-PL" dirty="0" err="1">
+                <a:solidFill>
+                  <a:schemeClr val="bg1">
+                    <a:lumMod val="85000"/>
+                  </a:schemeClr>
+                </a:solidFill>
+              </a:rPr>
+              <a:t>specific</a:t>
+            </a:r>
+            <a:r>
+              <a:rPr lang="pl-PL" dirty="0">
+                <a:solidFill>
+                  <a:schemeClr val="bg1">
+                    <a:lumMod val="85000"/>
+                  </a:schemeClr>
+                </a:solidFill>
+              </a:rPr>
+              <a:t> </a:t>
+            </a:r>
+            <a:r>
+              <a:rPr lang="pl-PL" dirty="0" err="1">
+                <a:solidFill>
+                  <a:schemeClr val="bg1">
+                    <a:lumMod val="85000"/>
+                  </a:schemeClr>
+                </a:solidFill>
+              </a:rPr>
+              <a:t>visual</a:t>
+            </a:r>
+            <a:r>
+              <a:rPr lang="pl-PL" dirty="0">
+                <a:solidFill>
+                  <a:schemeClr val="bg1">
+                    <a:lumMod val="85000"/>
+                  </a:schemeClr>
+                </a:solidFill>
+              </a:rPr>
+              <a:t> </a:t>
+            </a:r>
+            <a:r>
+              <a:rPr lang="pl-PL" dirty="0" err="1">
+                <a:solidFill>
+                  <a:schemeClr val="bg1">
+                    <a:lumMod val="85000"/>
+                  </a:schemeClr>
+                </a:solidFill>
+              </a:rPr>
+              <a:t>characteristics</a:t>
+            </a:r>
+            <a:r>
+              <a:rPr lang="pl-PL" dirty="0">
+                <a:solidFill>
+                  <a:schemeClr val="bg1">
+                    <a:lumMod val="85000"/>
+                  </a:schemeClr>
+                </a:solidFill>
+              </a:rPr>
+              <a:t> of a face. </a:t>
+            </a:r>
+          </a:p>
+          <a:p>
+            <a:pPr marL="285750" indent="-285750">
+              <a:buFont typeface="Arial" panose="020B0604020202020204" pitchFamily="34" charset="0"/>
+              <a:buChar char="•"/>
+            </a:pPr>
+            <a:r>
+              <a:rPr lang="pl-PL" dirty="0" err="1">
+                <a:solidFill>
+                  <a:schemeClr val="bg1">
+                    <a:lumMod val="85000"/>
+                  </a:schemeClr>
+                </a:solidFill>
+              </a:rPr>
+              <a:t>Smooth</a:t>
+            </a:r>
+            <a:r>
+              <a:rPr lang="pl-PL" dirty="0">
+                <a:solidFill>
+                  <a:schemeClr val="bg1">
+                    <a:lumMod val="85000"/>
+                  </a:schemeClr>
+                </a:solidFill>
+              </a:rPr>
+              <a:t> </a:t>
+            </a:r>
+            <a:r>
+              <a:rPr lang="pl-PL" dirty="0" err="1">
+                <a:solidFill>
+                  <a:schemeClr val="bg1">
+                    <a:lumMod val="85000"/>
+                  </a:schemeClr>
+                </a:solidFill>
+              </a:rPr>
+              <a:t>transitions</a:t>
+            </a:r>
+            <a:r>
+              <a:rPr lang="pl-PL" dirty="0">
+                <a:solidFill>
+                  <a:schemeClr val="bg1">
+                    <a:lumMod val="85000"/>
+                  </a:schemeClr>
+                </a:solidFill>
+              </a:rPr>
+              <a:t> </a:t>
+            </a:r>
+            <a:r>
+              <a:rPr lang="pl-PL" dirty="0" err="1">
+                <a:solidFill>
+                  <a:schemeClr val="bg1">
+                    <a:lumMod val="85000"/>
+                  </a:schemeClr>
+                </a:solidFill>
+              </a:rPr>
+              <a:t>were</a:t>
+            </a:r>
+            <a:r>
+              <a:rPr lang="pl-PL" dirty="0">
+                <a:solidFill>
+                  <a:schemeClr val="bg1">
+                    <a:lumMod val="85000"/>
+                  </a:schemeClr>
+                </a:solidFill>
+              </a:rPr>
+              <a:t> </a:t>
+            </a:r>
+            <a:r>
+              <a:rPr lang="pl-PL" dirty="0" err="1">
+                <a:solidFill>
+                  <a:schemeClr val="bg1">
+                    <a:lumMod val="85000"/>
+                  </a:schemeClr>
+                </a:solidFill>
+              </a:rPr>
+              <a:t>observed</a:t>
+            </a:r>
+            <a:r>
+              <a:rPr lang="pl-PL" dirty="0">
+                <a:solidFill>
+                  <a:schemeClr val="bg1">
+                    <a:lumMod val="85000"/>
+                  </a:schemeClr>
+                </a:solidFill>
+              </a:rPr>
+              <a:t> for </a:t>
+            </a:r>
+            <a:r>
+              <a:rPr lang="pl-PL" dirty="0" err="1">
+                <a:solidFill>
+                  <a:schemeClr val="bg1">
+                    <a:lumMod val="85000"/>
+                  </a:schemeClr>
+                </a:solidFill>
+              </a:rPr>
+              <a:t>attributes</a:t>
+            </a:r>
+            <a:r>
+              <a:rPr lang="pl-PL" dirty="0">
+                <a:solidFill>
+                  <a:schemeClr val="bg1">
+                    <a:lumMod val="85000"/>
+                  </a:schemeClr>
+                </a:solidFill>
+              </a:rPr>
+              <a:t> </a:t>
+            </a:r>
+            <a:r>
+              <a:rPr lang="pl-PL" dirty="0" err="1">
+                <a:solidFill>
+                  <a:schemeClr val="bg1">
+                    <a:lumMod val="85000"/>
+                  </a:schemeClr>
+                </a:solidFill>
+              </a:rPr>
+              <a:t>such</a:t>
+            </a:r>
+            <a:r>
+              <a:rPr lang="pl-PL" dirty="0">
+                <a:solidFill>
+                  <a:schemeClr val="bg1">
+                    <a:lumMod val="85000"/>
+                  </a:schemeClr>
+                </a:solidFill>
+              </a:rPr>
+              <a:t> as </a:t>
+            </a:r>
+            <a:r>
+              <a:rPr lang="pl-PL" dirty="0" err="1">
+                <a:solidFill>
+                  <a:schemeClr val="bg1">
+                    <a:lumMod val="85000"/>
+                  </a:schemeClr>
+                </a:solidFill>
+              </a:rPr>
+              <a:t>gender</a:t>
+            </a:r>
+            <a:r>
+              <a:rPr lang="pl-PL" dirty="0">
+                <a:solidFill>
+                  <a:schemeClr val="bg1">
+                    <a:lumMod val="85000"/>
+                  </a:schemeClr>
+                </a:solidFill>
+              </a:rPr>
+              <a:t> and </a:t>
+            </a:r>
+            <a:r>
+              <a:rPr lang="pl-PL" dirty="0" err="1">
+                <a:solidFill>
+                  <a:schemeClr val="bg1">
+                    <a:lumMod val="85000"/>
+                  </a:schemeClr>
+                </a:solidFill>
+              </a:rPr>
+              <a:t>eyeglasses</a:t>
+            </a:r>
+            <a:r>
+              <a:rPr lang="pl-PL" dirty="0">
+                <a:solidFill>
+                  <a:schemeClr val="bg1">
+                    <a:lumMod val="85000"/>
+                  </a:schemeClr>
+                </a:solidFill>
+              </a:rPr>
+              <a:t>. </a:t>
+            </a:r>
+          </a:p>
+          <a:p>
+            <a:pPr marL="285750" indent="-285750">
+              <a:buFont typeface="Arial" panose="020B0604020202020204" pitchFamily="34" charset="0"/>
+              <a:buChar char="•"/>
+            </a:pPr>
+            <a:r>
+              <a:rPr lang="pl-PL" dirty="0" err="1">
+                <a:solidFill>
+                  <a:schemeClr val="bg1">
+                    <a:lumMod val="85000"/>
+                  </a:schemeClr>
+                </a:solidFill>
+              </a:rPr>
+              <a:t>This</a:t>
+            </a:r>
+            <a:r>
+              <a:rPr lang="pl-PL" dirty="0">
+                <a:solidFill>
+                  <a:schemeClr val="bg1">
+                    <a:lumMod val="85000"/>
+                  </a:schemeClr>
+                </a:solidFill>
+              </a:rPr>
+              <a:t> </a:t>
+            </a:r>
+            <a:r>
+              <a:rPr lang="pl-PL" dirty="0" err="1">
+                <a:solidFill>
+                  <a:schemeClr val="bg1">
+                    <a:lumMod val="85000"/>
+                  </a:schemeClr>
+                </a:solidFill>
+              </a:rPr>
+              <a:t>demonstrates</a:t>
+            </a:r>
+            <a:r>
+              <a:rPr lang="pl-PL" dirty="0">
+                <a:solidFill>
+                  <a:schemeClr val="bg1">
+                    <a:lumMod val="85000"/>
+                  </a:schemeClr>
+                </a:solidFill>
+              </a:rPr>
+              <a:t> </a:t>
+            </a:r>
+            <a:r>
+              <a:rPr lang="pl-PL" dirty="0" err="1">
+                <a:solidFill>
+                  <a:schemeClr val="bg1">
+                    <a:lumMod val="85000"/>
+                  </a:schemeClr>
+                </a:solidFill>
+              </a:rPr>
+              <a:t>that</a:t>
+            </a:r>
+            <a:r>
+              <a:rPr lang="pl-PL" dirty="0">
+                <a:solidFill>
+                  <a:schemeClr val="bg1">
+                    <a:lumMod val="85000"/>
+                  </a:schemeClr>
+                </a:solidFill>
+              </a:rPr>
+              <a:t> the model </a:t>
+            </a:r>
+            <a:r>
+              <a:rPr lang="pl-PL" dirty="0" err="1">
+                <a:solidFill>
+                  <a:schemeClr val="bg1">
+                    <a:lumMod val="85000"/>
+                  </a:schemeClr>
+                </a:solidFill>
+              </a:rPr>
+              <a:t>learned</a:t>
+            </a:r>
+            <a:r>
+              <a:rPr lang="pl-PL" dirty="0">
+                <a:solidFill>
+                  <a:schemeClr val="bg1">
+                    <a:lumMod val="85000"/>
+                  </a:schemeClr>
+                </a:solidFill>
+              </a:rPr>
+              <a:t> </a:t>
+            </a:r>
+            <a:r>
+              <a:rPr lang="pl-PL" dirty="0" err="1">
+                <a:solidFill>
+                  <a:schemeClr val="bg1">
+                    <a:lumMod val="85000"/>
+                  </a:schemeClr>
+                </a:solidFill>
+              </a:rPr>
+              <a:t>interpretable</a:t>
+            </a:r>
+            <a:r>
+              <a:rPr lang="pl-PL" dirty="0">
+                <a:solidFill>
+                  <a:schemeClr val="bg1">
+                    <a:lumMod val="85000"/>
+                  </a:schemeClr>
+                </a:solidFill>
+              </a:rPr>
+              <a:t> </a:t>
+            </a:r>
+            <a:r>
+              <a:rPr lang="pl-PL" dirty="0" err="1">
+                <a:solidFill>
+                  <a:schemeClr val="bg1">
+                    <a:lumMod val="85000"/>
+                  </a:schemeClr>
+                </a:solidFill>
+              </a:rPr>
+              <a:t>attribute</a:t>
+            </a:r>
+            <a:r>
+              <a:rPr lang="pl-PL" dirty="0">
+                <a:solidFill>
+                  <a:schemeClr val="bg1">
+                    <a:lumMod val="85000"/>
+                  </a:schemeClr>
+                </a:solidFill>
+              </a:rPr>
+              <a:t> </a:t>
+            </a:r>
+            <a:r>
+              <a:rPr lang="pl-PL" dirty="0" err="1">
+                <a:solidFill>
+                  <a:schemeClr val="bg1">
+                    <a:lumMod val="85000"/>
+                  </a:schemeClr>
+                </a:solidFill>
+              </a:rPr>
+              <a:t>directions</a:t>
+            </a:r>
+            <a:r>
+              <a:rPr lang="pl-PL" dirty="0">
+                <a:solidFill>
+                  <a:schemeClr val="bg1">
+                    <a:lumMod val="85000"/>
+                  </a:schemeClr>
+                </a:solidFill>
+              </a:rPr>
+              <a:t> in </a:t>
+            </a:r>
+            <a:r>
+              <a:rPr lang="pl-PL" dirty="0" err="1">
+                <a:solidFill>
+                  <a:schemeClr val="bg1">
+                    <a:lumMod val="85000"/>
+                  </a:schemeClr>
+                </a:solidFill>
+              </a:rPr>
+              <a:t>latent</a:t>
+            </a:r>
+            <a:r>
+              <a:rPr lang="pl-PL" dirty="0">
+                <a:solidFill>
+                  <a:schemeClr val="bg1">
+                    <a:lumMod val="85000"/>
+                  </a:schemeClr>
+                </a:solidFill>
+              </a:rPr>
+              <a:t> </a:t>
+            </a:r>
+            <a:r>
+              <a:rPr lang="pl-PL" dirty="0" err="1">
+                <a:solidFill>
+                  <a:schemeClr val="bg1">
+                    <a:lumMod val="85000"/>
+                  </a:schemeClr>
+                </a:solidFill>
+              </a:rPr>
+              <a:t>space</a:t>
+            </a:r>
+            <a:r>
+              <a:rPr lang="pl-PL" dirty="0">
+                <a:solidFill>
+                  <a:schemeClr val="bg1">
+                    <a:lumMod val="85000"/>
+                  </a:schemeClr>
+                </a:solidFill>
+              </a:rPr>
+              <a:t>.</a:t>
+            </a:r>
+          </a:p>
+          <a:p>
+            <a:endParaRPr lang="pl-PL" dirty="0">
+              <a:solidFill>
+                <a:schemeClr val="bg1">
+                  <a:lumMod val="85000"/>
+                </a:schemeClr>
+              </a:solidFill>
+            </a:endParaRPr>
+          </a:p>
+          <a:p>
+            <a:endParaRPr lang="pl-PL" dirty="0">
+              <a:solidFill>
+                <a:schemeClr val="bg1">
+                  <a:lumMod val="85000"/>
+                </a:schemeClr>
+              </a:solidFill>
+            </a:endParaRPr>
+          </a:p>
+          <a:p>
+            <a:pPr>
+              <a:lnSpc>
+                <a:spcPct val="150000"/>
+              </a:lnSpc>
+            </a:pPr>
+            <a:r>
+              <a:rPr lang="pl-PL" b="1" dirty="0">
+                <a:solidFill>
+                  <a:schemeClr val="bg1">
+                    <a:lumMod val="85000"/>
+                  </a:schemeClr>
+                </a:solidFill>
+              </a:rPr>
+              <a:t>3. Model </a:t>
+            </a:r>
+            <a:r>
+              <a:rPr lang="pl-PL" b="1" dirty="0" err="1">
+                <a:solidFill>
+                  <a:schemeClr val="bg1">
+                    <a:lumMod val="85000"/>
+                  </a:schemeClr>
+                </a:solidFill>
+              </a:rPr>
+              <a:t>limitations</a:t>
+            </a:r>
+            <a:r>
+              <a:rPr lang="pl-PL" b="1" dirty="0">
+                <a:solidFill>
+                  <a:schemeClr val="bg1">
+                    <a:lumMod val="85000"/>
+                  </a:schemeClr>
+                </a:solidFill>
+              </a:rPr>
+              <a:t> </a:t>
+            </a:r>
+            <a:r>
+              <a:rPr lang="pl-PL" b="1" dirty="0" err="1">
+                <a:solidFill>
+                  <a:schemeClr val="bg1">
+                    <a:lumMod val="85000"/>
+                  </a:schemeClr>
+                </a:solidFill>
+              </a:rPr>
+              <a:t>remain</a:t>
+            </a:r>
+            <a:r>
+              <a:rPr lang="pl-PL" b="1" dirty="0">
+                <a:solidFill>
+                  <a:schemeClr val="bg1">
+                    <a:lumMod val="85000"/>
+                  </a:schemeClr>
+                </a:solidFill>
+              </a:rPr>
+              <a:t> </a:t>
+            </a:r>
+            <a:r>
+              <a:rPr lang="pl-PL" b="1" dirty="0" err="1">
+                <a:solidFill>
+                  <a:schemeClr val="bg1">
+                    <a:lumMod val="85000"/>
+                  </a:schemeClr>
+                </a:solidFill>
+              </a:rPr>
+              <a:t>significant</a:t>
+            </a:r>
+            <a:endParaRPr lang="pl-PL" b="1" dirty="0">
+              <a:solidFill>
+                <a:schemeClr val="bg1">
+                  <a:lumMod val="85000"/>
+                </a:schemeClr>
+              </a:solidFill>
+            </a:endParaRPr>
+          </a:p>
+          <a:p>
+            <a:pPr marL="285750" indent="-285750">
+              <a:buFont typeface="Arial" panose="020B0604020202020204" pitchFamily="34" charset="0"/>
+              <a:buChar char="•"/>
+            </a:pPr>
+            <a:r>
+              <a:rPr lang="pl-PL" dirty="0">
+                <a:solidFill>
+                  <a:schemeClr val="bg1">
+                    <a:lumMod val="85000"/>
+                  </a:schemeClr>
+                </a:solidFill>
+              </a:rPr>
+              <a:t>Fine image </a:t>
+            </a:r>
+            <a:r>
+              <a:rPr lang="pl-PL" dirty="0" err="1">
+                <a:solidFill>
+                  <a:schemeClr val="bg1">
+                    <a:lumMod val="85000"/>
+                  </a:schemeClr>
+                </a:solidFill>
+              </a:rPr>
+              <a:t>details</a:t>
+            </a:r>
+            <a:r>
+              <a:rPr lang="pl-PL" dirty="0">
+                <a:solidFill>
+                  <a:schemeClr val="bg1">
+                    <a:lumMod val="85000"/>
+                  </a:schemeClr>
+                </a:solidFill>
+              </a:rPr>
+              <a:t> </a:t>
+            </a:r>
+            <a:r>
+              <a:rPr lang="pl-PL" dirty="0" err="1">
+                <a:solidFill>
+                  <a:schemeClr val="bg1">
+                    <a:lumMod val="85000"/>
+                  </a:schemeClr>
+                </a:solidFill>
+              </a:rPr>
+              <a:t>are</a:t>
+            </a:r>
+            <a:r>
+              <a:rPr lang="pl-PL" dirty="0">
+                <a:solidFill>
+                  <a:schemeClr val="bg1">
+                    <a:lumMod val="85000"/>
+                  </a:schemeClr>
+                </a:solidFill>
+              </a:rPr>
+              <a:t> </a:t>
+            </a:r>
+            <a:r>
+              <a:rPr lang="pl-PL" dirty="0" err="1">
+                <a:solidFill>
+                  <a:schemeClr val="bg1">
+                    <a:lumMod val="85000"/>
+                  </a:schemeClr>
+                </a:solidFill>
+              </a:rPr>
+              <a:t>lost</a:t>
+            </a:r>
+            <a:r>
+              <a:rPr lang="pl-PL" dirty="0">
+                <a:solidFill>
+                  <a:schemeClr val="bg1">
+                    <a:lumMod val="85000"/>
+                  </a:schemeClr>
+                </a:solidFill>
+              </a:rPr>
+              <a:t> </a:t>
+            </a:r>
+            <a:r>
+              <a:rPr lang="pl-PL" dirty="0" err="1">
+                <a:solidFill>
+                  <a:schemeClr val="bg1">
+                    <a:lumMod val="85000"/>
+                  </a:schemeClr>
+                </a:solidFill>
+              </a:rPr>
+              <a:t>during</a:t>
+            </a:r>
+            <a:r>
+              <a:rPr lang="pl-PL" dirty="0">
+                <a:solidFill>
+                  <a:schemeClr val="bg1">
+                    <a:lumMod val="85000"/>
+                  </a:schemeClr>
+                </a:solidFill>
+              </a:rPr>
+              <a:t> </a:t>
+            </a:r>
+            <a:r>
+              <a:rPr lang="pl-PL" dirty="0" err="1">
+                <a:solidFill>
+                  <a:schemeClr val="bg1">
+                    <a:lumMod val="85000"/>
+                  </a:schemeClr>
+                </a:solidFill>
+              </a:rPr>
+              <a:t>reconstruction</a:t>
+            </a:r>
+            <a:r>
+              <a:rPr lang="pl-PL" dirty="0">
+                <a:solidFill>
+                  <a:schemeClr val="bg1">
+                    <a:lumMod val="85000"/>
+                  </a:schemeClr>
+                </a:solidFill>
+              </a:rPr>
+              <a:t>. </a:t>
+            </a:r>
+          </a:p>
+          <a:p>
+            <a:pPr marL="285750" indent="-285750">
+              <a:buFont typeface="Arial" panose="020B0604020202020204" pitchFamily="34" charset="0"/>
+              <a:buChar char="•"/>
+            </a:pPr>
+            <a:r>
+              <a:rPr lang="pl-PL" dirty="0" err="1">
+                <a:solidFill>
+                  <a:schemeClr val="bg1">
+                    <a:lumMod val="85000"/>
+                  </a:schemeClr>
+                </a:solidFill>
+              </a:rPr>
+              <a:t>Rare</a:t>
+            </a:r>
+            <a:r>
+              <a:rPr lang="pl-PL" dirty="0">
+                <a:solidFill>
+                  <a:schemeClr val="bg1">
+                    <a:lumMod val="85000"/>
+                  </a:schemeClr>
+                </a:solidFill>
+              </a:rPr>
+              <a:t> </a:t>
+            </a:r>
+            <a:r>
+              <a:rPr lang="pl-PL" dirty="0" err="1">
+                <a:solidFill>
+                  <a:schemeClr val="bg1">
+                    <a:lumMod val="85000"/>
+                  </a:schemeClr>
+                </a:solidFill>
+              </a:rPr>
+              <a:t>or</a:t>
+            </a:r>
+            <a:r>
+              <a:rPr lang="pl-PL" dirty="0">
+                <a:solidFill>
+                  <a:schemeClr val="bg1">
+                    <a:lumMod val="85000"/>
+                  </a:schemeClr>
+                </a:solidFill>
+              </a:rPr>
+              <a:t> </a:t>
+            </a:r>
+            <a:r>
+              <a:rPr lang="pl-PL" dirty="0" err="1">
+                <a:solidFill>
+                  <a:schemeClr val="bg1">
+                    <a:lumMod val="85000"/>
+                  </a:schemeClr>
+                </a:solidFill>
+              </a:rPr>
+              <a:t>conflicting</a:t>
+            </a:r>
+            <a:r>
+              <a:rPr lang="pl-PL" dirty="0">
+                <a:solidFill>
+                  <a:schemeClr val="bg1">
+                    <a:lumMod val="85000"/>
+                  </a:schemeClr>
+                </a:solidFill>
+              </a:rPr>
+              <a:t> </a:t>
+            </a:r>
+            <a:r>
+              <a:rPr lang="pl-PL" dirty="0" err="1">
+                <a:solidFill>
+                  <a:schemeClr val="bg1">
+                    <a:lumMod val="85000"/>
+                  </a:schemeClr>
+                </a:solidFill>
+              </a:rPr>
+              <a:t>attributes</a:t>
+            </a:r>
+            <a:r>
+              <a:rPr lang="pl-PL" dirty="0">
+                <a:solidFill>
+                  <a:schemeClr val="bg1">
+                    <a:lumMod val="85000"/>
+                  </a:schemeClr>
+                </a:solidFill>
+              </a:rPr>
+              <a:t> </a:t>
+            </a:r>
+            <a:r>
+              <a:rPr lang="pl-PL" dirty="0" err="1">
+                <a:solidFill>
+                  <a:schemeClr val="bg1">
+                    <a:lumMod val="85000"/>
+                  </a:schemeClr>
+                </a:solidFill>
+              </a:rPr>
+              <a:t>are</a:t>
+            </a:r>
+            <a:r>
+              <a:rPr lang="pl-PL" dirty="0">
+                <a:solidFill>
+                  <a:schemeClr val="bg1">
+                    <a:lumMod val="85000"/>
+                  </a:schemeClr>
+                </a:solidFill>
+              </a:rPr>
+              <a:t> </a:t>
+            </a:r>
+            <a:r>
+              <a:rPr lang="pl-PL" dirty="0" err="1">
+                <a:solidFill>
+                  <a:schemeClr val="bg1">
+                    <a:lumMod val="85000"/>
+                  </a:schemeClr>
+                </a:solidFill>
+              </a:rPr>
+              <a:t>generated</a:t>
+            </a:r>
+            <a:r>
+              <a:rPr lang="pl-PL" dirty="0">
+                <a:solidFill>
+                  <a:schemeClr val="bg1">
+                    <a:lumMod val="85000"/>
+                  </a:schemeClr>
+                </a:solidFill>
+              </a:rPr>
+              <a:t> less </a:t>
+            </a:r>
+            <a:r>
+              <a:rPr lang="pl-PL" dirty="0" err="1">
+                <a:solidFill>
+                  <a:schemeClr val="bg1">
+                    <a:lumMod val="85000"/>
+                  </a:schemeClr>
+                </a:solidFill>
+              </a:rPr>
+              <a:t>reliably</a:t>
+            </a:r>
+            <a:r>
+              <a:rPr lang="pl-PL" dirty="0">
+                <a:solidFill>
+                  <a:schemeClr val="bg1">
+                    <a:lumMod val="85000"/>
+                  </a:schemeClr>
+                </a:solidFill>
+              </a:rPr>
+              <a:t>. </a:t>
+            </a:r>
+          </a:p>
+          <a:p>
+            <a:pPr marL="285750" indent="-285750">
+              <a:buFont typeface="Arial" panose="020B0604020202020204" pitchFamily="34" charset="0"/>
+              <a:buChar char="•"/>
+            </a:pPr>
+            <a:r>
+              <a:rPr lang="pl-PL" dirty="0" err="1">
+                <a:solidFill>
+                  <a:schemeClr val="bg1">
+                    <a:lumMod val="85000"/>
+                  </a:schemeClr>
+                </a:solidFill>
+              </a:rPr>
+              <a:t>Some</a:t>
+            </a:r>
+            <a:r>
+              <a:rPr lang="pl-PL" dirty="0">
+                <a:solidFill>
+                  <a:schemeClr val="bg1">
+                    <a:lumMod val="85000"/>
+                  </a:schemeClr>
+                </a:solidFill>
+              </a:rPr>
+              <a:t> </a:t>
+            </a:r>
+            <a:r>
+              <a:rPr lang="pl-PL" dirty="0" err="1">
+                <a:solidFill>
+                  <a:schemeClr val="bg1">
+                    <a:lumMod val="85000"/>
+                  </a:schemeClr>
+                </a:solidFill>
+              </a:rPr>
+              <a:t>concepts</a:t>
+            </a:r>
+            <a:r>
+              <a:rPr lang="pl-PL" dirty="0">
+                <a:solidFill>
+                  <a:schemeClr val="bg1">
+                    <a:lumMod val="85000"/>
+                  </a:schemeClr>
+                </a:solidFill>
+              </a:rPr>
+              <a:t> (</a:t>
+            </a:r>
+            <a:r>
+              <a:rPr lang="pl-PL" dirty="0" err="1">
+                <a:solidFill>
+                  <a:schemeClr val="bg1">
+                    <a:lumMod val="85000"/>
+                  </a:schemeClr>
+                </a:solidFill>
+              </a:rPr>
+              <a:t>e.g</a:t>
+            </a:r>
+            <a:r>
+              <a:rPr lang="pl-PL" dirty="0">
+                <a:solidFill>
+                  <a:schemeClr val="bg1">
+                    <a:lumMod val="85000"/>
+                  </a:schemeClr>
+                </a:solidFill>
+              </a:rPr>
+              <a:t>. </a:t>
+            </a:r>
+            <a:r>
+              <a:rPr lang="pl-PL" dirty="0" err="1">
+                <a:solidFill>
+                  <a:schemeClr val="bg1">
+                    <a:lumMod val="85000"/>
+                  </a:schemeClr>
+                </a:solidFill>
+              </a:rPr>
+              <a:t>baldness</a:t>
+            </a:r>
+            <a:r>
+              <a:rPr lang="pl-PL" dirty="0">
+                <a:solidFill>
+                  <a:schemeClr val="bg1">
+                    <a:lumMod val="85000"/>
+                  </a:schemeClr>
+                </a:solidFill>
+              </a:rPr>
+              <a:t>) </a:t>
+            </a:r>
+            <a:r>
+              <a:rPr lang="pl-PL" dirty="0" err="1">
+                <a:solidFill>
+                  <a:schemeClr val="bg1">
+                    <a:lumMod val="85000"/>
+                  </a:schemeClr>
+                </a:solidFill>
+              </a:rPr>
+              <a:t>are</a:t>
+            </a:r>
+            <a:r>
+              <a:rPr lang="pl-PL" dirty="0">
+                <a:solidFill>
+                  <a:schemeClr val="bg1">
+                    <a:lumMod val="85000"/>
+                  </a:schemeClr>
+                </a:solidFill>
+              </a:rPr>
+              <a:t> </a:t>
+            </a:r>
+            <a:r>
+              <a:rPr lang="pl-PL" dirty="0" err="1">
+                <a:solidFill>
+                  <a:schemeClr val="bg1">
+                    <a:lumMod val="85000"/>
+                  </a:schemeClr>
+                </a:solidFill>
+              </a:rPr>
+              <a:t>only</a:t>
+            </a:r>
+            <a:r>
+              <a:rPr lang="pl-PL" dirty="0">
+                <a:solidFill>
+                  <a:schemeClr val="bg1">
+                    <a:lumMod val="85000"/>
+                  </a:schemeClr>
+                </a:solidFill>
+              </a:rPr>
+              <a:t> </a:t>
+            </a:r>
+            <a:r>
+              <a:rPr lang="pl-PL" dirty="0" err="1">
+                <a:solidFill>
+                  <a:schemeClr val="bg1">
+                    <a:lumMod val="85000"/>
+                  </a:schemeClr>
+                </a:solidFill>
+              </a:rPr>
+              <a:t>partially</a:t>
+            </a:r>
+            <a:r>
+              <a:rPr lang="pl-PL" dirty="0">
+                <a:solidFill>
+                  <a:schemeClr val="bg1">
+                    <a:lumMod val="85000"/>
+                  </a:schemeClr>
+                </a:solidFill>
+              </a:rPr>
+              <a:t> </a:t>
+            </a:r>
+            <a:r>
+              <a:rPr lang="pl-PL" dirty="0" err="1">
+                <a:solidFill>
+                  <a:schemeClr val="bg1">
+                    <a:lumMod val="85000"/>
+                  </a:schemeClr>
+                </a:solidFill>
+              </a:rPr>
+              <a:t>understood</a:t>
+            </a:r>
+            <a:r>
+              <a:rPr lang="pl-PL" dirty="0">
+                <a:solidFill>
+                  <a:schemeClr val="bg1">
+                    <a:lumMod val="85000"/>
+                  </a:schemeClr>
+                </a:solidFill>
+              </a:rPr>
+              <a:t> by the model.</a:t>
+            </a:r>
+          </a:p>
+          <a:p>
+            <a:endParaRPr lang="pl-PL" dirty="0">
+              <a:solidFill>
+                <a:schemeClr val="bg1">
+                  <a:lumMod val="85000"/>
+                </a:schemeClr>
+              </a:solidFill>
+            </a:endParaRPr>
           </a:p>
         </p:txBody>
       </p:sp>
@@ -2994,14 +4763,11 @@
                 </a:solidFill>
               </a:defRPr>
             </a:pPr>
-            <a:r>
-              <a:rPr sz="1350">
-                <a:solidFill>
-                  <a:srgbClr val="B7C0D1"/>
-                </a:solidFill>
-              </a:rPr>
-              <a:t>The dataset provides rich labels, but the model only needs a subset for focused experiments.</a:t>
-            </a:r>
+            <a:endParaRPr sz="1350" dirty="0">
+              <a:solidFill>
+                <a:srgbClr val="B7C0D1"/>
+              </a:solidFill>
+            </a:endParaRPr>
           </a:p>
         </p:txBody>
       </p:sp>
@@ -3049,1208 +4815,6 @@
 </file>
 
 <file path=ppt/slides/slide4.xml><?xml version="1.0" encoding="utf-8"?>
-<p:sld xmlns:a="http://schemas.openxmlformats.org/drawingml/2006/main" xmlns:r="http://schemas.openxmlformats.org/officeDocument/2006/relationships" xmlns:p="http://schemas.openxmlformats.org/presentationml/2006/main">
-  <p:cSld>
-    <p:bg>
-      <p:bgPr>
-        <a:solidFill>
-          <a:srgbClr val="1B1F27"/>
-        </a:solidFill>
-        <a:effectLst/>
-      </p:bgPr>
-    </p:bg>
-    <p:spTree>
-      <p:nvGrpSpPr>
-        <p:cNvPr id="1" name=""/>
-        <p:cNvGrpSpPr/>
-        <p:nvPr/>
-      </p:nvGrpSpPr>
-      <p:grpSpPr>
-        <a:xfrm>
-          <a:off x="0" y="0"/>
-          <a:ext cx="0" cy="0"/>
-          <a:chOff x="0" y="0"/>
-          <a:chExt cx="0" cy="0"/>
-        </a:xfrm>
-      </p:grpSpPr>
-      <p:sp>
-        <p:nvSpPr>
-          <p:cNvPr id="21" name="Prostokąt 20">
-            <a:extLst>
-              <a:ext uri="{FF2B5EF4-FFF2-40B4-BE49-F238E27FC236}">
-                <a16:creationId xmlns:a16="http://schemas.microsoft.com/office/drawing/2014/main" id="{95EE903E-B0CF-47C3-B13D-4E3772E70341}"/>
-              </a:ext>
-            </a:extLst>
-          </p:cNvPr>
-          <p:cNvSpPr>
-            <a:spLocks noGrp="1"/>
-          </p:cNvSpPr>
-          <p:nvPr/>
-        </p:nvSpPr>
-        <p:spPr>
-          <a:xfrm>
-            <a:off x="609600" y="400050"/>
-            <a:ext cx="9334500" cy="685800"/>
-          </a:xfrm>
-          <a:prstGeom prst="rect">
-            <a:avLst/>
-          </a:prstGeom>
-          <a:noFill/>
-          <a:ln w="0">
-            <a:noFill/>
-            <a:prstDash val="solid"/>
-          </a:ln>
-        </p:spPr>
-        <p:txBody>
-          <a:bodyPr/>
-          <a:lstStyle/>
-          <a:p>
-            <a:pPr>
-              <a:defRPr sz="3300" b="1">
-                <a:solidFill>
-                  <a:srgbClr val="F6F7FB"/>
-                </a:solidFill>
-              </a:defRPr>
-            </a:pPr>
-            <a:r>
-              <a:rPr sz="3300" b="1">
-                <a:solidFill>
-                  <a:srgbClr val="F6F7FB"/>
-                </a:solidFill>
-              </a:rPr>
-              <a:t>Model</a:t>
-            </a:r>
-          </a:p>
-        </p:txBody>
-      </p:sp>
-      <p:sp>
-        <p:nvSpPr>
-          <p:cNvPr id="2" name="Prostokąt 1">
-            <a:extLst>
-              <a:ext uri="{FF2B5EF4-FFF2-40B4-BE49-F238E27FC236}">
-                <a16:creationId xmlns:a16="http://schemas.microsoft.com/office/drawing/2014/main" id="{F0A58F03-E066-4ED6-A9B5-9EE8836E2469}"/>
-              </a:ext>
-            </a:extLst>
-          </p:cNvPr>
-          <p:cNvSpPr>
-            <a:spLocks noGrp="1"/>
-          </p:cNvSpPr>
-          <p:nvPr/>
-        </p:nvSpPr>
-        <p:spPr>
-          <a:xfrm>
-            <a:off x="609600" y="1009650"/>
-            <a:ext cx="9334500" cy="323850"/>
-          </a:xfrm>
-          <a:prstGeom prst="rect">
-            <a:avLst/>
-          </a:prstGeom>
-          <a:noFill/>
-          <a:ln w="0">
-            <a:noFill/>
-            <a:prstDash val="solid"/>
-          </a:ln>
-        </p:spPr>
-        <p:txBody>
-          <a:bodyPr/>
-          <a:lstStyle/>
-          <a:p>
-            <a:pPr>
-              <a:defRPr sz="1500">
-                <a:solidFill>
-                  <a:srgbClr val="B7C0D1"/>
-                </a:solidFill>
-              </a:defRPr>
-            </a:pPr>
-            <a:r>
-              <a:rPr sz="1500" dirty="0">
-                <a:solidFill>
-                  <a:srgbClr val="B7C0D1"/>
-                </a:solidFill>
-              </a:rPr>
-              <a:t>Conditional VAE with attribute conditioning in both encoder and decoder.</a:t>
-            </a:r>
-          </a:p>
-        </p:txBody>
-      </p:sp>
-      <p:sp>
-        <p:nvSpPr>
-          <p:cNvPr id="3" name="Prostokąt 2">
-            <a:extLst>
-              <a:ext uri="{FF2B5EF4-FFF2-40B4-BE49-F238E27FC236}">
-                <a16:creationId xmlns:a16="http://schemas.microsoft.com/office/drawing/2014/main" id="{B84DACB6-2C77-481B-AA64-A88205A7E96A}"/>
-              </a:ext>
-            </a:extLst>
-          </p:cNvPr>
-          <p:cNvSpPr>
-            <a:spLocks noGrp="1"/>
-          </p:cNvSpPr>
-          <p:nvPr/>
-        </p:nvSpPr>
-        <p:spPr>
-          <a:xfrm>
-            <a:off x="609600" y="1466850"/>
-            <a:ext cx="1123950" cy="38100"/>
-          </a:xfrm>
-          <a:prstGeom prst="rect">
-            <a:avLst/>
-          </a:prstGeom>
-          <a:solidFill>
-            <a:srgbClr val="4EA1FF"/>
-          </a:solidFill>
-          <a:ln w="0">
-            <a:solidFill>
-              <a:srgbClr val="4EA1FF"/>
-            </a:solidFill>
-            <a:prstDash val="solid"/>
-          </a:ln>
-        </p:spPr>
-        <p:txBody>
-          <a:bodyPr/>
-          <a:lstStyle/>
-          <a:p>
-            <a:endParaRPr lang="pl-PL"/>
-          </a:p>
-        </p:txBody>
-      </p:sp>
-      <p:sp>
-        <p:nvSpPr>
-          <p:cNvPr id="4" name="Prostokąt: zaokrąglone rogi 3">
-            <a:extLst>
-              <a:ext uri="{FF2B5EF4-FFF2-40B4-BE49-F238E27FC236}">
-                <a16:creationId xmlns:a16="http://schemas.microsoft.com/office/drawing/2014/main" id="{7CA742CB-65E5-4BFB-9046-59BD8A744EB4}"/>
-              </a:ext>
-            </a:extLst>
-          </p:cNvPr>
-          <p:cNvSpPr>
-            <a:spLocks noGrp="1"/>
-          </p:cNvSpPr>
-          <p:nvPr/>
-        </p:nvSpPr>
-        <p:spPr>
-          <a:xfrm>
-            <a:off x="3429000" y="1524000"/>
-            <a:ext cx="5334000" cy="647700"/>
-          </a:xfrm>
-          <a:prstGeom prst="roundRect">
-            <a:avLst>
-              <a:gd name="adj" fmla="val 23529"/>
-            </a:avLst>
-          </a:prstGeom>
-          <a:solidFill>
-            <a:srgbClr val="2B3442"/>
-          </a:solidFill>
-          <a:ln w="9525">
-            <a:solidFill>
-              <a:srgbClr val="313C4D"/>
-            </a:solidFill>
-            <a:prstDash val="solid"/>
-          </a:ln>
-        </p:spPr>
-        <p:txBody>
-          <a:bodyPr/>
-          <a:lstStyle/>
-          <a:p>
-            <a:endParaRPr lang="pl-PL"/>
-          </a:p>
-        </p:txBody>
-      </p:sp>
-      <p:sp>
-        <p:nvSpPr>
-          <p:cNvPr id="5" name="Prostokąt 4">
-            <a:extLst>
-              <a:ext uri="{FF2B5EF4-FFF2-40B4-BE49-F238E27FC236}">
-                <a16:creationId xmlns:a16="http://schemas.microsoft.com/office/drawing/2014/main" id="{872462CE-C345-46EE-8B2D-956BB2990D31}"/>
-              </a:ext>
-            </a:extLst>
-          </p:cNvPr>
-          <p:cNvSpPr>
-            <a:spLocks noGrp="1"/>
-          </p:cNvSpPr>
-          <p:nvPr/>
-        </p:nvSpPr>
-        <p:spPr>
-          <a:xfrm>
-            <a:off x="3429000" y="1657350"/>
-            <a:ext cx="5334000" cy="342900"/>
-          </a:xfrm>
-          <a:prstGeom prst="rect">
-            <a:avLst/>
-          </a:prstGeom>
-          <a:noFill/>
-          <a:ln w="0">
-            <a:noFill/>
-            <a:prstDash val="solid"/>
-          </a:ln>
-        </p:spPr>
-        <p:txBody>
-          <a:bodyPr/>
-          <a:lstStyle/>
-          <a:p>
-            <a:pPr>
-              <a:defRPr sz="1800" b="1">
-                <a:solidFill>
-                  <a:srgbClr val="F6F7FB"/>
-                </a:solidFill>
-              </a:defRPr>
-            </a:pPr>
-            <a:r>
-              <a:rPr sz="1800" b="1">
-                <a:solidFill>
-                  <a:srgbClr val="F6F7FB"/>
-                </a:solidFill>
-              </a:rPr>
-              <a:t>Face + Attributes</a:t>
-            </a:r>
-          </a:p>
-        </p:txBody>
-      </p:sp>
-      <p:sp>
-        <p:nvSpPr>
-          <p:cNvPr id="6" name="Prostokąt 5">
-            <a:extLst>
-              <a:ext uri="{FF2B5EF4-FFF2-40B4-BE49-F238E27FC236}">
-                <a16:creationId xmlns:a16="http://schemas.microsoft.com/office/drawing/2014/main" id="{77DD9196-4648-4D7B-A245-153378DC3B6A}"/>
-              </a:ext>
-            </a:extLst>
-          </p:cNvPr>
-          <p:cNvSpPr>
-            <a:spLocks noGrp="1"/>
-          </p:cNvSpPr>
-          <p:nvPr/>
-        </p:nvSpPr>
-        <p:spPr>
-          <a:xfrm>
-            <a:off x="5810250" y="2152650"/>
-            <a:ext cx="571500" cy="285750"/>
-          </a:xfrm>
-          <a:prstGeom prst="rect">
-            <a:avLst/>
-          </a:prstGeom>
-          <a:noFill/>
-          <a:ln w="0">
-            <a:noFill/>
-            <a:prstDash val="solid"/>
-          </a:ln>
-        </p:spPr>
-        <p:txBody>
-          <a:bodyPr/>
-          <a:lstStyle/>
-          <a:p>
-            <a:pPr>
-              <a:defRPr sz="2100" b="1">
-                <a:solidFill>
-                  <a:srgbClr val="4EA1FF"/>
-                </a:solidFill>
-              </a:defRPr>
-            </a:pPr>
-            <a:r>
-              <a:rPr sz="2100" b="1">
-                <a:solidFill>
-                  <a:srgbClr val="4EA1FF"/>
-                </a:solidFill>
-              </a:rPr>
-              <a:t>↓</a:t>
-            </a:r>
-          </a:p>
-        </p:txBody>
-      </p:sp>
-      <p:sp>
-        <p:nvSpPr>
-          <p:cNvPr id="7" name="Prostokąt: zaokrąglone rogi 6">
-            <a:extLst>
-              <a:ext uri="{FF2B5EF4-FFF2-40B4-BE49-F238E27FC236}">
-                <a16:creationId xmlns:a16="http://schemas.microsoft.com/office/drawing/2014/main" id="{7314AE50-CE68-4C0F-8ABF-312ABFD0268E}"/>
-              </a:ext>
-            </a:extLst>
-          </p:cNvPr>
-          <p:cNvSpPr>
-            <a:spLocks noGrp="1"/>
-          </p:cNvSpPr>
-          <p:nvPr/>
-        </p:nvSpPr>
-        <p:spPr>
-          <a:xfrm>
-            <a:off x="3429000" y="2419350"/>
-            <a:ext cx="5334000" cy="647700"/>
-          </a:xfrm>
-          <a:prstGeom prst="roundRect">
-            <a:avLst>
-              <a:gd name="adj" fmla="val 23529"/>
-            </a:avLst>
-          </a:prstGeom>
-          <a:solidFill>
-            <a:srgbClr val="232A35"/>
-          </a:solidFill>
-          <a:ln w="9525">
-            <a:solidFill>
-              <a:srgbClr val="4EA1FF"/>
-            </a:solidFill>
-            <a:prstDash val="solid"/>
-          </a:ln>
-        </p:spPr>
-        <p:txBody>
-          <a:bodyPr/>
-          <a:lstStyle/>
-          <a:p>
-            <a:endParaRPr lang="pl-PL"/>
-          </a:p>
-        </p:txBody>
-      </p:sp>
-      <p:sp>
-        <p:nvSpPr>
-          <p:cNvPr id="8" name="Prostokąt 7">
-            <a:extLst>
-              <a:ext uri="{FF2B5EF4-FFF2-40B4-BE49-F238E27FC236}">
-                <a16:creationId xmlns:a16="http://schemas.microsoft.com/office/drawing/2014/main" id="{717866FE-B83F-41A6-98DB-783AD14BB732}"/>
-              </a:ext>
-            </a:extLst>
-          </p:cNvPr>
-          <p:cNvSpPr>
-            <a:spLocks noGrp="1"/>
-          </p:cNvSpPr>
-          <p:nvPr/>
-        </p:nvSpPr>
-        <p:spPr>
-          <a:xfrm>
-            <a:off x="3429000" y="2552700"/>
-            <a:ext cx="5334000" cy="342900"/>
-          </a:xfrm>
-          <a:prstGeom prst="rect">
-            <a:avLst/>
-          </a:prstGeom>
-          <a:noFill/>
-          <a:ln w="0">
-            <a:noFill/>
-            <a:prstDash val="solid"/>
-          </a:ln>
-        </p:spPr>
-        <p:txBody>
-          <a:bodyPr/>
-          <a:lstStyle/>
-          <a:p>
-            <a:pPr>
-              <a:defRPr sz="1800" b="1">
-                <a:solidFill>
-                  <a:srgbClr val="F6F7FB"/>
-                </a:solidFill>
-              </a:defRPr>
-            </a:pPr>
-            <a:r>
-              <a:rPr sz="1800" b="1">
-                <a:solidFill>
-                  <a:srgbClr val="F6F7FB"/>
-                </a:solidFill>
-              </a:rPr>
-              <a:t>Encoder</a:t>
-            </a:r>
-          </a:p>
-        </p:txBody>
-      </p:sp>
-      <p:sp>
-        <p:nvSpPr>
-          <p:cNvPr id="9" name="Prostokąt 8">
-            <a:extLst>
-              <a:ext uri="{FF2B5EF4-FFF2-40B4-BE49-F238E27FC236}">
-                <a16:creationId xmlns:a16="http://schemas.microsoft.com/office/drawing/2014/main" id="{BE341783-EF1D-4776-96C3-2A7E99A0A7AA}"/>
-              </a:ext>
-            </a:extLst>
-          </p:cNvPr>
-          <p:cNvSpPr>
-            <a:spLocks noGrp="1"/>
-          </p:cNvSpPr>
-          <p:nvPr/>
-        </p:nvSpPr>
-        <p:spPr>
-          <a:xfrm>
-            <a:off x="5810250" y="3048000"/>
-            <a:ext cx="571500" cy="285750"/>
-          </a:xfrm>
-          <a:prstGeom prst="rect">
-            <a:avLst/>
-          </a:prstGeom>
-          <a:noFill/>
-          <a:ln w="0">
-            <a:noFill/>
-            <a:prstDash val="solid"/>
-          </a:ln>
-        </p:spPr>
-        <p:txBody>
-          <a:bodyPr/>
-          <a:lstStyle/>
-          <a:p>
-            <a:pPr>
-              <a:defRPr sz="2100" b="1">
-                <a:solidFill>
-                  <a:srgbClr val="4EA1FF"/>
-                </a:solidFill>
-              </a:defRPr>
-            </a:pPr>
-            <a:r>
-              <a:rPr sz="2100" b="1">
-                <a:solidFill>
-                  <a:srgbClr val="4EA1FF"/>
-                </a:solidFill>
-              </a:rPr>
-              <a:t>↓</a:t>
-            </a:r>
-          </a:p>
-        </p:txBody>
-      </p:sp>
-      <p:sp>
-        <p:nvSpPr>
-          <p:cNvPr id="10" name="Prostokąt: zaokrąglone rogi 9">
-            <a:extLst>
-              <a:ext uri="{FF2B5EF4-FFF2-40B4-BE49-F238E27FC236}">
-                <a16:creationId xmlns:a16="http://schemas.microsoft.com/office/drawing/2014/main" id="{F0791412-7A39-4E7E-A45D-0172931F62B0}"/>
-              </a:ext>
-            </a:extLst>
-          </p:cNvPr>
-          <p:cNvSpPr>
-            <a:spLocks noGrp="1"/>
-          </p:cNvSpPr>
-          <p:nvPr/>
-        </p:nvSpPr>
-        <p:spPr>
-          <a:xfrm>
-            <a:off x="3429000" y="3314700"/>
-            <a:ext cx="5334000" cy="647700"/>
-          </a:xfrm>
-          <a:prstGeom prst="roundRect">
-            <a:avLst>
-              <a:gd name="adj" fmla="val 23529"/>
-            </a:avLst>
-          </a:prstGeom>
-          <a:solidFill>
-            <a:srgbClr val="2B3442"/>
-          </a:solidFill>
-          <a:ln w="9525">
-            <a:solidFill>
-              <a:srgbClr val="313C4D"/>
-            </a:solidFill>
-            <a:prstDash val="solid"/>
-          </a:ln>
-        </p:spPr>
-        <p:txBody>
-          <a:bodyPr/>
-          <a:lstStyle/>
-          <a:p>
-            <a:endParaRPr lang="pl-PL"/>
-          </a:p>
-        </p:txBody>
-      </p:sp>
-      <p:sp>
-        <p:nvSpPr>
-          <p:cNvPr id="11" name="Prostokąt 10">
-            <a:extLst>
-              <a:ext uri="{FF2B5EF4-FFF2-40B4-BE49-F238E27FC236}">
-                <a16:creationId xmlns:a16="http://schemas.microsoft.com/office/drawing/2014/main" id="{3E0B0EDE-CDFF-4AB3-A6E4-DEFA09C9BD6C}"/>
-              </a:ext>
-            </a:extLst>
-          </p:cNvPr>
-          <p:cNvSpPr>
-            <a:spLocks noGrp="1"/>
-          </p:cNvSpPr>
-          <p:nvPr/>
-        </p:nvSpPr>
-        <p:spPr>
-          <a:xfrm>
-            <a:off x="3429000" y="3448050"/>
-            <a:ext cx="5334000" cy="342900"/>
-          </a:xfrm>
-          <a:prstGeom prst="rect">
-            <a:avLst/>
-          </a:prstGeom>
-          <a:noFill/>
-          <a:ln w="0">
-            <a:noFill/>
-            <a:prstDash val="solid"/>
-          </a:ln>
-        </p:spPr>
-        <p:txBody>
-          <a:bodyPr/>
-          <a:lstStyle/>
-          <a:p>
-            <a:pPr>
-              <a:defRPr sz="1800" b="1">
-                <a:solidFill>
-                  <a:srgbClr val="F6F7FB"/>
-                </a:solidFill>
-              </a:defRPr>
-            </a:pPr>
-            <a:r>
-              <a:rPr sz="1800" b="1">
-                <a:solidFill>
-                  <a:srgbClr val="F6F7FB"/>
-                </a:solidFill>
-              </a:rPr>
-              <a:t>Latent z</a:t>
-            </a:r>
-          </a:p>
-        </p:txBody>
-      </p:sp>
-      <p:sp>
-        <p:nvSpPr>
-          <p:cNvPr id="12" name="Prostokąt 11">
-            <a:extLst>
-              <a:ext uri="{FF2B5EF4-FFF2-40B4-BE49-F238E27FC236}">
-                <a16:creationId xmlns:a16="http://schemas.microsoft.com/office/drawing/2014/main" id="{E367F921-7756-40D8-85FB-451276983B7E}"/>
-              </a:ext>
-            </a:extLst>
-          </p:cNvPr>
-          <p:cNvSpPr>
-            <a:spLocks noGrp="1"/>
-          </p:cNvSpPr>
-          <p:nvPr/>
-        </p:nvSpPr>
-        <p:spPr>
-          <a:xfrm>
-            <a:off x="5810250" y="3943350"/>
-            <a:ext cx="571500" cy="285750"/>
-          </a:xfrm>
-          <a:prstGeom prst="rect">
-            <a:avLst/>
-          </a:prstGeom>
-          <a:noFill/>
-          <a:ln w="0">
-            <a:noFill/>
-            <a:prstDash val="solid"/>
-          </a:ln>
-        </p:spPr>
-        <p:txBody>
-          <a:bodyPr/>
-          <a:lstStyle/>
-          <a:p>
-            <a:pPr>
-              <a:defRPr sz="2100" b="1">
-                <a:solidFill>
-                  <a:srgbClr val="4EA1FF"/>
-                </a:solidFill>
-              </a:defRPr>
-            </a:pPr>
-            <a:r>
-              <a:rPr sz="2100" b="1">
-                <a:solidFill>
-                  <a:srgbClr val="4EA1FF"/>
-                </a:solidFill>
-              </a:rPr>
-              <a:t>↓</a:t>
-            </a:r>
-          </a:p>
-        </p:txBody>
-      </p:sp>
-      <p:sp>
-        <p:nvSpPr>
-          <p:cNvPr id="13" name="Prostokąt: zaokrąglone rogi 12">
-            <a:extLst>
-              <a:ext uri="{FF2B5EF4-FFF2-40B4-BE49-F238E27FC236}">
-                <a16:creationId xmlns:a16="http://schemas.microsoft.com/office/drawing/2014/main" id="{3C5BE33F-7076-4F79-9D1A-F0BAA6D7C3C7}"/>
-              </a:ext>
-            </a:extLst>
-          </p:cNvPr>
-          <p:cNvSpPr>
-            <a:spLocks noGrp="1"/>
-          </p:cNvSpPr>
-          <p:nvPr/>
-        </p:nvSpPr>
-        <p:spPr>
-          <a:xfrm>
-            <a:off x="3429000" y="4210050"/>
-            <a:ext cx="5334000" cy="647700"/>
-          </a:xfrm>
-          <a:prstGeom prst="roundRect">
-            <a:avLst>
-              <a:gd name="adj" fmla="val 23529"/>
-            </a:avLst>
-          </a:prstGeom>
-          <a:solidFill>
-            <a:srgbClr val="232A35"/>
-          </a:solidFill>
-          <a:ln w="9525">
-            <a:solidFill>
-              <a:srgbClr val="4EA1FF"/>
-            </a:solidFill>
-            <a:prstDash val="solid"/>
-          </a:ln>
-        </p:spPr>
-        <p:txBody>
-          <a:bodyPr/>
-          <a:lstStyle/>
-          <a:p>
-            <a:endParaRPr lang="pl-PL"/>
-          </a:p>
-        </p:txBody>
-      </p:sp>
-      <p:sp>
-        <p:nvSpPr>
-          <p:cNvPr id="14" name="Prostokąt 13">
-            <a:extLst>
-              <a:ext uri="{FF2B5EF4-FFF2-40B4-BE49-F238E27FC236}">
-                <a16:creationId xmlns:a16="http://schemas.microsoft.com/office/drawing/2014/main" id="{2B67DB40-206E-436B-9596-4DAE4658DE90}"/>
-              </a:ext>
-            </a:extLst>
-          </p:cNvPr>
-          <p:cNvSpPr>
-            <a:spLocks noGrp="1"/>
-          </p:cNvSpPr>
-          <p:nvPr/>
-        </p:nvSpPr>
-        <p:spPr>
-          <a:xfrm>
-            <a:off x="3429000" y="4343400"/>
-            <a:ext cx="5334000" cy="342900"/>
-          </a:xfrm>
-          <a:prstGeom prst="rect">
-            <a:avLst/>
-          </a:prstGeom>
-          <a:noFill/>
-          <a:ln w="0">
-            <a:noFill/>
-            <a:prstDash val="solid"/>
-          </a:ln>
-        </p:spPr>
-        <p:txBody>
-          <a:bodyPr/>
-          <a:lstStyle/>
-          <a:p>
-            <a:pPr>
-              <a:defRPr sz="1800" b="1">
-                <a:solidFill>
-                  <a:srgbClr val="F6F7FB"/>
-                </a:solidFill>
-              </a:defRPr>
-            </a:pPr>
-            <a:r>
-              <a:rPr sz="1800" b="1">
-                <a:solidFill>
-                  <a:srgbClr val="F6F7FB"/>
-                </a:solidFill>
-              </a:rPr>
-              <a:t>Decoder</a:t>
-            </a:r>
-          </a:p>
-        </p:txBody>
-      </p:sp>
-      <p:sp>
-        <p:nvSpPr>
-          <p:cNvPr id="15" name="Prostokąt 14">
-            <a:extLst>
-              <a:ext uri="{FF2B5EF4-FFF2-40B4-BE49-F238E27FC236}">
-                <a16:creationId xmlns:a16="http://schemas.microsoft.com/office/drawing/2014/main" id="{E968E0F9-912C-45D3-BDE1-4D1A7BC37415}"/>
-              </a:ext>
-            </a:extLst>
-          </p:cNvPr>
-          <p:cNvSpPr>
-            <a:spLocks noGrp="1"/>
-          </p:cNvSpPr>
-          <p:nvPr/>
-        </p:nvSpPr>
-        <p:spPr>
-          <a:xfrm>
-            <a:off x="5810250" y="4838700"/>
-            <a:ext cx="571500" cy="285750"/>
-          </a:xfrm>
-          <a:prstGeom prst="rect">
-            <a:avLst/>
-          </a:prstGeom>
-          <a:noFill/>
-          <a:ln w="0">
-            <a:noFill/>
-            <a:prstDash val="solid"/>
-          </a:ln>
-        </p:spPr>
-        <p:txBody>
-          <a:bodyPr/>
-          <a:lstStyle/>
-          <a:p>
-            <a:pPr>
-              <a:defRPr sz="2100" b="1">
-                <a:solidFill>
-                  <a:srgbClr val="4EA1FF"/>
-                </a:solidFill>
-              </a:defRPr>
-            </a:pPr>
-            <a:r>
-              <a:rPr sz="2100" b="1">
-                <a:solidFill>
-                  <a:srgbClr val="4EA1FF"/>
-                </a:solidFill>
-              </a:rPr>
-              <a:t>↓</a:t>
-            </a:r>
-          </a:p>
-        </p:txBody>
-      </p:sp>
-      <p:sp>
-        <p:nvSpPr>
-          <p:cNvPr id="16" name="Prostokąt: zaokrąglone rogi 15">
-            <a:extLst>
-              <a:ext uri="{FF2B5EF4-FFF2-40B4-BE49-F238E27FC236}">
-                <a16:creationId xmlns:a16="http://schemas.microsoft.com/office/drawing/2014/main" id="{0FDA4CF3-B79F-4836-B42B-47AF8D1B6648}"/>
-              </a:ext>
-            </a:extLst>
-          </p:cNvPr>
-          <p:cNvSpPr>
-            <a:spLocks noGrp="1"/>
-          </p:cNvSpPr>
-          <p:nvPr/>
-        </p:nvSpPr>
-        <p:spPr>
-          <a:xfrm>
-            <a:off x="3429000" y="5105400"/>
-            <a:ext cx="5334000" cy="647700"/>
-          </a:xfrm>
-          <a:prstGeom prst="roundRect">
-            <a:avLst>
-              <a:gd name="adj" fmla="val 23529"/>
-            </a:avLst>
-          </a:prstGeom>
-          <a:solidFill>
-            <a:srgbClr val="2B3442"/>
-          </a:solidFill>
-          <a:ln w="9525">
-            <a:solidFill>
-              <a:srgbClr val="313C4D"/>
-            </a:solidFill>
-            <a:prstDash val="solid"/>
-          </a:ln>
-        </p:spPr>
-        <p:txBody>
-          <a:bodyPr/>
-          <a:lstStyle/>
-          <a:p>
-            <a:endParaRPr lang="pl-PL"/>
-          </a:p>
-        </p:txBody>
-      </p:sp>
-      <p:sp>
-        <p:nvSpPr>
-          <p:cNvPr id="17" name="Prostokąt 16">
-            <a:extLst>
-              <a:ext uri="{FF2B5EF4-FFF2-40B4-BE49-F238E27FC236}">
-                <a16:creationId xmlns:a16="http://schemas.microsoft.com/office/drawing/2014/main" id="{3F0FBD1F-685C-4ED0-938C-33797AE8005F}"/>
-              </a:ext>
-            </a:extLst>
-          </p:cNvPr>
-          <p:cNvSpPr>
-            <a:spLocks noGrp="1"/>
-          </p:cNvSpPr>
-          <p:nvPr/>
-        </p:nvSpPr>
-        <p:spPr>
-          <a:xfrm>
-            <a:off x="3429000" y="5238750"/>
-            <a:ext cx="5334000" cy="342900"/>
-          </a:xfrm>
-          <a:prstGeom prst="rect">
-            <a:avLst/>
-          </a:prstGeom>
-          <a:noFill/>
-          <a:ln w="0">
-            <a:noFill/>
-            <a:prstDash val="solid"/>
-          </a:ln>
-        </p:spPr>
-        <p:txBody>
-          <a:bodyPr/>
-          <a:lstStyle/>
-          <a:p>
-            <a:pPr>
-              <a:defRPr sz="1800" b="1">
-                <a:solidFill>
-                  <a:srgbClr val="F6F7FB"/>
-                </a:solidFill>
-              </a:defRPr>
-            </a:pPr>
-            <a:r>
-              <a:rPr sz="1800" b="1">
-                <a:solidFill>
-                  <a:srgbClr val="F6F7FB"/>
-                </a:solidFill>
-              </a:rPr>
-              <a:t>Generated Face</a:t>
-            </a:r>
-          </a:p>
-        </p:txBody>
-      </p:sp>
-      <p:sp>
-        <p:nvSpPr>
-          <p:cNvPr id="19" name="Prostokąt 18">
-            <a:extLst>
-              <a:ext uri="{FF2B5EF4-FFF2-40B4-BE49-F238E27FC236}">
-                <a16:creationId xmlns:a16="http://schemas.microsoft.com/office/drawing/2014/main" id="{895C912F-33B9-4B2A-A97E-3DE01E3294A3}"/>
-              </a:ext>
-            </a:extLst>
-          </p:cNvPr>
-          <p:cNvSpPr>
-            <a:spLocks noGrp="1"/>
-          </p:cNvSpPr>
-          <p:nvPr/>
-        </p:nvSpPr>
-        <p:spPr>
-          <a:xfrm>
-            <a:off x="9342783" y="2381250"/>
-            <a:ext cx="2077278" cy="1047750"/>
-          </a:xfrm>
-          <a:prstGeom prst="rect">
-            <a:avLst/>
-          </a:prstGeom>
-          <a:noFill/>
-          <a:ln w="0">
-            <a:noFill/>
-            <a:prstDash val="solid"/>
-          </a:ln>
-        </p:spPr>
-        <p:txBody>
-          <a:bodyPr/>
-          <a:lstStyle/>
-          <a:p>
-            <a:pPr>
-              <a:defRPr sz="1950" b="1">
-                <a:solidFill>
-                  <a:srgbClr val="F6F7FB"/>
-                </a:solidFill>
-              </a:defRPr>
-            </a:pPr>
-            <a:endParaRPr sz="1950" b="1" dirty="0">
-              <a:solidFill>
-                <a:srgbClr val="F6F7FB"/>
-              </a:solidFill>
-            </a:endParaRPr>
-          </a:p>
-        </p:txBody>
-      </p:sp>
-      <p:sp>
-        <p:nvSpPr>
-          <p:cNvPr id="20" name="Prostokąt 19">
-            <a:extLst>
-              <a:ext uri="{FF2B5EF4-FFF2-40B4-BE49-F238E27FC236}">
-                <a16:creationId xmlns:a16="http://schemas.microsoft.com/office/drawing/2014/main" id="{430D6645-B5FE-42E4-9516-D21269051408}"/>
-              </a:ext>
-            </a:extLst>
-          </p:cNvPr>
-          <p:cNvSpPr>
-            <a:spLocks noGrp="1"/>
-          </p:cNvSpPr>
-          <p:nvPr/>
-        </p:nvSpPr>
-        <p:spPr>
-          <a:xfrm>
-            <a:off x="9239250" y="4572000"/>
-            <a:ext cx="2286000" cy="1143000"/>
-          </a:xfrm>
-          <a:prstGeom prst="rect">
-            <a:avLst/>
-          </a:prstGeom>
-          <a:noFill/>
-          <a:ln w="0">
-            <a:noFill/>
-            <a:prstDash val="solid"/>
-          </a:ln>
-        </p:spPr>
-        <p:txBody>
-          <a:bodyPr/>
-          <a:lstStyle/>
-          <a:p>
-            <a:pPr>
-              <a:defRPr sz="1350">
-                <a:solidFill>
-                  <a:srgbClr val="B7C0D1"/>
-                </a:solidFill>
-              </a:defRPr>
-            </a:pPr>
-            <a:endParaRPr sz="1350" dirty="0">
-              <a:solidFill>
-                <a:srgbClr val="B7C0D1"/>
-              </a:solidFill>
-            </a:endParaRPr>
-          </a:p>
-        </p:txBody>
-      </p:sp>
-    </p:spTree>
-    <p:extLst>
-      <p:ext uri="{BB962C8B-B14F-4D97-AF65-F5344CB8AC3E}">
-        <p14:creationId xmlns:p14="http://schemas.microsoft.com/office/powerpoint/2010/main" val="1225980781"/>
-      </p:ext>
-    </p:extLst>
-  </p:cSld>
-  <p:clrMapOvr>
-    <a:masterClrMapping/>
-  </p:clrMapOvr>
-</p:sld>
-</file>
-
-<file path=ppt/slides/slide5.xml><?xml version="1.0" encoding="utf-8"?>
-<p:sld xmlns:a="http://schemas.openxmlformats.org/drawingml/2006/main" xmlns:r="http://schemas.openxmlformats.org/officeDocument/2006/relationships" xmlns:p="http://schemas.openxmlformats.org/presentationml/2006/main">
-  <p:cSld>
-    <p:bg>
-      <p:bgPr>
-        <a:solidFill>
-          <a:srgbClr val="1B1F27"/>
-        </a:solidFill>
-        <a:effectLst/>
-      </p:bgPr>
-    </p:bg>
-    <p:spTree>
-      <p:nvGrpSpPr>
-        <p:cNvPr id="1" name=""/>
-        <p:cNvGrpSpPr/>
-        <p:nvPr/>
-      </p:nvGrpSpPr>
-      <p:grpSpPr>
-        <a:xfrm>
-          <a:off x="0" y="0"/>
-          <a:ext cx="0" cy="0"/>
-          <a:chOff x="0" y="0"/>
-          <a:chExt cx="0" cy="0"/>
-        </a:xfrm>
-      </p:grpSpPr>
-      <p:sp>
-        <p:nvSpPr>
-          <p:cNvPr id="5" name="Prostokąt 4">
-            <a:extLst>
-              <a:ext uri="{FF2B5EF4-FFF2-40B4-BE49-F238E27FC236}">
-                <a16:creationId xmlns:a16="http://schemas.microsoft.com/office/drawing/2014/main" id="{D62DD357-BF8D-4FBE-B8C7-24CD44940392}"/>
-              </a:ext>
-            </a:extLst>
-          </p:cNvPr>
-          <p:cNvSpPr>
-            <a:spLocks noGrp="1"/>
-          </p:cNvSpPr>
-          <p:nvPr/>
-        </p:nvSpPr>
-        <p:spPr>
-          <a:xfrm>
-            <a:off x="609600" y="400050"/>
-            <a:ext cx="9334500" cy="685800"/>
-          </a:xfrm>
-          <a:prstGeom prst="rect">
-            <a:avLst/>
-          </a:prstGeom>
-          <a:noFill/>
-          <a:ln w="0">
-            <a:noFill/>
-            <a:prstDash val="solid"/>
-          </a:ln>
-        </p:spPr>
-        <p:txBody>
-          <a:bodyPr/>
-          <a:lstStyle/>
-          <a:p>
-            <a:pPr>
-              <a:defRPr sz="3300" b="1">
-                <a:solidFill>
-                  <a:srgbClr val="F6F7FB"/>
-                </a:solidFill>
-              </a:defRPr>
-            </a:pPr>
-            <a:r>
-              <a:rPr sz="3300" b="1">
-                <a:solidFill>
-                  <a:srgbClr val="F6F7FB"/>
-                </a:solidFill>
-              </a:rPr>
-              <a:t>Reconstruction</a:t>
-            </a:r>
-          </a:p>
-        </p:txBody>
-      </p:sp>
-      <p:sp>
-        <p:nvSpPr>
-          <p:cNvPr id="2" name="Prostokąt 1">
-            <a:extLst>
-              <a:ext uri="{FF2B5EF4-FFF2-40B4-BE49-F238E27FC236}">
-                <a16:creationId xmlns:a16="http://schemas.microsoft.com/office/drawing/2014/main" id="{08A070A5-44C9-4862-BF02-4E6A719CDACB}"/>
-              </a:ext>
-            </a:extLst>
-          </p:cNvPr>
-          <p:cNvSpPr>
-            <a:spLocks noGrp="1"/>
-          </p:cNvSpPr>
-          <p:nvPr/>
-        </p:nvSpPr>
-        <p:spPr>
-          <a:xfrm>
-            <a:off x="609600" y="1009650"/>
-            <a:ext cx="9334500" cy="323850"/>
-          </a:xfrm>
-          <a:prstGeom prst="rect">
-            <a:avLst/>
-          </a:prstGeom>
-          <a:noFill/>
-          <a:ln w="0">
-            <a:noFill/>
-            <a:prstDash val="solid"/>
-          </a:ln>
-        </p:spPr>
-        <p:txBody>
-          <a:bodyPr/>
-          <a:lstStyle/>
-          <a:p>
-            <a:pPr>
-              <a:defRPr sz="1500">
-                <a:solidFill>
-                  <a:srgbClr val="B7C0D1"/>
-                </a:solidFill>
-              </a:defRPr>
-            </a:pPr>
-            <a:r>
-              <a:rPr sz="1600" dirty="0">
-                <a:solidFill>
-                  <a:srgbClr val="B7C0D1"/>
-                </a:solidFill>
-              </a:rPr>
-              <a:t>The model keeps the coarse identity and shape, but fine details become softer.</a:t>
-            </a:r>
-          </a:p>
-        </p:txBody>
-      </p:sp>
-      <p:sp>
-        <p:nvSpPr>
-          <p:cNvPr id="4" name="Prostokąt: zaokrąglone rogi 3">
-            <a:extLst>
-              <a:ext uri="{FF2B5EF4-FFF2-40B4-BE49-F238E27FC236}">
-                <a16:creationId xmlns:a16="http://schemas.microsoft.com/office/drawing/2014/main" id="{C4ECD43E-3D1D-4CEE-8A8A-DFC09FDFED3C}"/>
-              </a:ext>
-            </a:extLst>
-          </p:cNvPr>
-          <p:cNvSpPr>
-            <a:spLocks noGrp="1"/>
-          </p:cNvSpPr>
-          <p:nvPr/>
-        </p:nvSpPr>
-        <p:spPr>
-          <a:xfrm>
-            <a:off x="609600" y="1943100"/>
-            <a:ext cx="10972800" cy="4267200"/>
-          </a:xfrm>
-          <a:prstGeom prst="roundRect">
-            <a:avLst>
-              <a:gd name="adj" fmla="val 4800"/>
-            </a:avLst>
-          </a:prstGeom>
-          <a:solidFill>
-            <a:srgbClr val="232A35"/>
-          </a:solidFill>
-          <a:ln w="9525">
-            <a:solidFill>
-              <a:srgbClr val="313C4D"/>
-            </a:solidFill>
-            <a:prstDash val="solid"/>
-          </a:ln>
-        </p:spPr>
-        <p:txBody>
-          <a:bodyPr/>
-          <a:lstStyle/>
-          <a:p>
-            <a:endParaRPr lang="pl-PL"/>
-          </a:p>
-        </p:txBody>
-      </p:sp>
-      <p:pic>
-        <p:nvPicPr>
-          <p:cNvPr id="11" name="Obraz 10"/>
-          <p:cNvPicPr>
-            <a:picLocks noChangeAspect="1"/>
-          </p:cNvPicPr>
-          <p:nvPr/>
-        </p:nvPicPr>
-        <p:blipFill>
-          <a:blip r:embed="rId3"/>
-          <a:stretch/>
-        </p:blipFill>
-        <p:spPr>
-          <a:xfrm>
-            <a:off x="857250" y="2412009"/>
-            <a:ext cx="10382250" cy="2605482"/>
-          </a:xfrm>
-          <a:prstGeom prst="roundRect">
-            <a:avLst>
-              <a:gd name="adj" fmla="val 3810"/>
-            </a:avLst>
-          </a:prstGeom>
-        </p:spPr>
-      </p:pic>
-      <p:sp>
-        <p:nvSpPr>
-          <p:cNvPr id="6" name="Prostokąt 5">
-            <a:extLst>
-              <a:ext uri="{FF2B5EF4-FFF2-40B4-BE49-F238E27FC236}">
-                <a16:creationId xmlns:a16="http://schemas.microsoft.com/office/drawing/2014/main" id="{44D382DC-8F8C-4014-B104-98839FC7A5FE}"/>
-              </a:ext>
-            </a:extLst>
-          </p:cNvPr>
-          <p:cNvSpPr>
-            <a:spLocks noGrp="1"/>
-          </p:cNvSpPr>
-          <p:nvPr/>
-        </p:nvSpPr>
-        <p:spPr>
-          <a:xfrm>
-            <a:off x="819150" y="5753100"/>
-            <a:ext cx="9715500" cy="266700"/>
-          </a:xfrm>
-          <a:prstGeom prst="rect">
-            <a:avLst/>
-          </a:prstGeom>
-          <a:noFill/>
-          <a:ln w="0">
-            <a:noFill/>
-            <a:prstDash val="solid"/>
-          </a:ln>
-        </p:spPr>
-        <p:txBody>
-          <a:bodyPr/>
-          <a:lstStyle/>
-          <a:p>
-            <a:pPr>
-              <a:defRPr sz="1350">
-                <a:solidFill>
-                  <a:srgbClr val="B7C0D1"/>
-                </a:solidFill>
-              </a:defRPr>
-            </a:pPr>
-            <a:r>
-              <a:rPr sz="1350" dirty="0">
-                <a:solidFill>
-                  <a:srgbClr val="B7C0D1"/>
-                </a:solidFill>
-              </a:rPr>
-              <a:t>Original and reconstructed faces stay visually close, but hairlines, eyes, and </a:t>
-            </a:r>
-            <a:r>
-              <a:rPr lang="pl-PL" sz="1350" dirty="0" err="1">
-                <a:solidFill>
-                  <a:srgbClr val="B7C0D1"/>
-                </a:solidFill>
-              </a:rPr>
-              <a:t>texture</a:t>
-            </a:r>
-            <a:r>
-              <a:rPr sz="1350" dirty="0">
-                <a:solidFill>
-                  <a:srgbClr val="B7C0D1"/>
-                </a:solidFill>
-              </a:rPr>
-              <a:t> details are simplified.</a:t>
-            </a:r>
-          </a:p>
-        </p:txBody>
-      </p:sp>
-    </p:spTree>
-    <p:extLst>
-      <p:ext uri="{BB962C8B-B14F-4D97-AF65-F5344CB8AC3E}">
-        <p14:creationId xmlns:p14="http://schemas.microsoft.com/office/powerpoint/2010/main" val="1646487058"/>
-      </p:ext>
-    </p:extLst>
-  </p:cSld>
-  <p:clrMapOvr>
-    <a:masterClrMapping/>
-  </p:clrMapOvr>
-</p:sld>
-</file>
-
-<file path=ppt/slides/slide6.xml><?xml version="1.0" encoding="utf-8"?>
 <p:sld xmlns:a="http://schemas.openxmlformats.org/drawingml/2006/main" xmlns:r="http://schemas.openxmlformats.org/officeDocument/2006/relationships" xmlns:p="http://schemas.openxmlformats.org/presentationml/2006/main">
   <p:cSld>
     <p:bg>
@@ -4399,7 +4963,7 @@
         </p:nvSpPr>
         <p:spPr>
           <a:xfrm>
-            <a:off x="609600" y="1943100"/>
+            <a:off x="572742" y="2382203"/>
             <a:ext cx="10972800" cy="4267200"/>
           </a:xfrm>
           <a:prstGeom prst="roundRect">
@@ -4472,10 +5036,3349 @@
           </a:p>
         </p:txBody>
       </p:sp>
+      <p:pic>
+        <p:nvPicPr>
+          <p:cNvPr id="7" name="Obraz 6">
+            <a:extLst>
+              <a:ext uri="{FF2B5EF4-FFF2-40B4-BE49-F238E27FC236}">
+                <a16:creationId xmlns:a16="http://schemas.microsoft.com/office/drawing/2014/main" id="{223766C2-C267-4734-16E8-2427368E526D}"/>
+              </a:ext>
+            </a:extLst>
+          </p:cNvPr>
+          <p:cNvPicPr>
+            <a:picLocks noChangeAspect="1"/>
+          </p:cNvPicPr>
+          <p:nvPr/>
+        </p:nvPicPr>
+        <p:blipFill>
+          <a:blip r:embed="rId3"/>
+          <a:stretch>
+            <a:fillRect/>
+          </a:stretch>
+        </p:blipFill>
+        <p:spPr>
+          <a:xfrm>
+            <a:off x="1866474" y="2456676"/>
+            <a:ext cx="4090372" cy="4096845"/>
+          </a:xfrm>
+          <a:prstGeom prst="rect">
+            <a:avLst/>
+          </a:prstGeom>
+        </p:spPr>
+      </p:pic>
+      <p:sp>
+        <p:nvSpPr>
+          <p:cNvPr id="8" name="pole tekstowe 7">
+            <a:extLst>
+              <a:ext uri="{FF2B5EF4-FFF2-40B4-BE49-F238E27FC236}">
+                <a16:creationId xmlns:a16="http://schemas.microsoft.com/office/drawing/2014/main" id="{B08301DB-0BB4-AAC0-11BE-9EC37BC0E084}"/>
+              </a:ext>
+            </a:extLst>
+          </p:cNvPr>
+          <p:cNvSpPr txBox="1"/>
+          <p:nvPr/>
+        </p:nvSpPr>
+        <p:spPr>
+          <a:xfrm>
+            <a:off x="621808" y="3429000"/>
+            <a:ext cx="3289852" cy="1477328"/>
+          </a:xfrm>
+          <a:prstGeom prst="rect">
+            <a:avLst/>
+          </a:prstGeom>
+          <a:noFill/>
+        </p:spPr>
+        <p:txBody>
+          <a:bodyPr wrap="square" rtlCol="0">
+            <a:spAutoFit/>
+          </a:bodyPr>
+          <a:lstStyle/>
+          <a:p>
+            <a:r>
+              <a:rPr lang="pl-PL" dirty="0" err="1">
+                <a:solidFill>
+                  <a:schemeClr val="bg1">
+                    <a:lumMod val="85000"/>
+                  </a:schemeClr>
+                </a:solidFill>
+              </a:rPr>
+              <a:t>Female</a:t>
+            </a:r>
+            <a:r>
+              <a:rPr lang="pl-PL" dirty="0">
+                <a:solidFill>
+                  <a:schemeClr val="bg1">
+                    <a:lumMod val="85000"/>
+                  </a:schemeClr>
+                </a:solidFill>
+              </a:rPr>
+              <a:t>, </a:t>
+            </a:r>
+          </a:p>
+          <a:p>
+            <a:r>
+              <a:rPr lang="pl-PL" dirty="0">
+                <a:solidFill>
+                  <a:schemeClr val="bg1">
+                    <a:lumMod val="85000"/>
+                  </a:schemeClr>
+                </a:solidFill>
+              </a:rPr>
+              <a:t>Blond </a:t>
+            </a:r>
+            <a:r>
+              <a:rPr lang="pl-PL" dirty="0" err="1">
+                <a:solidFill>
+                  <a:schemeClr val="bg1">
+                    <a:lumMod val="85000"/>
+                  </a:schemeClr>
+                </a:solidFill>
+              </a:rPr>
+              <a:t>Hair</a:t>
+            </a:r>
+            <a:r>
+              <a:rPr lang="pl-PL" dirty="0">
+                <a:solidFill>
+                  <a:schemeClr val="bg1">
+                    <a:lumMod val="85000"/>
+                  </a:schemeClr>
+                </a:solidFill>
+              </a:rPr>
+              <a:t>, </a:t>
+            </a:r>
+          </a:p>
+          <a:p>
+            <a:r>
+              <a:rPr lang="pl-PL" dirty="0">
+                <a:solidFill>
+                  <a:schemeClr val="bg1">
+                    <a:lumMod val="85000"/>
+                  </a:schemeClr>
+                </a:solidFill>
+              </a:rPr>
+              <a:t>Young, </a:t>
+            </a:r>
+          </a:p>
+          <a:p>
+            <a:r>
+              <a:rPr lang="pl-PL" dirty="0" err="1">
+                <a:solidFill>
+                  <a:schemeClr val="bg1">
+                    <a:lumMod val="85000"/>
+                  </a:schemeClr>
+                </a:solidFill>
+              </a:rPr>
+              <a:t>Smilling</a:t>
+            </a:r>
+            <a:r>
+              <a:rPr lang="pl-PL" dirty="0">
+                <a:solidFill>
+                  <a:schemeClr val="bg1">
+                    <a:lumMod val="85000"/>
+                  </a:schemeClr>
+                </a:solidFill>
+              </a:rPr>
+              <a:t>, </a:t>
+            </a:r>
+          </a:p>
+          <a:p>
+            <a:r>
+              <a:rPr lang="pl-PL" dirty="0">
+                <a:solidFill>
+                  <a:schemeClr val="bg1">
+                    <a:lumMod val="85000"/>
+                  </a:schemeClr>
+                </a:solidFill>
+              </a:rPr>
+              <a:t>Rosy </a:t>
+            </a:r>
+            <a:r>
+              <a:rPr lang="pl-PL" dirty="0" err="1">
+                <a:solidFill>
+                  <a:schemeClr val="bg1">
+                    <a:lumMod val="85000"/>
+                  </a:schemeClr>
+                </a:solidFill>
+              </a:rPr>
+              <a:t>Cheeks</a:t>
+            </a:r>
+            <a:endParaRPr lang="pl-PL" dirty="0">
+              <a:solidFill>
+                <a:schemeClr val="bg1">
+                  <a:lumMod val="85000"/>
+                </a:schemeClr>
+              </a:solidFill>
+            </a:endParaRPr>
+          </a:p>
+        </p:txBody>
+      </p:sp>
+      <p:sp>
+        <p:nvSpPr>
+          <p:cNvPr id="11" name="pole tekstowe 10">
+            <a:extLst>
+              <a:ext uri="{FF2B5EF4-FFF2-40B4-BE49-F238E27FC236}">
+                <a16:creationId xmlns:a16="http://schemas.microsoft.com/office/drawing/2014/main" id="{59B77195-93FE-7DFC-6A5C-538F4058DA49}"/>
+              </a:ext>
+            </a:extLst>
+          </p:cNvPr>
+          <p:cNvSpPr txBox="1"/>
+          <p:nvPr/>
+        </p:nvSpPr>
+        <p:spPr>
+          <a:xfrm>
+            <a:off x="6153009" y="3781067"/>
+            <a:ext cx="3289852" cy="923330"/>
+          </a:xfrm>
+          <a:prstGeom prst="rect">
+            <a:avLst/>
+          </a:prstGeom>
+          <a:noFill/>
+        </p:spPr>
+        <p:txBody>
+          <a:bodyPr wrap="square" rtlCol="0">
+            <a:spAutoFit/>
+          </a:bodyPr>
+          <a:lstStyle/>
+          <a:p>
+            <a:r>
+              <a:rPr lang="pl-PL" dirty="0">
+                <a:solidFill>
+                  <a:schemeClr val="bg1">
+                    <a:lumMod val="85000"/>
+                  </a:schemeClr>
+                </a:solidFill>
+              </a:rPr>
+              <a:t>Male, </a:t>
+            </a:r>
+          </a:p>
+          <a:p>
+            <a:r>
+              <a:rPr lang="pl-PL" dirty="0" err="1">
+                <a:solidFill>
+                  <a:schemeClr val="bg1">
+                    <a:lumMod val="85000"/>
+                  </a:schemeClr>
+                </a:solidFill>
+              </a:rPr>
+              <a:t>Old</a:t>
+            </a:r>
+            <a:r>
+              <a:rPr lang="pl-PL" dirty="0">
+                <a:solidFill>
+                  <a:schemeClr val="bg1">
+                    <a:lumMod val="85000"/>
+                  </a:schemeClr>
+                </a:solidFill>
+              </a:rPr>
+              <a:t>, </a:t>
+            </a:r>
+          </a:p>
+          <a:p>
+            <a:r>
+              <a:rPr lang="pl-PL" dirty="0">
+                <a:solidFill>
+                  <a:schemeClr val="bg1">
+                    <a:lumMod val="85000"/>
+                  </a:schemeClr>
+                </a:solidFill>
+              </a:rPr>
+              <a:t>Black </a:t>
+            </a:r>
+            <a:r>
+              <a:rPr lang="pl-PL" dirty="0" err="1">
+                <a:solidFill>
+                  <a:schemeClr val="bg1">
+                    <a:lumMod val="85000"/>
+                  </a:schemeClr>
+                </a:solidFill>
+              </a:rPr>
+              <a:t>Hair</a:t>
+            </a:r>
+            <a:endParaRPr lang="pl-PL" dirty="0">
+              <a:solidFill>
+                <a:schemeClr val="bg1">
+                  <a:lumMod val="85000"/>
+                </a:schemeClr>
+              </a:solidFill>
+            </a:endParaRPr>
+          </a:p>
+        </p:txBody>
+      </p:sp>
+      <p:pic>
+        <p:nvPicPr>
+          <p:cNvPr id="13" name="Obraz 12">
+            <a:extLst>
+              <a:ext uri="{FF2B5EF4-FFF2-40B4-BE49-F238E27FC236}">
+                <a16:creationId xmlns:a16="http://schemas.microsoft.com/office/drawing/2014/main" id="{CA31F05F-C350-D63B-CE53-E8AFC19AA0CD}"/>
+              </a:ext>
+            </a:extLst>
+          </p:cNvPr>
+          <p:cNvPicPr>
+            <a:picLocks noChangeAspect="1"/>
+          </p:cNvPicPr>
+          <p:nvPr/>
+        </p:nvPicPr>
+        <p:blipFill>
+          <a:blip r:embed="rId4"/>
+          <a:stretch>
+            <a:fillRect/>
+          </a:stretch>
+        </p:blipFill>
+        <p:spPr>
+          <a:xfrm>
+            <a:off x="7250578" y="2456675"/>
+            <a:ext cx="4096846" cy="4096846"/>
+          </a:xfrm>
+          <a:prstGeom prst="rect">
+            <a:avLst/>
+          </a:prstGeom>
+        </p:spPr>
+      </p:pic>
+      <p:sp>
+        <p:nvSpPr>
+          <p:cNvPr id="15" name="pole tekstowe 14">
+            <a:extLst>
+              <a:ext uri="{FF2B5EF4-FFF2-40B4-BE49-F238E27FC236}">
+                <a16:creationId xmlns:a16="http://schemas.microsoft.com/office/drawing/2014/main" id="{DCB9F141-FCDC-EDD5-5754-130927143F88}"/>
+              </a:ext>
+            </a:extLst>
+          </p:cNvPr>
+          <p:cNvSpPr txBox="1"/>
+          <p:nvPr/>
+        </p:nvSpPr>
+        <p:spPr>
+          <a:xfrm>
+            <a:off x="628369" y="980896"/>
+            <a:ext cx="11049281" cy="923330"/>
+          </a:xfrm>
+          <a:prstGeom prst="rect">
+            <a:avLst/>
+          </a:prstGeom>
+          <a:noFill/>
+        </p:spPr>
+        <p:txBody>
+          <a:bodyPr wrap="square">
+            <a:spAutoFit/>
+          </a:bodyPr>
+          <a:lstStyle/>
+          <a:p>
+            <a:r>
+              <a:rPr lang="pl-PL" dirty="0">
+                <a:solidFill>
+                  <a:schemeClr val="bg1">
+                    <a:lumMod val="85000"/>
+                  </a:schemeClr>
+                </a:solidFill>
+              </a:rPr>
+              <a:t>The model </a:t>
+            </a:r>
+            <a:r>
+              <a:rPr lang="pl-PL" dirty="0" err="1">
+                <a:solidFill>
+                  <a:schemeClr val="bg1">
+                    <a:lumMod val="85000"/>
+                  </a:schemeClr>
+                </a:solidFill>
+              </a:rPr>
+              <a:t>generates</a:t>
+            </a:r>
+            <a:r>
+              <a:rPr lang="pl-PL" dirty="0">
+                <a:solidFill>
+                  <a:schemeClr val="bg1">
+                    <a:lumMod val="85000"/>
+                  </a:schemeClr>
+                </a:solidFill>
+              </a:rPr>
+              <a:t> </a:t>
+            </a:r>
+            <a:r>
+              <a:rPr lang="pl-PL" dirty="0" err="1">
+                <a:solidFill>
+                  <a:schemeClr val="bg1">
+                    <a:lumMod val="85000"/>
+                  </a:schemeClr>
+                </a:solidFill>
+              </a:rPr>
+              <a:t>more</a:t>
+            </a:r>
+            <a:r>
+              <a:rPr lang="pl-PL" dirty="0">
+                <a:solidFill>
+                  <a:schemeClr val="bg1">
+                    <a:lumMod val="85000"/>
+                  </a:schemeClr>
+                </a:solidFill>
+              </a:rPr>
+              <a:t> </a:t>
+            </a:r>
+            <a:r>
+              <a:rPr lang="pl-PL" dirty="0" err="1">
+                <a:solidFill>
+                  <a:schemeClr val="bg1">
+                    <a:lumMod val="85000"/>
+                  </a:schemeClr>
+                </a:solidFill>
+              </a:rPr>
+              <a:t>realistic</a:t>
+            </a:r>
+            <a:r>
+              <a:rPr lang="pl-PL" dirty="0">
+                <a:solidFill>
+                  <a:schemeClr val="bg1">
+                    <a:lumMod val="85000"/>
+                  </a:schemeClr>
+                </a:solidFill>
+              </a:rPr>
+              <a:t> </a:t>
+            </a:r>
+            <a:r>
+              <a:rPr lang="pl-PL" dirty="0" err="1">
+                <a:solidFill>
+                  <a:schemeClr val="bg1">
+                    <a:lumMod val="85000"/>
+                  </a:schemeClr>
+                </a:solidFill>
+              </a:rPr>
+              <a:t>faces</a:t>
+            </a:r>
+            <a:r>
+              <a:rPr lang="pl-PL" dirty="0">
+                <a:solidFill>
+                  <a:schemeClr val="bg1">
+                    <a:lumMod val="85000"/>
+                  </a:schemeClr>
+                </a:solidFill>
+              </a:rPr>
+              <a:t> </a:t>
+            </a:r>
+            <a:r>
+              <a:rPr lang="pl-PL" dirty="0" err="1">
+                <a:solidFill>
+                  <a:schemeClr val="bg1">
+                    <a:lumMod val="85000"/>
+                  </a:schemeClr>
+                </a:solidFill>
+              </a:rPr>
+              <a:t>when</a:t>
+            </a:r>
+            <a:r>
+              <a:rPr lang="pl-PL" dirty="0">
+                <a:solidFill>
+                  <a:schemeClr val="bg1">
+                    <a:lumMod val="85000"/>
+                  </a:schemeClr>
+                </a:solidFill>
+              </a:rPr>
+              <a:t> the </a:t>
+            </a:r>
+            <a:r>
+              <a:rPr lang="pl-PL" dirty="0" err="1">
+                <a:solidFill>
+                  <a:schemeClr val="bg1">
+                    <a:lumMod val="85000"/>
+                  </a:schemeClr>
+                </a:solidFill>
+              </a:rPr>
+              <a:t>selected</a:t>
+            </a:r>
+            <a:r>
+              <a:rPr lang="pl-PL" dirty="0">
+                <a:solidFill>
+                  <a:schemeClr val="bg1">
+                    <a:lumMod val="85000"/>
+                  </a:schemeClr>
+                </a:solidFill>
+              </a:rPr>
+              <a:t> </a:t>
+            </a:r>
+            <a:r>
+              <a:rPr lang="pl-PL" dirty="0" err="1">
+                <a:solidFill>
+                  <a:schemeClr val="bg1">
+                    <a:lumMod val="85000"/>
+                  </a:schemeClr>
+                </a:solidFill>
+              </a:rPr>
+              <a:t>attributes</a:t>
+            </a:r>
+            <a:r>
+              <a:rPr lang="pl-PL" dirty="0">
+                <a:solidFill>
+                  <a:schemeClr val="bg1">
+                    <a:lumMod val="85000"/>
+                  </a:schemeClr>
+                </a:solidFill>
+              </a:rPr>
+              <a:t> </a:t>
+            </a:r>
+            <a:r>
+              <a:rPr lang="pl-PL" dirty="0" err="1">
+                <a:solidFill>
+                  <a:schemeClr val="bg1">
+                    <a:lumMod val="85000"/>
+                  </a:schemeClr>
+                </a:solidFill>
+              </a:rPr>
+              <a:t>commonly</a:t>
+            </a:r>
+            <a:r>
+              <a:rPr lang="pl-PL" dirty="0">
+                <a:solidFill>
+                  <a:schemeClr val="bg1">
+                    <a:lumMod val="85000"/>
+                  </a:schemeClr>
+                </a:solidFill>
+              </a:rPr>
+              <a:t> </a:t>
+            </a:r>
+            <a:r>
+              <a:rPr lang="pl-PL" dirty="0" err="1">
+                <a:solidFill>
+                  <a:schemeClr val="bg1">
+                    <a:lumMod val="85000"/>
+                  </a:schemeClr>
+                </a:solidFill>
+              </a:rPr>
+              <a:t>occur</a:t>
+            </a:r>
+            <a:r>
+              <a:rPr lang="pl-PL" dirty="0">
+                <a:solidFill>
+                  <a:schemeClr val="bg1">
+                    <a:lumMod val="85000"/>
+                  </a:schemeClr>
+                </a:solidFill>
+              </a:rPr>
+              <a:t> </a:t>
+            </a:r>
+            <a:r>
+              <a:rPr lang="pl-PL" dirty="0" err="1">
+                <a:solidFill>
+                  <a:schemeClr val="bg1">
+                    <a:lumMod val="85000"/>
+                  </a:schemeClr>
+                </a:solidFill>
+              </a:rPr>
+              <a:t>together</a:t>
+            </a:r>
+            <a:r>
+              <a:rPr lang="pl-PL" dirty="0">
+                <a:solidFill>
+                  <a:schemeClr val="bg1">
+                    <a:lumMod val="85000"/>
+                  </a:schemeClr>
+                </a:solidFill>
+              </a:rPr>
+              <a:t> in the </a:t>
+            </a:r>
+            <a:r>
+              <a:rPr lang="pl-PL" dirty="0" err="1">
+                <a:solidFill>
+                  <a:schemeClr val="bg1">
+                    <a:lumMod val="85000"/>
+                  </a:schemeClr>
+                </a:solidFill>
+              </a:rPr>
+              <a:t>training</a:t>
+            </a:r>
+            <a:r>
+              <a:rPr lang="pl-PL" dirty="0">
+                <a:solidFill>
+                  <a:schemeClr val="bg1">
+                    <a:lumMod val="85000"/>
+                  </a:schemeClr>
+                </a:solidFill>
+              </a:rPr>
+              <a:t> data. </a:t>
+            </a:r>
+            <a:r>
+              <a:rPr lang="pl-PL" dirty="0" err="1">
+                <a:solidFill>
+                  <a:schemeClr val="bg1">
+                    <a:lumMod val="85000"/>
+                  </a:schemeClr>
+                </a:solidFill>
+              </a:rPr>
+              <a:t>Consistent</a:t>
+            </a:r>
+            <a:r>
+              <a:rPr lang="pl-PL" dirty="0">
+                <a:solidFill>
+                  <a:schemeClr val="bg1">
+                    <a:lumMod val="85000"/>
+                  </a:schemeClr>
+                </a:solidFill>
+              </a:rPr>
+              <a:t> </a:t>
+            </a:r>
+            <a:r>
+              <a:rPr lang="pl-PL" dirty="0" err="1">
+                <a:solidFill>
+                  <a:schemeClr val="bg1">
+                    <a:lumMod val="85000"/>
+                  </a:schemeClr>
+                </a:solidFill>
+              </a:rPr>
+              <a:t>attribute</a:t>
+            </a:r>
+            <a:r>
+              <a:rPr lang="pl-PL" dirty="0">
+                <a:solidFill>
+                  <a:schemeClr val="bg1">
+                    <a:lumMod val="85000"/>
+                  </a:schemeClr>
+                </a:solidFill>
+              </a:rPr>
+              <a:t> </a:t>
+            </a:r>
+            <a:r>
+              <a:rPr lang="pl-PL" dirty="0" err="1">
+                <a:solidFill>
+                  <a:schemeClr val="bg1">
+                    <a:lumMod val="85000"/>
+                  </a:schemeClr>
+                </a:solidFill>
+              </a:rPr>
+              <a:t>combinations</a:t>
+            </a:r>
+            <a:r>
+              <a:rPr lang="pl-PL" dirty="0">
+                <a:solidFill>
+                  <a:schemeClr val="bg1">
+                    <a:lumMod val="85000"/>
+                  </a:schemeClr>
+                </a:solidFill>
+              </a:rPr>
+              <a:t>, </a:t>
+            </a:r>
+            <a:r>
+              <a:rPr lang="pl-PL" dirty="0" err="1">
+                <a:solidFill>
+                  <a:schemeClr val="bg1">
+                    <a:lumMod val="85000"/>
+                  </a:schemeClr>
+                </a:solidFill>
+              </a:rPr>
+              <a:t>such</a:t>
+            </a:r>
+            <a:r>
+              <a:rPr lang="pl-PL" dirty="0">
+                <a:solidFill>
+                  <a:schemeClr val="bg1">
+                    <a:lumMod val="85000"/>
+                  </a:schemeClr>
+                </a:solidFill>
+              </a:rPr>
+              <a:t> as </a:t>
+            </a:r>
+            <a:r>
+              <a:rPr lang="pl-PL" i="1" dirty="0" err="1">
+                <a:solidFill>
+                  <a:schemeClr val="bg1">
+                    <a:lumMod val="85000"/>
+                  </a:schemeClr>
+                </a:solidFill>
+              </a:rPr>
+              <a:t>young</a:t>
+            </a:r>
+            <a:r>
+              <a:rPr lang="pl-PL" i="1" dirty="0">
+                <a:solidFill>
+                  <a:schemeClr val="bg1">
+                    <a:lumMod val="85000"/>
+                  </a:schemeClr>
+                </a:solidFill>
+              </a:rPr>
+              <a:t> </a:t>
+            </a:r>
+            <a:r>
+              <a:rPr lang="pl-PL" i="1" dirty="0" err="1">
+                <a:solidFill>
+                  <a:schemeClr val="bg1">
+                    <a:lumMod val="85000"/>
+                  </a:schemeClr>
+                </a:solidFill>
+              </a:rPr>
+              <a:t>female</a:t>
+            </a:r>
+            <a:r>
+              <a:rPr lang="pl-PL" i="1" dirty="0">
+                <a:solidFill>
+                  <a:schemeClr val="bg1">
+                    <a:lumMod val="85000"/>
+                  </a:schemeClr>
+                </a:solidFill>
+              </a:rPr>
+              <a:t> with blond </a:t>
+            </a:r>
+            <a:r>
+              <a:rPr lang="pl-PL" i="1" dirty="0" err="1">
+                <a:solidFill>
+                  <a:schemeClr val="bg1">
+                    <a:lumMod val="85000"/>
+                  </a:schemeClr>
+                </a:solidFill>
+              </a:rPr>
+              <a:t>hair</a:t>
+            </a:r>
+            <a:r>
+              <a:rPr lang="pl-PL" dirty="0">
+                <a:solidFill>
+                  <a:schemeClr val="bg1">
+                    <a:lumMod val="85000"/>
+                  </a:schemeClr>
+                </a:solidFill>
+              </a:rPr>
+              <a:t> </a:t>
+            </a:r>
+            <a:r>
+              <a:rPr lang="pl-PL" dirty="0" err="1">
+                <a:solidFill>
+                  <a:schemeClr val="bg1">
+                    <a:lumMod val="85000"/>
+                  </a:schemeClr>
+                </a:solidFill>
+              </a:rPr>
+              <a:t>or</a:t>
+            </a:r>
+            <a:r>
+              <a:rPr lang="pl-PL" dirty="0">
+                <a:solidFill>
+                  <a:schemeClr val="bg1">
+                    <a:lumMod val="85000"/>
+                  </a:schemeClr>
+                </a:solidFill>
+              </a:rPr>
+              <a:t> </a:t>
+            </a:r>
+            <a:r>
+              <a:rPr lang="pl-PL" i="1" dirty="0" err="1">
+                <a:solidFill>
+                  <a:schemeClr val="bg1">
+                    <a:lumMod val="85000"/>
+                  </a:schemeClr>
+                </a:solidFill>
+              </a:rPr>
+              <a:t>older</a:t>
+            </a:r>
+            <a:r>
+              <a:rPr lang="pl-PL" i="1" dirty="0">
+                <a:solidFill>
+                  <a:schemeClr val="bg1">
+                    <a:lumMod val="85000"/>
+                  </a:schemeClr>
+                </a:solidFill>
+              </a:rPr>
+              <a:t> </a:t>
+            </a:r>
+            <a:r>
+              <a:rPr lang="pl-PL" i="1" dirty="0" err="1">
+                <a:solidFill>
+                  <a:schemeClr val="bg1">
+                    <a:lumMod val="85000"/>
+                  </a:schemeClr>
+                </a:solidFill>
+              </a:rPr>
+              <a:t>male</a:t>
+            </a:r>
+            <a:r>
+              <a:rPr lang="pl-PL" i="1" dirty="0">
+                <a:solidFill>
+                  <a:schemeClr val="bg1">
+                    <a:lumMod val="85000"/>
+                  </a:schemeClr>
+                </a:solidFill>
+              </a:rPr>
+              <a:t> with </a:t>
+            </a:r>
+            <a:r>
+              <a:rPr lang="pl-PL" i="1" dirty="0" err="1">
+                <a:solidFill>
+                  <a:schemeClr val="bg1">
+                    <a:lumMod val="85000"/>
+                  </a:schemeClr>
+                </a:solidFill>
+              </a:rPr>
+              <a:t>black</a:t>
+            </a:r>
+            <a:r>
+              <a:rPr lang="pl-PL" i="1" dirty="0">
+                <a:solidFill>
+                  <a:schemeClr val="bg1">
+                    <a:lumMod val="85000"/>
+                  </a:schemeClr>
+                </a:solidFill>
+              </a:rPr>
+              <a:t> </a:t>
+            </a:r>
+            <a:r>
+              <a:rPr lang="pl-PL" i="1" dirty="0" err="1">
+                <a:solidFill>
+                  <a:schemeClr val="bg1">
+                    <a:lumMod val="85000"/>
+                  </a:schemeClr>
+                </a:solidFill>
+              </a:rPr>
+              <a:t>hair</a:t>
+            </a:r>
+            <a:r>
+              <a:rPr lang="pl-PL" dirty="0">
+                <a:solidFill>
+                  <a:schemeClr val="bg1">
+                    <a:lumMod val="85000"/>
+                  </a:schemeClr>
+                </a:solidFill>
+              </a:rPr>
+              <a:t>, </a:t>
+            </a:r>
+            <a:r>
+              <a:rPr lang="pl-PL" dirty="0" err="1">
+                <a:solidFill>
+                  <a:schemeClr val="bg1">
+                    <a:lumMod val="85000"/>
+                  </a:schemeClr>
+                </a:solidFill>
+              </a:rPr>
+              <a:t>produce</a:t>
+            </a:r>
+            <a:r>
+              <a:rPr lang="pl-PL" dirty="0">
+                <a:solidFill>
+                  <a:schemeClr val="bg1">
+                    <a:lumMod val="85000"/>
+                  </a:schemeClr>
+                </a:solidFill>
+              </a:rPr>
+              <a:t> </a:t>
+            </a:r>
+            <a:r>
+              <a:rPr lang="pl-PL" dirty="0" err="1">
+                <a:solidFill>
+                  <a:schemeClr val="bg1">
+                    <a:lumMod val="85000"/>
+                  </a:schemeClr>
+                </a:solidFill>
+              </a:rPr>
+              <a:t>more</a:t>
+            </a:r>
+            <a:r>
+              <a:rPr lang="pl-PL" dirty="0">
+                <a:solidFill>
+                  <a:schemeClr val="bg1">
+                    <a:lumMod val="85000"/>
+                  </a:schemeClr>
+                </a:solidFill>
+              </a:rPr>
+              <a:t> </a:t>
+            </a:r>
+            <a:r>
+              <a:rPr lang="pl-PL" dirty="0" err="1">
+                <a:solidFill>
+                  <a:schemeClr val="bg1">
+                    <a:lumMod val="85000"/>
+                  </a:schemeClr>
+                </a:solidFill>
+              </a:rPr>
+              <a:t>coherent</a:t>
+            </a:r>
+            <a:r>
+              <a:rPr lang="pl-PL" dirty="0">
+                <a:solidFill>
+                  <a:schemeClr val="bg1">
+                    <a:lumMod val="85000"/>
+                  </a:schemeClr>
+                </a:solidFill>
+              </a:rPr>
+              <a:t> and </a:t>
+            </a:r>
+            <a:r>
+              <a:rPr lang="pl-PL" dirty="0" err="1">
+                <a:solidFill>
+                  <a:schemeClr val="bg1">
+                    <a:lumMod val="85000"/>
+                  </a:schemeClr>
+                </a:solidFill>
+              </a:rPr>
+              <a:t>visually</a:t>
+            </a:r>
+            <a:r>
+              <a:rPr lang="pl-PL" dirty="0">
+                <a:solidFill>
+                  <a:schemeClr val="bg1">
+                    <a:lumMod val="85000"/>
+                  </a:schemeClr>
+                </a:solidFill>
+              </a:rPr>
+              <a:t> </a:t>
+            </a:r>
+            <a:r>
+              <a:rPr lang="pl-PL" dirty="0" err="1">
+                <a:solidFill>
+                  <a:schemeClr val="bg1">
+                    <a:lumMod val="85000"/>
+                  </a:schemeClr>
+                </a:solidFill>
+              </a:rPr>
+              <a:t>plausible</a:t>
+            </a:r>
+            <a:r>
+              <a:rPr lang="pl-PL" dirty="0">
+                <a:solidFill>
+                  <a:schemeClr val="bg1">
+                    <a:lumMod val="85000"/>
+                  </a:schemeClr>
+                </a:solidFill>
+              </a:rPr>
+              <a:t> </a:t>
+            </a:r>
+            <a:r>
+              <a:rPr lang="pl-PL" dirty="0" err="1">
+                <a:solidFill>
+                  <a:schemeClr val="bg1">
+                    <a:lumMod val="85000"/>
+                  </a:schemeClr>
+                </a:solidFill>
+              </a:rPr>
+              <a:t>results</a:t>
+            </a:r>
+            <a:r>
+              <a:rPr lang="pl-PL" dirty="0">
+                <a:solidFill>
+                  <a:schemeClr val="bg1">
+                    <a:lumMod val="85000"/>
+                  </a:schemeClr>
+                </a:solidFill>
+              </a:rPr>
+              <a:t>.</a:t>
+            </a:r>
+          </a:p>
+        </p:txBody>
+      </p:sp>
     </p:spTree>
     <p:extLst>
       <p:ext uri="{BB962C8B-B14F-4D97-AF65-F5344CB8AC3E}">
         <p14:creationId xmlns:p14="http://schemas.microsoft.com/office/powerpoint/2010/main" val="76165504"/>
+      </p:ext>
+    </p:extLst>
+  </p:cSld>
+  <p:clrMapOvr>
+    <a:masterClrMapping/>
+  </p:clrMapOvr>
+</p:sld>
+</file>
+
+<file path=ppt/slides/slide5.xml><?xml version="1.0" encoding="utf-8"?>
+<p:sld xmlns:a="http://schemas.openxmlformats.org/drawingml/2006/main" xmlns:r="http://schemas.openxmlformats.org/officeDocument/2006/relationships" xmlns:p="http://schemas.openxmlformats.org/presentationml/2006/main">
+  <p:cSld>
+    <p:bg>
+      <p:bgPr>
+        <a:solidFill>
+          <a:srgbClr val="1B1F27"/>
+        </a:solidFill>
+        <a:effectLst/>
+      </p:bgPr>
+    </p:bg>
+    <p:spTree>
+      <p:nvGrpSpPr>
+        <p:cNvPr id="1" name="">
+          <a:extLst>
+            <a:ext uri="{FF2B5EF4-FFF2-40B4-BE49-F238E27FC236}">
+              <a16:creationId xmlns:a16="http://schemas.microsoft.com/office/drawing/2014/main" id="{F493D318-E681-D8DE-291F-CB76F55B977A}"/>
+            </a:ext>
+          </a:extLst>
+        </p:cNvPr>
+        <p:cNvGrpSpPr/>
+        <p:nvPr/>
+      </p:nvGrpSpPr>
+      <p:grpSpPr>
+        <a:xfrm>
+          <a:off x="0" y="0"/>
+          <a:ext cx="0" cy="0"/>
+          <a:chOff x="0" y="0"/>
+          <a:chExt cx="0" cy="0"/>
+        </a:xfrm>
+      </p:grpSpPr>
+      <p:sp>
+        <p:nvSpPr>
+          <p:cNvPr id="5" name="Prostokąt 4">
+            <a:extLst>
+              <a:ext uri="{FF2B5EF4-FFF2-40B4-BE49-F238E27FC236}">
+                <a16:creationId xmlns:a16="http://schemas.microsoft.com/office/drawing/2014/main" id="{7457D866-5FC3-3786-F6F7-3F0DC27D503D}"/>
+              </a:ext>
+            </a:extLst>
+          </p:cNvPr>
+          <p:cNvSpPr>
+            <a:spLocks noGrp="1"/>
+          </p:cNvSpPr>
+          <p:nvPr/>
+        </p:nvSpPr>
+        <p:spPr>
+          <a:xfrm>
+            <a:off x="609600" y="400050"/>
+            <a:ext cx="9334500" cy="685800"/>
+          </a:xfrm>
+          <a:prstGeom prst="rect">
+            <a:avLst/>
+          </a:prstGeom>
+          <a:noFill/>
+          <a:ln w="0">
+            <a:noFill/>
+            <a:prstDash val="solid"/>
+          </a:ln>
+        </p:spPr>
+        <p:txBody>
+          <a:bodyPr/>
+          <a:lstStyle/>
+          <a:p>
+            <a:pPr>
+              <a:defRPr sz="3300" b="1">
+                <a:solidFill>
+                  <a:srgbClr val="F6F7FB"/>
+                </a:solidFill>
+              </a:defRPr>
+            </a:pPr>
+            <a:r>
+              <a:rPr lang="pl-PL" sz="3300" b="1" dirty="0" err="1">
+                <a:solidFill>
+                  <a:srgbClr val="F6F7FB"/>
+                </a:solidFill>
+              </a:rPr>
+              <a:t>Generation</a:t>
+            </a:r>
+            <a:r>
+              <a:rPr lang="pl-PL" sz="3300" b="1" dirty="0">
+                <a:solidFill>
+                  <a:srgbClr val="F6F7FB"/>
+                </a:solidFill>
+              </a:rPr>
+              <a:t> - </a:t>
+            </a:r>
+            <a:r>
+              <a:rPr lang="pl-PL" sz="3300" b="1" dirty="0" err="1">
+                <a:solidFill>
+                  <a:srgbClr val="F6F7FB"/>
+                </a:solidFill>
+              </a:rPr>
+              <a:t>Limitations</a:t>
+            </a:r>
+            <a:endParaRPr sz="3300" b="1" dirty="0">
+              <a:solidFill>
+                <a:srgbClr val="F6F7FB"/>
+              </a:solidFill>
+            </a:endParaRPr>
+          </a:p>
+        </p:txBody>
+      </p:sp>
+      <p:sp>
+        <p:nvSpPr>
+          <p:cNvPr id="2" name="Prostokąt 1">
+            <a:extLst>
+              <a:ext uri="{FF2B5EF4-FFF2-40B4-BE49-F238E27FC236}">
+                <a16:creationId xmlns:a16="http://schemas.microsoft.com/office/drawing/2014/main" id="{51B82197-966D-96C1-9EDC-0B4BC7399F97}"/>
+              </a:ext>
+            </a:extLst>
+          </p:cNvPr>
+          <p:cNvSpPr>
+            <a:spLocks noGrp="1"/>
+          </p:cNvSpPr>
+          <p:nvPr/>
+        </p:nvSpPr>
+        <p:spPr>
+          <a:xfrm>
+            <a:off x="609600" y="1009650"/>
+            <a:ext cx="9334500" cy="323850"/>
+          </a:xfrm>
+          <a:prstGeom prst="rect">
+            <a:avLst/>
+          </a:prstGeom>
+          <a:noFill/>
+          <a:ln w="0">
+            <a:noFill/>
+            <a:prstDash val="solid"/>
+          </a:ln>
+        </p:spPr>
+        <p:txBody>
+          <a:bodyPr/>
+          <a:lstStyle/>
+          <a:p>
+            <a:pPr>
+              <a:defRPr sz="1500">
+                <a:solidFill>
+                  <a:srgbClr val="B7C0D1"/>
+                </a:solidFill>
+              </a:defRPr>
+            </a:pPr>
+            <a:endParaRPr sz="1600" dirty="0">
+              <a:solidFill>
+                <a:srgbClr val="B7C0D1"/>
+              </a:solidFill>
+            </a:endParaRPr>
+          </a:p>
+        </p:txBody>
+      </p:sp>
+      <p:sp>
+        <p:nvSpPr>
+          <p:cNvPr id="4" name="Prostokąt: zaokrąglone rogi 3">
+            <a:extLst>
+              <a:ext uri="{FF2B5EF4-FFF2-40B4-BE49-F238E27FC236}">
+                <a16:creationId xmlns:a16="http://schemas.microsoft.com/office/drawing/2014/main" id="{ADA71E65-EAC9-1330-8C29-53EB9BF7217D}"/>
+              </a:ext>
+            </a:extLst>
+          </p:cNvPr>
+          <p:cNvSpPr>
+            <a:spLocks noGrp="1"/>
+          </p:cNvSpPr>
+          <p:nvPr/>
+        </p:nvSpPr>
+        <p:spPr>
+          <a:xfrm>
+            <a:off x="501926" y="2470302"/>
+            <a:ext cx="10972800" cy="4267200"/>
+          </a:xfrm>
+          <a:prstGeom prst="roundRect">
+            <a:avLst>
+              <a:gd name="adj" fmla="val 4800"/>
+            </a:avLst>
+          </a:prstGeom>
+          <a:solidFill>
+            <a:srgbClr val="232A35"/>
+          </a:solidFill>
+          <a:ln w="9525">
+            <a:solidFill>
+              <a:srgbClr val="313C4D"/>
+            </a:solidFill>
+            <a:prstDash val="solid"/>
+          </a:ln>
+        </p:spPr>
+        <p:txBody>
+          <a:bodyPr/>
+          <a:lstStyle/>
+          <a:p>
+            <a:endParaRPr lang="pl-PL"/>
+          </a:p>
+        </p:txBody>
+      </p:sp>
+      <p:sp>
+        <p:nvSpPr>
+          <p:cNvPr id="6" name="Prostokąt 5">
+            <a:extLst>
+              <a:ext uri="{FF2B5EF4-FFF2-40B4-BE49-F238E27FC236}">
+                <a16:creationId xmlns:a16="http://schemas.microsoft.com/office/drawing/2014/main" id="{6D1098BC-5345-689E-E816-DBECF4082295}"/>
+              </a:ext>
+            </a:extLst>
+          </p:cNvPr>
+          <p:cNvSpPr>
+            <a:spLocks noGrp="1"/>
+          </p:cNvSpPr>
+          <p:nvPr/>
+        </p:nvSpPr>
+        <p:spPr>
+          <a:xfrm>
+            <a:off x="819150" y="5753100"/>
+            <a:ext cx="9715500" cy="266700"/>
+          </a:xfrm>
+          <a:prstGeom prst="rect">
+            <a:avLst/>
+          </a:prstGeom>
+          <a:noFill/>
+          <a:ln w="0">
+            <a:noFill/>
+            <a:prstDash val="solid"/>
+          </a:ln>
+        </p:spPr>
+        <p:txBody>
+          <a:bodyPr/>
+          <a:lstStyle/>
+          <a:p>
+            <a:pPr>
+              <a:defRPr sz="1350">
+                <a:solidFill>
+                  <a:srgbClr val="B7C0D1"/>
+                </a:solidFill>
+              </a:defRPr>
+            </a:pPr>
+            <a:endParaRPr sz="1350" dirty="0">
+              <a:solidFill>
+                <a:srgbClr val="B7C0D1"/>
+              </a:solidFill>
+            </a:endParaRPr>
+          </a:p>
+        </p:txBody>
+      </p:sp>
+      <p:sp>
+        <p:nvSpPr>
+          <p:cNvPr id="8" name="pole tekstowe 7">
+            <a:extLst>
+              <a:ext uri="{FF2B5EF4-FFF2-40B4-BE49-F238E27FC236}">
+                <a16:creationId xmlns:a16="http://schemas.microsoft.com/office/drawing/2014/main" id="{78DA6FC5-52E1-4186-47C5-4755778447F0}"/>
+              </a:ext>
+            </a:extLst>
+          </p:cNvPr>
+          <p:cNvSpPr txBox="1"/>
+          <p:nvPr/>
+        </p:nvSpPr>
+        <p:spPr>
+          <a:xfrm>
+            <a:off x="612499" y="4280737"/>
+            <a:ext cx="3289852" cy="646331"/>
+          </a:xfrm>
+          <a:prstGeom prst="rect">
+            <a:avLst/>
+          </a:prstGeom>
+          <a:noFill/>
+        </p:spPr>
+        <p:txBody>
+          <a:bodyPr wrap="square" rtlCol="0">
+            <a:spAutoFit/>
+          </a:bodyPr>
+          <a:lstStyle/>
+          <a:p>
+            <a:r>
+              <a:rPr lang="pl-PL" dirty="0" err="1">
+                <a:solidFill>
+                  <a:schemeClr val="bg1">
+                    <a:lumMod val="85000"/>
+                  </a:schemeClr>
+                </a:solidFill>
+              </a:rPr>
+              <a:t>Female</a:t>
+            </a:r>
+            <a:r>
+              <a:rPr lang="pl-PL" dirty="0">
+                <a:solidFill>
+                  <a:schemeClr val="bg1">
+                    <a:lumMod val="85000"/>
+                  </a:schemeClr>
+                </a:solidFill>
+              </a:rPr>
+              <a:t>, </a:t>
+            </a:r>
+          </a:p>
+          <a:p>
+            <a:r>
+              <a:rPr lang="pl-PL" dirty="0" err="1">
+                <a:solidFill>
+                  <a:schemeClr val="bg1">
+                    <a:lumMod val="85000"/>
+                  </a:schemeClr>
+                </a:solidFill>
+              </a:rPr>
+              <a:t>Mustache</a:t>
+            </a:r>
+            <a:endParaRPr lang="pl-PL" dirty="0">
+              <a:solidFill>
+                <a:schemeClr val="bg1">
+                  <a:lumMod val="85000"/>
+                </a:schemeClr>
+              </a:solidFill>
+            </a:endParaRPr>
+          </a:p>
+        </p:txBody>
+      </p:sp>
+      <p:sp>
+        <p:nvSpPr>
+          <p:cNvPr id="11" name="pole tekstowe 10">
+            <a:extLst>
+              <a:ext uri="{FF2B5EF4-FFF2-40B4-BE49-F238E27FC236}">
+                <a16:creationId xmlns:a16="http://schemas.microsoft.com/office/drawing/2014/main" id="{AC106740-A763-14B1-6EED-F28090A8FE05}"/>
+              </a:ext>
+            </a:extLst>
+          </p:cNvPr>
+          <p:cNvSpPr txBox="1"/>
+          <p:nvPr/>
+        </p:nvSpPr>
+        <p:spPr>
+          <a:xfrm>
+            <a:off x="6096000" y="3906982"/>
+            <a:ext cx="3289852" cy="923330"/>
+          </a:xfrm>
+          <a:prstGeom prst="rect">
+            <a:avLst/>
+          </a:prstGeom>
+          <a:noFill/>
+        </p:spPr>
+        <p:txBody>
+          <a:bodyPr wrap="square" rtlCol="0">
+            <a:spAutoFit/>
+          </a:bodyPr>
+          <a:lstStyle/>
+          <a:p>
+            <a:r>
+              <a:rPr lang="pl-PL" dirty="0" err="1">
+                <a:solidFill>
+                  <a:schemeClr val="bg1">
+                    <a:lumMod val="85000"/>
+                  </a:schemeClr>
+                </a:solidFill>
+              </a:rPr>
+              <a:t>Female</a:t>
+            </a:r>
+            <a:r>
+              <a:rPr lang="pl-PL" dirty="0">
+                <a:solidFill>
+                  <a:schemeClr val="bg1">
+                    <a:lumMod val="85000"/>
+                  </a:schemeClr>
+                </a:solidFill>
+              </a:rPr>
+              <a:t>, </a:t>
+            </a:r>
+          </a:p>
+          <a:p>
+            <a:r>
+              <a:rPr lang="pl-PL" dirty="0" err="1">
+                <a:solidFill>
+                  <a:schemeClr val="bg1">
+                    <a:lumMod val="85000"/>
+                  </a:schemeClr>
+                </a:solidFill>
+              </a:rPr>
+              <a:t>Wavy</a:t>
+            </a:r>
+            <a:r>
+              <a:rPr lang="pl-PL" dirty="0">
+                <a:solidFill>
+                  <a:schemeClr val="bg1">
+                    <a:lumMod val="85000"/>
+                  </a:schemeClr>
+                </a:solidFill>
+              </a:rPr>
+              <a:t> </a:t>
+            </a:r>
+            <a:r>
+              <a:rPr lang="pl-PL" dirty="0" err="1">
+                <a:solidFill>
+                  <a:schemeClr val="bg1">
+                    <a:lumMod val="85000"/>
+                  </a:schemeClr>
+                </a:solidFill>
+              </a:rPr>
+              <a:t>hair</a:t>
+            </a:r>
+            <a:r>
+              <a:rPr lang="pl-PL" dirty="0">
+                <a:solidFill>
+                  <a:schemeClr val="bg1">
+                    <a:lumMod val="85000"/>
+                  </a:schemeClr>
+                </a:solidFill>
+              </a:rPr>
+              <a:t>, </a:t>
+            </a:r>
+          </a:p>
+          <a:p>
+            <a:r>
+              <a:rPr lang="pl-PL" dirty="0" err="1">
+                <a:solidFill>
+                  <a:schemeClr val="bg1">
+                    <a:lumMod val="85000"/>
+                  </a:schemeClr>
+                </a:solidFill>
+              </a:rPr>
+              <a:t>Earings</a:t>
+            </a:r>
+            <a:endParaRPr lang="pl-PL" dirty="0">
+              <a:solidFill>
+                <a:schemeClr val="bg1">
+                  <a:lumMod val="85000"/>
+                </a:schemeClr>
+              </a:solidFill>
+            </a:endParaRPr>
+          </a:p>
+        </p:txBody>
+      </p:sp>
+      <p:pic>
+        <p:nvPicPr>
+          <p:cNvPr id="9" name="Obraz 8">
+            <a:extLst>
+              <a:ext uri="{FF2B5EF4-FFF2-40B4-BE49-F238E27FC236}">
+                <a16:creationId xmlns:a16="http://schemas.microsoft.com/office/drawing/2014/main" id="{23FC85DD-C85B-CEE2-9803-D525B2C9C142}"/>
+              </a:ext>
+            </a:extLst>
+          </p:cNvPr>
+          <p:cNvPicPr>
+            <a:picLocks noChangeAspect="1"/>
+          </p:cNvPicPr>
+          <p:nvPr/>
+        </p:nvPicPr>
+        <p:blipFill>
+          <a:blip r:embed="rId3"/>
+          <a:stretch>
+            <a:fillRect/>
+          </a:stretch>
+        </p:blipFill>
+        <p:spPr>
+          <a:xfrm>
+            <a:off x="1657350" y="2535963"/>
+            <a:ext cx="4177748" cy="4138764"/>
+          </a:xfrm>
+          <a:prstGeom prst="rect">
+            <a:avLst/>
+          </a:prstGeom>
+        </p:spPr>
+      </p:pic>
+      <p:pic>
+        <p:nvPicPr>
+          <p:cNvPr id="12" name="Obraz 11">
+            <a:extLst>
+              <a:ext uri="{FF2B5EF4-FFF2-40B4-BE49-F238E27FC236}">
+                <a16:creationId xmlns:a16="http://schemas.microsoft.com/office/drawing/2014/main" id="{D2D47F45-4F27-3D81-C726-1967149991B3}"/>
+              </a:ext>
+            </a:extLst>
+          </p:cNvPr>
+          <p:cNvPicPr>
+            <a:picLocks noChangeAspect="1"/>
+          </p:cNvPicPr>
+          <p:nvPr/>
+        </p:nvPicPr>
+        <p:blipFill>
+          <a:blip r:embed="rId4"/>
+          <a:stretch>
+            <a:fillRect/>
+          </a:stretch>
+        </p:blipFill>
+        <p:spPr>
+          <a:xfrm>
+            <a:off x="7195102" y="2515181"/>
+            <a:ext cx="4177748" cy="4158104"/>
+          </a:xfrm>
+          <a:prstGeom prst="rect">
+            <a:avLst/>
+          </a:prstGeom>
+        </p:spPr>
+      </p:pic>
+      <p:sp>
+        <p:nvSpPr>
+          <p:cNvPr id="15" name="pole tekstowe 14">
+            <a:extLst>
+              <a:ext uri="{FF2B5EF4-FFF2-40B4-BE49-F238E27FC236}">
+                <a16:creationId xmlns:a16="http://schemas.microsoft.com/office/drawing/2014/main" id="{4EED40F1-8156-C960-B7FB-45AAA734FF36}"/>
+              </a:ext>
+            </a:extLst>
+          </p:cNvPr>
+          <p:cNvSpPr txBox="1"/>
+          <p:nvPr/>
+        </p:nvSpPr>
+        <p:spPr>
+          <a:xfrm>
+            <a:off x="609600" y="1085850"/>
+            <a:ext cx="10972800" cy="1200329"/>
+          </a:xfrm>
+          <a:prstGeom prst="rect">
+            <a:avLst/>
+          </a:prstGeom>
+          <a:noFill/>
+        </p:spPr>
+        <p:txBody>
+          <a:bodyPr wrap="square">
+            <a:spAutoFit/>
+          </a:bodyPr>
+          <a:lstStyle/>
+          <a:p>
+            <a:r>
+              <a:rPr lang="pl-PL" dirty="0">
+                <a:solidFill>
+                  <a:schemeClr val="bg1">
+                    <a:lumMod val="85000"/>
+                  </a:schemeClr>
+                </a:solidFill>
+              </a:rPr>
+              <a:t>Small and </a:t>
+            </a:r>
+            <a:r>
+              <a:rPr lang="pl-PL" dirty="0" err="1">
+                <a:solidFill>
+                  <a:schemeClr val="bg1">
+                    <a:lumMod val="85000"/>
+                  </a:schemeClr>
+                </a:solidFill>
+              </a:rPr>
+              <a:t>infrequent</a:t>
+            </a:r>
+            <a:r>
+              <a:rPr lang="pl-PL" dirty="0">
+                <a:solidFill>
+                  <a:schemeClr val="bg1">
+                    <a:lumMod val="85000"/>
+                  </a:schemeClr>
+                </a:solidFill>
+              </a:rPr>
+              <a:t> </a:t>
+            </a:r>
+            <a:r>
+              <a:rPr lang="pl-PL" dirty="0" err="1">
+                <a:solidFill>
+                  <a:schemeClr val="bg1">
+                    <a:lumMod val="85000"/>
+                  </a:schemeClr>
+                </a:solidFill>
+              </a:rPr>
+              <a:t>attributes</a:t>
+            </a:r>
+            <a:r>
+              <a:rPr lang="pl-PL" dirty="0">
+                <a:solidFill>
+                  <a:schemeClr val="bg1">
+                    <a:lumMod val="85000"/>
+                  </a:schemeClr>
+                </a:solidFill>
+              </a:rPr>
+              <a:t>, </a:t>
+            </a:r>
+            <a:r>
+              <a:rPr lang="pl-PL" dirty="0" err="1">
+                <a:solidFill>
+                  <a:schemeClr val="bg1">
+                    <a:lumMod val="85000"/>
+                  </a:schemeClr>
+                </a:solidFill>
+              </a:rPr>
+              <a:t>such</a:t>
+            </a:r>
+            <a:r>
+              <a:rPr lang="pl-PL" dirty="0">
+                <a:solidFill>
+                  <a:schemeClr val="bg1">
+                    <a:lumMod val="85000"/>
+                  </a:schemeClr>
+                </a:solidFill>
+              </a:rPr>
+              <a:t> as </a:t>
+            </a:r>
+            <a:r>
+              <a:rPr lang="pl-PL" dirty="0" err="1">
+                <a:solidFill>
+                  <a:schemeClr val="bg1">
+                    <a:lumMod val="85000"/>
+                  </a:schemeClr>
+                </a:solidFill>
+              </a:rPr>
+              <a:t>earrings</a:t>
+            </a:r>
+            <a:r>
+              <a:rPr lang="pl-PL" dirty="0">
+                <a:solidFill>
+                  <a:schemeClr val="bg1">
+                    <a:lumMod val="85000"/>
+                  </a:schemeClr>
+                </a:solidFill>
+              </a:rPr>
+              <a:t>, </a:t>
+            </a:r>
+            <a:r>
+              <a:rPr lang="pl-PL" dirty="0" err="1">
+                <a:solidFill>
+                  <a:schemeClr val="bg1">
+                    <a:lumMod val="85000"/>
+                  </a:schemeClr>
+                </a:solidFill>
+              </a:rPr>
+              <a:t>are</a:t>
+            </a:r>
+            <a:r>
+              <a:rPr lang="pl-PL" dirty="0">
+                <a:solidFill>
+                  <a:schemeClr val="bg1">
+                    <a:lumMod val="85000"/>
+                  </a:schemeClr>
+                </a:solidFill>
+              </a:rPr>
+              <a:t> </a:t>
+            </a:r>
+            <a:r>
+              <a:rPr lang="pl-PL" dirty="0" err="1">
+                <a:solidFill>
+                  <a:schemeClr val="bg1">
+                    <a:lumMod val="85000"/>
+                  </a:schemeClr>
+                </a:solidFill>
+              </a:rPr>
+              <a:t>often</a:t>
+            </a:r>
+            <a:r>
+              <a:rPr lang="pl-PL" dirty="0">
+                <a:solidFill>
+                  <a:schemeClr val="bg1">
+                    <a:lumMod val="85000"/>
+                  </a:schemeClr>
+                </a:solidFill>
+              </a:rPr>
+              <a:t> not </a:t>
+            </a:r>
+            <a:r>
+              <a:rPr lang="pl-PL" dirty="0" err="1">
+                <a:solidFill>
+                  <a:schemeClr val="bg1">
+                    <a:lumMod val="85000"/>
+                  </a:schemeClr>
+                </a:solidFill>
+              </a:rPr>
+              <a:t>generated</a:t>
+            </a:r>
+            <a:r>
+              <a:rPr lang="pl-PL" dirty="0">
+                <a:solidFill>
+                  <a:schemeClr val="bg1">
+                    <a:lumMod val="85000"/>
+                  </a:schemeClr>
+                </a:solidFill>
+              </a:rPr>
+              <a:t> </a:t>
+            </a:r>
+            <a:r>
+              <a:rPr lang="pl-PL" dirty="0" err="1">
+                <a:solidFill>
+                  <a:schemeClr val="bg1">
+                    <a:lumMod val="85000"/>
+                  </a:schemeClr>
+                </a:solidFill>
+              </a:rPr>
+              <a:t>reliably</a:t>
+            </a:r>
+            <a:r>
+              <a:rPr lang="pl-PL" dirty="0">
+                <a:solidFill>
+                  <a:schemeClr val="bg1">
+                    <a:lumMod val="85000"/>
+                  </a:schemeClr>
+                </a:solidFill>
+              </a:rPr>
+              <a:t>. The model </a:t>
+            </a:r>
+            <a:r>
+              <a:rPr lang="pl-PL" dirty="0" err="1">
+                <a:solidFill>
+                  <a:schemeClr val="bg1">
+                    <a:lumMod val="85000"/>
+                  </a:schemeClr>
+                </a:solidFill>
+              </a:rPr>
+              <a:t>appears</a:t>
+            </a:r>
+            <a:r>
+              <a:rPr lang="pl-PL" dirty="0">
+                <a:solidFill>
+                  <a:schemeClr val="bg1">
+                    <a:lumMod val="85000"/>
+                  </a:schemeClr>
+                </a:solidFill>
+              </a:rPr>
+              <a:t> to </a:t>
+            </a:r>
+            <a:r>
+              <a:rPr lang="pl-PL" dirty="0" err="1">
+                <a:solidFill>
+                  <a:schemeClr val="bg1">
+                    <a:lumMod val="85000"/>
+                  </a:schemeClr>
+                </a:solidFill>
+              </a:rPr>
+              <a:t>focus</a:t>
+            </a:r>
+            <a:r>
+              <a:rPr lang="pl-PL" dirty="0">
+                <a:solidFill>
+                  <a:schemeClr val="bg1">
+                    <a:lumMod val="85000"/>
+                  </a:schemeClr>
+                </a:solidFill>
+              </a:rPr>
+              <a:t> on dominant </a:t>
+            </a:r>
+            <a:r>
+              <a:rPr lang="pl-PL" dirty="0" err="1">
+                <a:solidFill>
+                  <a:schemeClr val="bg1">
+                    <a:lumMod val="85000"/>
+                  </a:schemeClr>
+                </a:solidFill>
+              </a:rPr>
+              <a:t>facial</a:t>
+            </a:r>
+            <a:r>
+              <a:rPr lang="pl-PL" dirty="0">
+                <a:solidFill>
+                  <a:schemeClr val="bg1">
+                    <a:lumMod val="85000"/>
+                  </a:schemeClr>
+                </a:solidFill>
+              </a:rPr>
+              <a:t> </a:t>
+            </a:r>
+            <a:r>
+              <a:rPr lang="pl-PL" dirty="0" err="1">
+                <a:solidFill>
+                  <a:schemeClr val="bg1">
+                    <a:lumMod val="85000"/>
+                  </a:schemeClr>
+                </a:solidFill>
+              </a:rPr>
+              <a:t>features</a:t>
+            </a:r>
+            <a:r>
+              <a:rPr lang="pl-PL" dirty="0">
+                <a:solidFill>
+                  <a:schemeClr val="bg1">
+                    <a:lumMod val="85000"/>
+                  </a:schemeClr>
+                </a:solidFill>
+              </a:rPr>
+              <a:t> and </a:t>
+            </a:r>
+            <a:r>
+              <a:rPr lang="pl-PL" dirty="0" err="1">
+                <a:solidFill>
+                  <a:schemeClr val="bg1">
+                    <a:lumMod val="85000"/>
+                  </a:schemeClr>
+                </a:solidFill>
+              </a:rPr>
+              <a:t>may</a:t>
+            </a:r>
+            <a:r>
+              <a:rPr lang="pl-PL" dirty="0">
+                <a:solidFill>
+                  <a:schemeClr val="bg1">
+                    <a:lumMod val="85000"/>
+                  </a:schemeClr>
+                </a:solidFill>
+              </a:rPr>
+              <a:t> </a:t>
+            </a:r>
+            <a:r>
+              <a:rPr lang="pl-PL" dirty="0" err="1">
+                <a:solidFill>
+                  <a:schemeClr val="bg1">
+                    <a:lumMod val="85000"/>
+                  </a:schemeClr>
+                </a:solidFill>
+              </a:rPr>
+              <a:t>ignore</a:t>
+            </a:r>
+            <a:r>
+              <a:rPr lang="pl-PL" dirty="0">
+                <a:solidFill>
+                  <a:schemeClr val="bg1">
+                    <a:lumMod val="85000"/>
+                  </a:schemeClr>
+                </a:solidFill>
+              </a:rPr>
+              <a:t> </a:t>
+            </a:r>
+            <a:r>
+              <a:rPr lang="pl-PL" dirty="0" err="1">
+                <a:solidFill>
+                  <a:schemeClr val="bg1">
+                    <a:lumMod val="85000"/>
+                  </a:schemeClr>
+                </a:solidFill>
+              </a:rPr>
+              <a:t>details</a:t>
+            </a:r>
+            <a:r>
+              <a:rPr lang="pl-PL" dirty="0">
+                <a:solidFill>
+                  <a:schemeClr val="bg1">
+                    <a:lumMod val="85000"/>
+                  </a:schemeClr>
+                </a:solidFill>
+              </a:rPr>
+              <a:t> </a:t>
+            </a:r>
+            <a:r>
+              <a:rPr lang="pl-PL" dirty="0" err="1">
+                <a:solidFill>
+                  <a:schemeClr val="bg1">
+                    <a:lumMod val="85000"/>
+                  </a:schemeClr>
+                </a:solidFill>
+              </a:rPr>
+              <a:t>that</a:t>
+            </a:r>
+            <a:r>
+              <a:rPr lang="pl-PL" dirty="0">
+                <a:solidFill>
+                  <a:schemeClr val="bg1">
+                    <a:lumMod val="85000"/>
+                  </a:schemeClr>
+                </a:solidFill>
+              </a:rPr>
+              <a:t> </a:t>
+            </a:r>
+            <a:r>
+              <a:rPr lang="pl-PL" dirty="0" err="1">
+                <a:solidFill>
+                  <a:schemeClr val="bg1">
+                    <a:lumMod val="85000"/>
+                  </a:schemeClr>
+                </a:solidFill>
+              </a:rPr>
+              <a:t>occupy</a:t>
+            </a:r>
+            <a:r>
+              <a:rPr lang="pl-PL" dirty="0">
+                <a:solidFill>
+                  <a:schemeClr val="bg1">
+                    <a:lumMod val="85000"/>
+                  </a:schemeClr>
+                </a:solidFill>
+              </a:rPr>
+              <a:t> </a:t>
+            </a:r>
+            <a:r>
+              <a:rPr lang="pl-PL" dirty="0" err="1">
+                <a:solidFill>
+                  <a:schemeClr val="bg1">
+                    <a:lumMod val="85000"/>
+                  </a:schemeClr>
+                </a:solidFill>
+              </a:rPr>
+              <a:t>only</a:t>
+            </a:r>
+            <a:r>
+              <a:rPr lang="pl-PL" dirty="0">
+                <a:solidFill>
+                  <a:schemeClr val="bg1">
+                    <a:lumMod val="85000"/>
+                  </a:schemeClr>
+                </a:solidFill>
+              </a:rPr>
+              <a:t> a small region of the image.</a:t>
+            </a:r>
+            <a:r>
+              <a:rPr lang="pl-PL" dirty="0"/>
+              <a:t> </a:t>
+            </a:r>
+          </a:p>
+          <a:p>
+            <a:r>
+              <a:rPr lang="pl-PL" dirty="0" err="1">
+                <a:solidFill>
+                  <a:schemeClr val="bg1">
+                    <a:lumMod val="85000"/>
+                  </a:schemeClr>
+                </a:solidFill>
+              </a:rPr>
+              <a:t>Conflicting</a:t>
+            </a:r>
+            <a:r>
+              <a:rPr lang="pl-PL" dirty="0">
+                <a:solidFill>
+                  <a:schemeClr val="bg1">
+                    <a:lumMod val="85000"/>
+                  </a:schemeClr>
+                </a:solidFill>
+              </a:rPr>
+              <a:t> </a:t>
+            </a:r>
+            <a:r>
+              <a:rPr lang="pl-PL" dirty="0" err="1">
+                <a:solidFill>
+                  <a:schemeClr val="bg1">
+                    <a:lumMod val="85000"/>
+                  </a:schemeClr>
+                </a:solidFill>
+              </a:rPr>
+              <a:t>attribute</a:t>
+            </a:r>
+            <a:r>
+              <a:rPr lang="pl-PL" dirty="0">
+                <a:solidFill>
+                  <a:schemeClr val="bg1">
+                    <a:lumMod val="85000"/>
+                  </a:schemeClr>
+                </a:solidFill>
+              </a:rPr>
+              <a:t> </a:t>
+            </a:r>
+            <a:r>
+              <a:rPr lang="pl-PL" dirty="0" err="1">
+                <a:solidFill>
+                  <a:schemeClr val="bg1">
+                    <a:lumMod val="85000"/>
+                  </a:schemeClr>
+                </a:solidFill>
+              </a:rPr>
+              <a:t>combinations</a:t>
+            </a:r>
+            <a:r>
+              <a:rPr lang="pl-PL" dirty="0">
+                <a:solidFill>
+                  <a:schemeClr val="bg1">
+                    <a:lumMod val="85000"/>
+                  </a:schemeClr>
+                </a:solidFill>
+              </a:rPr>
+              <a:t> </a:t>
+            </a:r>
+            <a:r>
+              <a:rPr lang="pl-PL" dirty="0" err="1">
+                <a:solidFill>
+                  <a:schemeClr val="bg1">
+                    <a:lumMod val="85000"/>
+                  </a:schemeClr>
+                </a:solidFill>
+              </a:rPr>
+              <a:t>are</a:t>
+            </a:r>
+            <a:r>
+              <a:rPr lang="pl-PL" dirty="0">
+                <a:solidFill>
+                  <a:schemeClr val="bg1">
+                    <a:lumMod val="85000"/>
+                  </a:schemeClr>
+                </a:solidFill>
+              </a:rPr>
+              <a:t> </a:t>
+            </a:r>
+            <a:r>
+              <a:rPr lang="pl-PL" dirty="0" err="1">
+                <a:solidFill>
+                  <a:schemeClr val="bg1">
+                    <a:lumMod val="85000"/>
+                  </a:schemeClr>
+                </a:solidFill>
+              </a:rPr>
+              <a:t>also</a:t>
+            </a:r>
+            <a:r>
+              <a:rPr lang="pl-PL" dirty="0">
+                <a:solidFill>
+                  <a:schemeClr val="bg1">
+                    <a:lumMod val="85000"/>
+                  </a:schemeClr>
+                </a:solidFill>
+              </a:rPr>
+              <a:t> </a:t>
+            </a:r>
+            <a:r>
+              <a:rPr lang="pl-PL" dirty="0" err="1">
+                <a:solidFill>
+                  <a:schemeClr val="bg1">
+                    <a:lumMod val="85000"/>
+                  </a:schemeClr>
+                </a:solidFill>
+              </a:rPr>
+              <a:t>challenging</a:t>
+            </a:r>
+            <a:r>
+              <a:rPr lang="pl-PL" dirty="0">
+                <a:solidFill>
+                  <a:schemeClr val="bg1">
+                    <a:lumMod val="85000"/>
+                  </a:schemeClr>
+                </a:solidFill>
+              </a:rPr>
+              <a:t>. For </a:t>
+            </a:r>
+            <a:r>
+              <a:rPr lang="pl-PL" dirty="0" err="1">
+                <a:solidFill>
+                  <a:schemeClr val="bg1">
+                    <a:lumMod val="85000"/>
+                  </a:schemeClr>
+                </a:solidFill>
+              </a:rPr>
+              <a:t>example</a:t>
+            </a:r>
+            <a:r>
+              <a:rPr lang="pl-PL" dirty="0">
+                <a:solidFill>
+                  <a:schemeClr val="bg1">
+                    <a:lumMod val="85000"/>
+                  </a:schemeClr>
+                </a:solidFill>
+              </a:rPr>
+              <a:t>, </a:t>
+            </a:r>
+            <a:r>
+              <a:rPr lang="pl-PL" dirty="0" err="1">
+                <a:solidFill>
+                  <a:schemeClr val="bg1">
+                    <a:lumMod val="85000"/>
+                  </a:schemeClr>
+                </a:solidFill>
+              </a:rPr>
+              <a:t>requesting</a:t>
+            </a:r>
+            <a:r>
+              <a:rPr lang="pl-PL" dirty="0">
+                <a:solidFill>
+                  <a:schemeClr val="bg1">
+                    <a:lumMod val="85000"/>
+                  </a:schemeClr>
+                </a:solidFill>
+              </a:rPr>
+              <a:t> a </a:t>
+            </a:r>
+            <a:r>
+              <a:rPr lang="pl-PL" dirty="0" err="1">
+                <a:solidFill>
+                  <a:schemeClr val="bg1">
+                    <a:lumMod val="85000"/>
+                  </a:schemeClr>
+                </a:solidFill>
+              </a:rPr>
+              <a:t>female</a:t>
+            </a:r>
+            <a:r>
+              <a:rPr lang="pl-PL" dirty="0">
+                <a:solidFill>
+                  <a:schemeClr val="bg1">
+                    <a:lumMod val="85000"/>
+                  </a:schemeClr>
+                </a:solidFill>
+              </a:rPr>
+              <a:t> face with a </a:t>
+            </a:r>
+            <a:r>
+              <a:rPr lang="pl-PL" dirty="0" err="1">
+                <a:solidFill>
+                  <a:schemeClr val="bg1">
+                    <a:lumMod val="85000"/>
+                  </a:schemeClr>
+                </a:solidFill>
+              </a:rPr>
+              <a:t>mustache</a:t>
+            </a:r>
+            <a:r>
+              <a:rPr lang="pl-PL" dirty="0">
+                <a:solidFill>
+                  <a:schemeClr val="bg1">
+                    <a:lumMod val="85000"/>
+                  </a:schemeClr>
+                </a:solidFill>
+              </a:rPr>
+              <a:t> </a:t>
+            </a:r>
+            <a:r>
+              <a:rPr lang="pl-PL" dirty="0" err="1">
+                <a:solidFill>
+                  <a:schemeClr val="bg1">
+                    <a:lumMod val="85000"/>
+                  </a:schemeClr>
+                </a:solidFill>
+              </a:rPr>
+              <a:t>often</a:t>
+            </a:r>
+            <a:r>
+              <a:rPr lang="pl-PL" dirty="0">
+                <a:solidFill>
+                  <a:schemeClr val="bg1">
+                    <a:lumMod val="85000"/>
+                  </a:schemeClr>
+                </a:solidFill>
+              </a:rPr>
+              <a:t> </a:t>
+            </a:r>
+            <a:r>
+              <a:rPr lang="pl-PL" dirty="0" err="1">
+                <a:solidFill>
+                  <a:schemeClr val="bg1">
+                    <a:lumMod val="85000"/>
+                  </a:schemeClr>
+                </a:solidFill>
+              </a:rPr>
+              <a:t>produces</a:t>
+            </a:r>
+            <a:r>
+              <a:rPr lang="pl-PL" dirty="0">
+                <a:solidFill>
+                  <a:schemeClr val="bg1">
+                    <a:lumMod val="85000"/>
+                  </a:schemeClr>
+                </a:solidFill>
+              </a:rPr>
+              <a:t> </a:t>
+            </a:r>
+            <a:r>
+              <a:rPr lang="pl-PL" dirty="0" err="1">
+                <a:solidFill>
+                  <a:schemeClr val="bg1">
+                    <a:lumMod val="85000"/>
+                  </a:schemeClr>
+                </a:solidFill>
+              </a:rPr>
+              <a:t>weak</a:t>
+            </a:r>
+            <a:r>
+              <a:rPr lang="pl-PL" dirty="0">
+                <a:solidFill>
+                  <a:schemeClr val="bg1">
+                    <a:lumMod val="85000"/>
+                  </a:schemeClr>
+                </a:solidFill>
+              </a:rPr>
+              <a:t> </a:t>
+            </a:r>
+            <a:r>
+              <a:rPr lang="pl-PL" dirty="0" err="1">
+                <a:solidFill>
+                  <a:schemeClr val="bg1">
+                    <a:lumMod val="85000"/>
+                  </a:schemeClr>
+                </a:solidFill>
+              </a:rPr>
+              <a:t>or</a:t>
+            </a:r>
+            <a:r>
+              <a:rPr lang="pl-PL" dirty="0">
+                <a:solidFill>
+                  <a:schemeClr val="bg1">
+                    <a:lumMod val="85000"/>
+                  </a:schemeClr>
+                </a:solidFill>
+              </a:rPr>
+              <a:t> </a:t>
+            </a:r>
+            <a:r>
+              <a:rPr lang="pl-PL" dirty="0" err="1">
+                <a:solidFill>
+                  <a:schemeClr val="bg1">
+                    <a:lumMod val="85000"/>
+                  </a:schemeClr>
+                </a:solidFill>
+              </a:rPr>
+              <a:t>inconsistent</a:t>
+            </a:r>
+            <a:r>
+              <a:rPr lang="pl-PL" dirty="0">
+                <a:solidFill>
+                  <a:schemeClr val="bg1">
+                    <a:lumMod val="85000"/>
+                  </a:schemeClr>
+                </a:solidFill>
+              </a:rPr>
+              <a:t> </a:t>
+            </a:r>
+            <a:r>
+              <a:rPr lang="pl-PL" dirty="0" err="1">
+                <a:solidFill>
+                  <a:schemeClr val="bg1">
+                    <a:lumMod val="85000"/>
+                  </a:schemeClr>
+                </a:solidFill>
+              </a:rPr>
+              <a:t>results</a:t>
+            </a:r>
+            <a:r>
+              <a:rPr lang="pl-PL" dirty="0">
+                <a:solidFill>
+                  <a:schemeClr val="bg1">
+                    <a:lumMod val="85000"/>
+                  </a:schemeClr>
+                </a:solidFill>
+              </a:rPr>
+              <a:t> </a:t>
+            </a:r>
+            <a:r>
+              <a:rPr lang="pl-PL" dirty="0" err="1">
+                <a:solidFill>
+                  <a:schemeClr val="bg1">
+                    <a:lumMod val="85000"/>
+                  </a:schemeClr>
+                </a:solidFill>
+              </a:rPr>
+              <a:t>because</a:t>
+            </a:r>
+            <a:r>
+              <a:rPr lang="pl-PL" dirty="0">
+                <a:solidFill>
+                  <a:schemeClr val="bg1">
+                    <a:lumMod val="85000"/>
+                  </a:schemeClr>
+                </a:solidFill>
+              </a:rPr>
+              <a:t> </a:t>
+            </a:r>
+            <a:r>
+              <a:rPr lang="pl-PL" dirty="0" err="1">
+                <a:solidFill>
+                  <a:schemeClr val="bg1">
+                    <a:lumMod val="85000"/>
+                  </a:schemeClr>
+                </a:solidFill>
+              </a:rPr>
+              <a:t>such</a:t>
+            </a:r>
+            <a:r>
+              <a:rPr lang="pl-PL" dirty="0">
+                <a:solidFill>
+                  <a:schemeClr val="bg1">
+                    <a:lumMod val="85000"/>
+                  </a:schemeClr>
+                </a:solidFill>
+              </a:rPr>
+              <a:t> </a:t>
+            </a:r>
+            <a:r>
+              <a:rPr lang="pl-PL" dirty="0" err="1">
+                <a:solidFill>
+                  <a:schemeClr val="bg1">
+                    <a:lumMod val="85000"/>
+                  </a:schemeClr>
+                </a:solidFill>
+              </a:rPr>
+              <a:t>combinations</a:t>
+            </a:r>
+            <a:r>
+              <a:rPr lang="pl-PL" dirty="0">
+                <a:solidFill>
+                  <a:schemeClr val="bg1">
+                    <a:lumMod val="85000"/>
+                  </a:schemeClr>
+                </a:solidFill>
+              </a:rPr>
+              <a:t> </a:t>
+            </a:r>
+            <a:r>
+              <a:rPr lang="pl-PL" dirty="0" err="1">
+                <a:solidFill>
+                  <a:schemeClr val="bg1">
+                    <a:lumMod val="85000"/>
+                  </a:schemeClr>
+                </a:solidFill>
+              </a:rPr>
+              <a:t>are</a:t>
+            </a:r>
+            <a:r>
+              <a:rPr lang="pl-PL" dirty="0">
+                <a:solidFill>
+                  <a:schemeClr val="bg1">
+                    <a:lumMod val="85000"/>
+                  </a:schemeClr>
+                </a:solidFill>
+              </a:rPr>
+              <a:t> </a:t>
+            </a:r>
+            <a:r>
+              <a:rPr lang="pl-PL" dirty="0" err="1">
+                <a:solidFill>
+                  <a:schemeClr val="bg1">
+                    <a:lumMod val="85000"/>
+                  </a:schemeClr>
+                </a:solidFill>
+              </a:rPr>
+              <a:t>rare</a:t>
+            </a:r>
+            <a:r>
+              <a:rPr lang="pl-PL" dirty="0">
+                <a:solidFill>
+                  <a:schemeClr val="bg1">
+                    <a:lumMod val="85000"/>
+                  </a:schemeClr>
+                </a:solidFill>
+              </a:rPr>
+              <a:t> </a:t>
+            </a:r>
+            <a:r>
+              <a:rPr lang="pl-PL" dirty="0" err="1">
+                <a:solidFill>
+                  <a:schemeClr val="bg1">
+                    <a:lumMod val="85000"/>
+                  </a:schemeClr>
+                </a:solidFill>
+              </a:rPr>
+              <a:t>or</a:t>
+            </a:r>
+            <a:r>
+              <a:rPr lang="pl-PL" dirty="0">
+                <a:solidFill>
+                  <a:schemeClr val="bg1">
+                    <a:lumMod val="85000"/>
+                  </a:schemeClr>
+                </a:solidFill>
+              </a:rPr>
+              <a:t> </a:t>
+            </a:r>
+            <a:r>
+              <a:rPr lang="pl-PL" dirty="0" err="1">
+                <a:solidFill>
+                  <a:schemeClr val="bg1">
+                    <a:lumMod val="85000"/>
+                  </a:schemeClr>
+                </a:solidFill>
+              </a:rPr>
+              <a:t>absent</a:t>
+            </a:r>
+            <a:r>
+              <a:rPr lang="pl-PL" dirty="0">
+                <a:solidFill>
+                  <a:schemeClr val="bg1">
+                    <a:lumMod val="85000"/>
+                  </a:schemeClr>
+                </a:solidFill>
+              </a:rPr>
+              <a:t> in the </a:t>
+            </a:r>
+            <a:r>
+              <a:rPr lang="pl-PL" dirty="0" err="1">
+                <a:solidFill>
+                  <a:schemeClr val="bg1">
+                    <a:lumMod val="85000"/>
+                  </a:schemeClr>
+                </a:solidFill>
+              </a:rPr>
+              <a:t>training</a:t>
+            </a:r>
+            <a:r>
+              <a:rPr lang="pl-PL" dirty="0">
+                <a:solidFill>
+                  <a:schemeClr val="bg1">
+                    <a:lumMod val="85000"/>
+                  </a:schemeClr>
+                </a:solidFill>
+              </a:rPr>
+              <a:t> </a:t>
+            </a:r>
+            <a:r>
+              <a:rPr lang="pl-PL" dirty="0" err="1">
+                <a:solidFill>
+                  <a:schemeClr val="bg1">
+                    <a:lumMod val="85000"/>
+                  </a:schemeClr>
+                </a:solidFill>
+              </a:rPr>
+              <a:t>dataset</a:t>
+            </a:r>
+            <a:r>
+              <a:rPr lang="pl-PL" dirty="0">
+                <a:solidFill>
+                  <a:schemeClr val="bg1">
+                    <a:lumMod val="85000"/>
+                  </a:schemeClr>
+                </a:solidFill>
+              </a:rPr>
+              <a:t>.</a:t>
+            </a:r>
+          </a:p>
+        </p:txBody>
+      </p:sp>
+    </p:spTree>
+    <p:extLst>
+      <p:ext uri="{BB962C8B-B14F-4D97-AF65-F5344CB8AC3E}">
+        <p14:creationId xmlns:p14="http://schemas.microsoft.com/office/powerpoint/2010/main" val="547956697"/>
+      </p:ext>
+    </p:extLst>
+  </p:cSld>
+  <p:clrMapOvr>
+    <a:masterClrMapping/>
+  </p:clrMapOvr>
+</p:sld>
+</file>
+
+<file path=ppt/slides/slide6.xml><?xml version="1.0" encoding="utf-8"?>
+<p:sld xmlns:a="http://schemas.openxmlformats.org/drawingml/2006/main" xmlns:r="http://schemas.openxmlformats.org/officeDocument/2006/relationships" xmlns:p="http://schemas.openxmlformats.org/presentationml/2006/main">
+  <p:cSld>
+    <p:bg>
+      <p:bgPr>
+        <a:solidFill>
+          <a:srgbClr val="1B1F27"/>
+        </a:solidFill>
+        <a:effectLst/>
+      </p:bgPr>
+    </p:bg>
+    <p:spTree>
+      <p:nvGrpSpPr>
+        <p:cNvPr id="1" name=""/>
+        <p:cNvGrpSpPr/>
+        <p:nvPr/>
+      </p:nvGrpSpPr>
+      <p:grpSpPr>
+        <a:xfrm>
+          <a:off x="0" y="0"/>
+          <a:ext cx="0" cy="0"/>
+          <a:chOff x="0" y="0"/>
+          <a:chExt cx="0" cy="0"/>
+        </a:xfrm>
+      </p:grpSpPr>
+      <p:sp>
+        <p:nvSpPr>
+          <p:cNvPr id="5" name="Prostokąt 4">
+            <a:extLst>
+              <a:ext uri="{FF2B5EF4-FFF2-40B4-BE49-F238E27FC236}">
+                <a16:creationId xmlns:a16="http://schemas.microsoft.com/office/drawing/2014/main" id="{D62DD357-BF8D-4FBE-B8C7-24CD44940392}"/>
+              </a:ext>
+            </a:extLst>
+          </p:cNvPr>
+          <p:cNvSpPr>
+            <a:spLocks noGrp="1"/>
+          </p:cNvSpPr>
+          <p:nvPr/>
+        </p:nvSpPr>
+        <p:spPr>
+          <a:xfrm>
+            <a:off x="609600" y="400050"/>
+            <a:ext cx="9334500" cy="685800"/>
+          </a:xfrm>
+          <a:prstGeom prst="rect">
+            <a:avLst/>
+          </a:prstGeom>
+          <a:noFill/>
+          <a:ln w="0">
+            <a:noFill/>
+            <a:prstDash val="solid"/>
+          </a:ln>
+        </p:spPr>
+        <p:txBody>
+          <a:bodyPr/>
+          <a:lstStyle/>
+          <a:p>
+            <a:pPr>
+              <a:defRPr sz="3300" b="1">
+                <a:solidFill>
+                  <a:srgbClr val="F6F7FB"/>
+                </a:solidFill>
+              </a:defRPr>
+            </a:pPr>
+            <a:r>
+              <a:rPr sz="3300" b="1">
+                <a:solidFill>
+                  <a:srgbClr val="F6F7FB"/>
+                </a:solidFill>
+              </a:rPr>
+              <a:t>Reconstruction</a:t>
+            </a:r>
+          </a:p>
+        </p:txBody>
+      </p:sp>
+      <p:sp>
+        <p:nvSpPr>
+          <p:cNvPr id="2" name="Prostokąt 1">
+            <a:extLst>
+              <a:ext uri="{FF2B5EF4-FFF2-40B4-BE49-F238E27FC236}">
+                <a16:creationId xmlns:a16="http://schemas.microsoft.com/office/drawing/2014/main" id="{08A070A5-44C9-4862-BF02-4E6A719CDACB}"/>
+              </a:ext>
+            </a:extLst>
+          </p:cNvPr>
+          <p:cNvSpPr>
+            <a:spLocks noGrp="1"/>
+          </p:cNvSpPr>
+          <p:nvPr/>
+        </p:nvSpPr>
+        <p:spPr>
+          <a:xfrm>
+            <a:off x="609600" y="1049935"/>
+            <a:ext cx="11106150" cy="1230911"/>
+          </a:xfrm>
+          <a:prstGeom prst="rect">
+            <a:avLst/>
+          </a:prstGeom>
+          <a:noFill/>
+          <a:ln w="0">
+            <a:noFill/>
+            <a:prstDash val="solid"/>
+          </a:ln>
+        </p:spPr>
+        <p:txBody>
+          <a:bodyPr/>
+          <a:lstStyle/>
+          <a:p>
+            <a:pPr>
+              <a:defRPr sz="1500">
+                <a:solidFill>
+                  <a:srgbClr val="B7C0D1"/>
+                </a:solidFill>
+              </a:defRPr>
+            </a:pPr>
+            <a:r>
+              <a:rPr lang="pl-PL" sz="1600" dirty="0">
+                <a:solidFill>
+                  <a:schemeClr val="bg1">
+                    <a:lumMod val="85000"/>
+                  </a:schemeClr>
+                </a:solidFill>
+              </a:rPr>
+              <a:t>The model </a:t>
+            </a:r>
+            <a:r>
+              <a:rPr lang="pl-PL" sz="1600" dirty="0" err="1">
+                <a:solidFill>
+                  <a:schemeClr val="bg1">
+                    <a:lumMod val="85000"/>
+                  </a:schemeClr>
+                </a:solidFill>
+              </a:rPr>
+              <a:t>successfully</a:t>
+            </a:r>
+            <a:r>
+              <a:rPr lang="pl-PL" sz="1600" dirty="0">
+                <a:solidFill>
+                  <a:schemeClr val="bg1">
+                    <a:lumMod val="85000"/>
+                  </a:schemeClr>
+                </a:solidFill>
+              </a:rPr>
+              <a:t> </a:t>
+            </a:r>
+            <a:r>
+              <a:rPr lang="pl-PL" sz="1600" dirty="0" err="1">
+                <a:solidFill>
+                  <a:schemeClr val="bg1">
+                    <a:lumMod val="85000"/>
+                  </a:schemeClr>
+                </a:solidFill>
+              </a:rPr>
+              <a:t>preserves</a:t>
+            </a:r>
+            <a:r>
+              <a:rPr lang="pl-PL" sz="1600" dirty="0">
+                <a:solidFill>
+                  <a:schemeClr val="bg1">
+                    <a:lumMod val="85000"/>
+                  </a:schemeClr>
+                </a:solidFill>
+              </a:rPr>
+              <a:t> the </a:t>
+            </a:r>
+            <a:r>
+              <a:rPr lang="pl-PL" sz="1600" dirty="0" err="1">
+                <a:solidFill>
+                  <a:schemeClr val="bg1">
+                    <a:lumMod val="85000"/>
+                  </a:schemeClr>
+                </a:solidFill>
+              </a:rPr>
+              <a:t>overall</a:t>
+            </a:r>
+            <a:r>
+              <a:rPr lang="pl-PL" sz="1600" dirty="0">
+                <a:solidFill>
+                  <a:schemeClr val="bg1">
+                    <a:lumMod val="85000"/>
+                  </a:schemeClr>
+                </a:solidFill>
+              </a:rPr>
+              <a:t> </a:t>
+            </a:r>
+            <a:r>
+              <a:rPr lang="pl-PL" sz="1600" dirty="0" err="1">
+                <a:solidFill>
+                  <a:schemeClr val="bg1">
+                    <a:lumMod val="85000"/>
+                  </a:schemeClr>
+                </a:solidFill>
+              </a:rPr>
+              <a:t>identity</a:t>
+            </a:r>
+            <a:r>
+              <a:rPr lang="pl-PL" sz="1600" dirty="0">
+                <a:solidFill>
+                  <a:schemeClr val="bg1">
+                    <a:lumMod val="85000"/>
+                  </a:schemeClr>
+                </a:solidFill>
+              </a:rPr>
+              <a:t> and </a:t>
+            </a:r>
+            <a:r>
+              <a:rPr lang="pl-PL" sz="1600" dirty="0" err="1">
+                <a:solidFill>
+                  <a:schemeClr val="bg1">
+                    <a:lumMod val="85000"/>
+                  </a:schemeClr>
+                </a:solidFill>
+              </a:rPr>
+              <a:t>structure</a:t>
+            </a:r>
+            <a:r>
+              <a:rPr lang="pl-PL" sz="1600" dirty="0">
+                <a:solidFill>
+                  <a:schemeClr val="bg1">
+                    <a:lumMod val="85000"/>
+                  </a:schemeClr>
+                </a:solidFill>
+              </a:rPr>
+              <a:t> of the face. </a:t>
+            </a:r>
+            <a:r>
+              <a:rPr lang="pl-PL" sz="1600" dirty="0" err="1">
+                <a:solidFill>
+                  <a:schemeClr val="bg1">
+                    <a:lumMod val="85000"/>
+                  </a:schemeClr>
+                </a:solidFill>
+              </a:rPr>
+              <a:t>Reconstructed</a:t>
+            </a:r>
+            <a:r>
+              <a:rPr lang="pl-PL" sz="1600" dirty="0">
+                <a:solidFill>
+                  <a:schemeClr val="bg1">
+                    <a:lumMod val="85000"/>
+                  </a:schemeClr>
+                </a:solidFill>
+              </a:rPr>
+              <a:t> </a:t>
+            </a:r>
+            <a:r>
+              <a:rPr lang="pl-PL" sz="1600" dirty="0" err="1">
+                <a:solidFill>
+                  <a:schemeClr val="bg1">
+                    <a:lumMod val="85000"/>
+                  </a:schemeClr>
+                </a:solidFill>
+              </a:rPr>
+              <a:t>images</a:t>
+            </a:r>
+            <a:r>
+              <a:rPr lang="pl-PL" sz="1600" dirty="0">
+                <a:solidFill>
+                  <a:schemeClr val="bg1">
+                    <a:lumMod val="85000"/>
+                  </a:schemeClr>
+                </a:solidFill>
+              </a:rPr>
+              <a:t> </a:t>
+            </a:r>
+            <a:r>
+              <a:rPr lang="pl-PL" sz="1600" dirty="0" err="1">
+                <a:solidFill>
+                  <a:schemeClr val="bg1">
+                    <a:lumMod val="85000"/>
+                  </a:schemeClr>
+                </a:solidFill>
+              </a:rPr>
+              <a:t>remain</a:t>
+            </a:r>
+            <a:r>
+              <a:rPr lang="pl-PL" sz="1600" dirty="0">
+                <a:solidFill>
+                  <a:schemeClr val="bg1">
+                    <a:lumMod val="85000"/>
+                  </a:schemeClr>
+                </a:solidFill>
+              </a:rPr>
+              <a:t> </a:t>
+            </a:r>
+            <a:r>
+              <a:rPr lang="pl-PL" sz="1600" dirty="0" err="1">
+                <a:solidFill>
+                  <a:schemeClr val="bg1">
+                    <a:lumMod val="85000"/>
+                  </a:schemeClr>
+                </a:solidFill>
+              </a:rPr>
+              <a:t>visually</a:t>
+            </a:r>
+            <a:r>
+              <a:rPr lang="pl-PL" sz="1600" dirty="0">
+                <a:solidFill>
+                  <a:schemeClr val="bg1">
+                    <a:lumMod val="85000"/>
+                  </a:schemeClr>
+                </a:solidFill>
+              </a:rPr>
+              <a:t> </a:t>
+            </a:r>
+            <a:r>
+              <a:rPr lang="pl-PL" sz="1600" dirty="0" err="1">
+                <a:solidFill>
+                  <a:schemeClr val="bg1">
+                    <a:lumMod val="85000"/>
+                  </a:schemeClr>
+                </a:solidFill>
+              </a:rPr>
+              <a:t>similar</a:t>
+            </a:r>
+            <a:r>
+              <a:rPr lang="pl-PL" sz="1600" dirty="0">
+                <a:solidFill>
+                  <a:schemeClr val="bg1">
+                    <a:lumMod val="85000"/>
+                  </a:schemeClr>
+                </a:solidFill>
+              </a:rPr>
+              <a:t> to the </a:t>
+            </a:r>
+            <a:r>
+              <a:rPr lang="pl-PL" sz="1600" dirty="0" err="1">
+                <a:solidFill>
+                  <a:schemeClr val="bg1">
+                    <a:lumMod val="85000"/>
+                  </a:schemeClr>
+                </a:solidFill>
+              </a:rPr>
+              <a:t>originals</a:t>
+            </a:r>
+            <a:r>
+              <a:rPr lang="pl-PL" sz="1600" dirty="0">
+                <a:solidFill>
+                  <a:schemeClr val="bg1">
+                    <a:lumMod val="85000"/>
+                  </a:schemeClr>
+                </a:solidFill>
+              </a:rPr>
+              <a:t>, but fine </a:t>
+            </a:r>
+            <a:r>
+              <a:rPr lang="pl-PL" sz="1600" dirty="0" err="1">
+                <a:solidFill>
+                  <a:schemeClr val="bg1">
+                    <a:lumMod val="85000"/>
+                  </a:schemeClr>
+                </a:solidFill>
+              </a:rPr>
+              <a:t>details</a:t>
+            </a:r>
+            <a:r>
+              <a:rPr lang="pl-PL" sz="1600" dirty="0">
+                <a:solidFill>
+                  <a:schemeClr val="bg1">
+                    <a:lumMod val="85000"/>
+                  </a:schemeClr>
+                </a:solidFill>
+              </a:rPr>
+              <a:t> </a:t>
+            </a:r>
+            <a:r>
+              <a:rPr lang="pl-PL" sz="1600" dirty="0" err="1">
+                <a:solidFill>
+                  <a:schemeClr val="bg1">
+                    <a:lumMod val="85000"/>
+                  </a:schemeClr>
+                </a:solidFill>
+              </a:rPr>
+              <a:t>become</a:t>
+            </a:r>
+            <a:r>
+              <a:rPr lang="pl-PL" sz="1600" dirty="0">
+                <a:solidFill>
+                  <a:schemeClr val="bg1">
+                    <a:lumMod val="85000"/>
+                  </a:schemeClr>
+                </a:solidFill>
+              </a:rPr>
+              <a:t> </a:t>
+            </a:r>
+            <a:r>
+              <a:rPr lang="pl-PL" sz="1600" dirty="0" err="1">
+                <a:solidFill>
+                  <a:schemeClr val="bg1">
+                    <a:lumMod val="85000"/>
+                  </a:schemeClr>
+                </a:solidFill>
+              </a:rPr>
+              <a:t>blurred</a:t>
+            </a:r>
+            <a:r>
+              <a:rPr lang="pl-PL" sz="1600" dirty="0">
+                <a:solidFill>
+                  <a:schemeClr val="bg1">
+                    <a:lumMod val="85000"/>
+                  </a:schemeClr>
+                </a:solidFill>
+              </a:rPr>
+              <a:t> </a:t>
+            </a:r>
+            <a:r>
+              <a:rPr lang="pl-PL" sz="1600" dirty="0" err="1">
+                <a:solidFill>
+                  <a:schemeClr val="bg1">
+                    <a:lumMod val="85000"/>
+                  </a:schemeClr>
+                </a:solidFill>
+              </a:rPr>
+              <a:t>or</a:t>
+            </a:r>
+            <a:r>
+              <a:rPr lang="pl-PL" sz="1600" dirty="0">
+                <a:solidFill>
+                  <a:schemeClr val="bg1">
+                    <a:lumMod val="85000"/>
+                  </a:schemeClr>
+                </a:solidFill>
+              </a:rPr>
+              <a:t> </a:t>
+            </a:r>
+            <a:r>
+              <a:rPr lang="pl-PL" sz="1600" dirty="0" err="1">
+                <a:solidFill>
+                  <a:schemeClr val="bg1">
+                    <a:lumMod val="85000"/>
+                  </a:schemeClr>
+                </a:solidFill>
+              </a:rPr>
+              <a:t>simplified</a:t>
+            </a:r>
+            <a:r>
+              <a:rPr lang="pl-PL" sz="1600" dirty="0">
+                <a:solidFill>
+                  <a:schemeClr val="bg1">
+                    <a:lumMod val="85000"/>
+                  </a:schemeClr>
+                </a:solidFill>
+              </a:rPr>
+              <a:t>. </a:t>
+            </a:r>
+            <a:r>
+              <a:rPr lang="pl-PL" sz="1600" dirty="0" err="1">
+                <a:solidFill>
+                  <a:schemeClr val="bg1">
+                    <a:lumMod val="85000"/>
+                  </a:schemeClr>
+                </a:solidFill>
+              </a:rPr>
+              <a:t>Hair</a:t>
+            </a:r>
+            <a:r>
+              <a:rPr lang="pl-PL" sz="1600" dirty="0">
+                <a:solidFill>
+                  <a:schemeClr val="bg1">
+                    <a:lumMod val="85000"/>
+                  </a:schemeClr>
+                </a:solidFill>
+              </a:rPr>
+              <a:t> </a:t>
+            </a:r>
+            <a:r>
+              <a:rPr lang="pl-PL" sz="1600" dirty="0" err="1">
+                <a:solidFill>
+                  <a:schemeClr val="bg1">
+                    <a:lumMod val="85000"/>
+                  </a:schemeClr>
+                </a:solidFill>
+              </a:rPr>
+              <a:t>texture</a:t>
+            </a:r>
+            <a:r>
+              <a:rPr lang="pl-PL" sz="1600" dirty="0">
+                <a:solidFill>
+                  <a:schemeClr val="bg1">
+                    <a:lumMod val="85000"/>
+                  </a:schemeClr>
+                </a:solidFill>
+              </a:rPr>
+              <a:t>, </a:t>
+            </a:r>
+            <a:r>
+              <a:rPr lang="pl-PL" sz="1600" dirty="0" err="1">
+                <a:solidFill>
+                  <a:schemeClr val="bg1">
+                    <a:lumMod val="85000"/>
+                  </a:schemeClr>
+                </a:solidFill>
+              </a:rPr>
+              <a:t>eye</a:t>
+            </a:r>
+            <a:r>
+              <a:rPr lang="pl-PL" sz="1600" dirty="0">
+                <a:solidFill>
+                  <a:schemeClr val="bg1">
+                    <a:lumMod val="85000"/>
+                  </a:schemeClr>
+                </a:solidFill>
+              </a:rPr>
+              <a:t> </a:t>
+            </a:r>
+            <a:r>
+              <a:rPr lang="pl-PL" sz="1600" dirty="0" err="1">
+                <a:solidFill>
+                  <a:schemeClr val="bg1">
+                    <a:lumMod val="85000"/>
+                  </a:schemeClr>
+                </a:solidFill>
+              </a:rPr>
+              <a:t>details</a:t>
+            </a:r>
+            <a:r>
+              <a:rPr lang="pl-PL" sz="1600" dirty="0">
+                <a:solidFill>
+                  <a:schemeClr val="bg1">
+                    <a:lumMod val="85000"/>
+                  </a:schemeClr>
+                </a:solidFill>
+              </a:rPr>
+              <a:t>, and </a:t>
+            </a:r>
+            <a:r>
+              <a:rPr lang="pl-PL" sz="1600" dirty="0" err="1">
+                <a:solidFill>
+                  <a:schemeClr val="bg1">
+                    <a:lumMod val="85000"/>
+                  </a:schemeClr>
+                </a:solidFill>
+              </a:rPr>
+              <a:t>facial</a:t>
+            </a:r>
+            <a:r>
+              <a:rPr lang="pl-PL" sz="1600" dirty="0">
+                <a:solidFill>
+                  <a:schemeClr val="bg1">
+                    <a:lumMod val="85000"/>
+                  </a:schemeClr>
+                </a:solidFill>
+              </a:rPr>
+              <a:t> </a:t>
+            </a:r>
+            <a:r>
+              <a:rPr lang="pl-PL" sz="1600" dirty="0" err="1">
+                <a:solidFill>
+                  <a:schemeClr val="bg1">
+                    <a:lumMod val="85000"/>
+                  </a:schemeClr>
+                </a:solidFill>
+              </a:rPr>
+              <a:t>contours</a:t>
+            </a:r>
+            <a:r>
+              <a:rPr lang="pl-PL" sz="1600" dirty="0">
+                <a:solidFill>
+                  <a:schemeClr val="bg1">
+                    <a:lumMod val="85000"/>
+                  </a:schemeClr>
+                </a:solidFill>
+              </a:rPr>
+              <a:t> </a:t>
+            </a:r>
+            <a:r>
+              <a:rPr lang="pl-PL" sz="1600" dirty="0" err="1">
+                <a:solidFill>
+                  <a:schemeClr val="bg1">
+                    <a:lumMod val="85000"/>
+                  </a:schemeClr>
+                </a:solidFill>
+              </a:rPr>
+              <a:t>are</a:t>
+            </a:r>
+            <a:r>
+              <a:rPr lang="pl-PL" sz="1600" dirty="0">
+                <a:solidFill>
+                  <a:schemeClr val="bg1">
+                    <a:lumMod val="85000"/>
+                  </a:schemeClr>
+                </a:solidFill>
+              </a:rPr>
+              <a:t> </a:t>
+            </a:r>
+            <a:r>
+              <a:rPr lang="pl-PL" sz="1600" dirty="0" err="1">
+                <a:solidFill>
+                  <a:schemeClr val="bg1">
+                    <a:lumMod val="85000"/>
+                  </a:schemeClr>
+                </a:solidFill>
+              </a:rPr>
+              <a:t>often</a:t>
+            </a:r>
+            <a:r>
+              <a:rPr lang="pl-PL" sz="1600" dirty="0">
+                <a:solidFill>
+                  <a:schemeClr val="bg1">
+                    <a:lumMod val="85000"/>
+                  </a:schemeClr>
+                </a:solidFill>
+              </a:rPr>
+              <a:t> less </a:t>
+            </a:r>
+            <a:r>
+              <a:rPr lang="pl-PL" sz="1600" dirty="0" err="1">
+                <a:solidFill>
+                  <a:schemeClr val="bg1">
+                    <a:lumMod val="85000"/>
+                  </a:schemeClr>
+                </a:solidFill>
+              </a:rPr>
+              <a:t>sharp</a:t>
+            </a:r>
+            <a:r>
+              <a:rPr lang="pl-PL" sz="1600" dirty="0">
+                <a:solidFill>
+                  <a:schemeClr val="bg1">
+                    <a:lumMod val="85000"/>
+                  </a:schemeClr>
+                </a:solidFill>
+              </a:rPr>
+              <a:t>, </a:t>
+            </a:r>
+            <a:r>
+              <a:rPr lang="pl-PL" sz="1600" dirty="0" err="1">
+                <a:solidFill>
+                  <a:schemeClr val="bg1">
+                    <a:lumMod val="85000"/>
+                  </a:schemeClr>
+                </a:solidFill>
+              </a:rPr>
+              <a:t>indicating</a:t>
+            </a:r>
+            <a:r>
+              <a:rPr lang="pl-PL" sz="1600" dirty="0">
+                <a:solidFill>
+                  <a:schemeClr val="bg1">
+                    <a:lumMod val="85000"/>
+                  </a:schemeClr>
+                </a:solidFill>
+              </a:rPr>
+              <a:t> </a:t>
+            </a:r>
+            <a:r>
+              <a:rPr lang="pl-PL" sz="1600" dirty="0" err="1">
+                <a:solidFill>
+                  <a:schemeClr val="bg1">
+                    <a:lumMod val="85000"/>
+                  </a:schemeClr>
+                </a:solidFill>
+              </a:rPr>
+              <a:t>that</a:t>
+            </a:r>
+            <a:r>
+              <a:rPr lang="pl-PL" sz="1600" dirty="0">
+                <a:solidFill>
+                  <a:schemeClr val="bg1">
+                    <a:lumMod val="85000"/>
+                  </a:schemeClr>
+                </a:solidFill>
+              </a:rPr>
+              <a:t> the </a:t>
+            </a:r>
+            <a:r>
+              <a:rPr lang="pl-PL" sz="1600" dirty="0" err="1">
+                <a:solidFill>
+                  <a:schemeClr val="bg1">
+                    <a:lumMod val="85000"/>
+                  </a:schemeClr>
+                </a:solidFill>
+              </a:rPr>
+              <a:t>latent</a:t>
+            </a:r>
+            <a:r>
+              <a:rPr lang="pl-PL" sz="1600" dirty="0">
+                <a:solidFill>
+                  <a:schemeClr val="bg1">
+                    <a:lumMod val="85000"/>
+                  </a:schemeClr>
+                </a:solidFill>
+              </a:rPr>
+              <a:t> </a:t>
+            </a:r>
+            <a:r>
+              <a:rPr lang="pl-PL" sz="1600" dirty="0" err="1">
+                <a:solidFill>
+                  <a:schemeClr val="bg1">
+                    <a:lumMod val="85000"/>
+                  </a:schemeClr>
+                </a:solidFill>
+              </a:rPr>
+              <a:t>space</a:t>
+            </a:r>
+            <a:r>
+              <a:rPr lang="pl-PL" sz="1600" dirty="0">
+                <a:solidFill>
+                  <a:schemeClr val="bg1">
+                    <a:lumMod val="85000"/>
+                  </a:schemeClr>
+                </a:solidFill>
+              </a:rPr>
+              <a:t> </a:t>
+            </a:r>
+            <a:r>
+              <a:rPr lang="pl-PL" sz="1600" dirty="0" err="1">
+                <a:solidFill>
+                  <a:schemeClr val="bg1">
+                    <a:lumMod val="85000"/>
+                  </a:schemeClr>
+                </a:solidFill>
+              </a:rPr>
+              <a:t>captures</a:t>
+            </a:r>
+            <a:r>
+              <a:rPr lang="pl-PL" sz="1600" dirty="0">
+                <a:solidFill>
+                  <a:schemeClr val="bg1">
+                    <a:lumMod val="85000"/>
+                  </a:schemeClr>
+                </a:solidFill>
+              </a:rPr>
+              <a:t> </a:t>
+            </a:r>
+            <a:r>
+              <a:rPr lang="pl-PL" sz="1600" dirty="0" err="1">
+                <a:solidFill>
+                  <a:schemeClr val="bg1">
+                    <a:lumMod val="85000"/>
+                  </a:schemeClr>
+                </a:solidFill>
+              </a:rPr>
+              <a:t>global</a:t>
+            </a:r>
+            <a:r>
+              <a:rPr lang="pl-PL" sz="1600" dirty="0">
+                <a:solidFill>
+                  <a:schemeClr val="bg1">
+                    <a:lumMod val="85000"/>
+                  </a:schemeClr>
+                </a:solidFill>
+              </a:rPr>
+              <a:t> </a:t>
+            </a:r>
+            <a:r>
+              <a:rPr lang="pl-PL" sz="1600" dirty="0" err="1">
+                <a:solidFill>
+                  <a:schemeClr val="bg1">
+                    <a:lumMod val="85000"/>
+                  </a:schemeClr>
+                </a:solidFill>
+              </a:rPr>
+              <a:t>appearance</a:t>
+            </a:r>
+            <a:r>
+              <a:rPr lang="pl-PL" sz="1600" dirty="0">
+                <a:solidFill>
+                  <a:schemeClr val="bg1">
+                    <a:lumMod val="85000"/>
+                  </a:schemeClr>
+                </a:solidFill>
+              </a:rPr>
+              <a:t> </a:t>
+            </a:r>
+            <a:r>
+              <a:rPr lang="pl-PL" sz="1600" dirty="0" err="1">
+                <a:solidFill>
+                  <a:schemeClr val="bg1">
+                    <a:lumMod val="85000"/>
+                  </a:schemeClr>
+                </a:solidFill>
+              </a:rPr>
+              <a:t>more</a:t>
+            </a:r>
+            <a:r>
+              <a:rPr lang="pl-PL" sz="1600" dirty="0">
+                <a:solidFill>
+                  <a:schemeClr val="bg1">
+                    <a:lumMod val="85000"/>
+                  </a:schemeClr>
+                </a:solidFill>
+              </a:rPr>
+              <a:t> </a:t>
+            </a:r>
+            <a:r>
+              <a:rPr lang="pl-PL" sz="1600" dirty="0" err="1">
+                <a:solidFill>
+                  <a:schemeClr val="bg1">
+                    <a:lumMod val="85000"/>
+                  </a:schemeClr>
+                </a:solidFill>
+              </a:rPr>
+              <a:t>effectively</a:t>
+            </a:r>
+            <a:r>
+              <a:rPr lang="pl-PL" sz="1600" dirty="0">
+                <a:solidFill>
+                  <a:schemeClr val="bg1">
+                    <a:lumMod val="85000"/>
+                  </a:schemeClr>
+                </a:solidFill>
+              </a:rPr>
+              <a:t> </a:t>
+            </a:r>
+            <a:r>
+              <a:rPr lang="pl-PL" sz="1600" dirty="0" err="1">
+                <a:solidFill>
+                  <a:schemeClr val="bg1">
+                    <a:lumMod val="85000"/>
+                  </a:schemeClr>
+                </a:solidFill>
+              </a:rPr>
+              <a:t>than</a:t>
+            </a:r>
+            <a:r>
+              <a:rPr lang="pl-PL" sz="1600" dirty="0">
+                <a:solidFill>
+                  <a:schemeClr val="bg1">
+                    <a:lumMod val="85000"/>
+                  </a:schemeClr>
+                </a:solidFill>
+              </a:rPr>
+              <a:t> </a:t>
+            </a:r>
+            <a:r>
+              <a:rPr lang="pl-PL" sz="1600" dirty="0" err="1">
+                <a:solidFill>
+                  <a:schemeClr val="bg1">
+                    <a:lumMod val="85000"/>
+                  </a:schemeClr>
+                </a:solidFill>
+              </a:rPr>
+              <a:t>subtle</a:t>
+            </a:r>
+            <a:r>
+              <a:rPr lang="pl-PL" sz="1600" dirty="0">
+                <a:solidFill>
+                  <a:schemeClr val="bg1">
+                    <a:lumMod val="85000"/>
+                  </a:schemeClr>
+                </a:solidFill>
+              </a:rPr>
+              <a:t> </a:t>
+            </a:r>
+            <a:r>
+              <a:rPr lang="pl-PL" sz="1600" dirty="0" err="1">
+                <a:solidFill>
+                  <a:schemeClr val="bg1">
+                    <a:lumMod val="85000"/>
+                  </a:schemeClr>
+                </a:solidFill>
+              </a:rPr>
+              <a:t>visual</a:t>
+            </a:r>
+            <a:r>
+              <a:rPr lang="pl-PL" sz="1600" dirty="0">
+                <a:solidFill>
+                  <a:schemeClr val="bg1">
+                    <a:lumMod val="85000"/>
+                  </a:schemeClr>
+                </a:solidFill>
+              </a:rPr>
+              <a:t> </a:t>
+            </a:r>
+            <a:r>
+              <a:rPr lang="pl-PL" sz="1600" dirty="0" err="1">
+                <a:solidFill>
+                  <a:schemeClr val="bg1">
+                    <a:lumMod val="85000"/>
+                  </a:schemeClr>
+                </a:solidFill>
+              </a:rPr>
+              <a:t>features</a:t>
+            </a:r>
+            <a:r>
+              <a:rPr lang="pl-PL" sz="1600" dirty="0">
+                <a:solidFill>
+                  <a:schemeClr val="bg1">
+                    <a:lumMod val="85000"/>
+                  </a:schemeClr>
+                </a:solidFill>
+              </a:rPr>
+              <a:t>.</a:t>
+            </a:r>
+            <a:endParaRPr sz="1600" dirty="0">
+              <a:solidFill>
+                <a:schemeClr val="bg1">
+                  <a:lumMod val="85000"/>
+                </a:schemeClr>
+              </a:solidFill>
+            </a:endParaRPr>
+          </a:p>
+        </p:txBody>
+      </p:sp>
+      <p:sp>
+        <p:nvSpPr>
+          <p:cNvPr id="4" name="Prostokąt: zaokrąglone rogi 3">
+            <a:extLst>
+              <a:ext uri="{FF2B5EF4-FFF2-40B4-BE49-F238E27FC236}">
+                <a16:creationId xmlns:a16="http://schemas.microsoft.com/office/drawing/2014/main" id="{C4ECD43E-3D1D-4CEE-8A8A-DFC09FDFED3C}"/>
+              </a:ext>
+            </a:extLst>
+          </p:cNvPr>
+          <p:cNvSpPr>
+            <a:spLocks noGrp="1"/>
+          </p:cNvSpPr>
+          <p:nvPr/>
+        </p:nvSpPr>
+        <p:spPr>
+          <a:xfrm>
+            <a:off x="609600" y="2362199"/>
+            <a:ext cx="10972800" cy="4267200"/>
+          </a:xfrm>
+          <a:prstGeom prst="roundRect">
+            <a:avLst>
+              <a:gd name="adj" fmla="val 4800"/>
+            </a:avLst>
+          </a:prstGeom>
+          <a:solidFill>
+            <a:srgbClr val="232A35"/>
+          </a:solidFill>
+          <a:ln w="9525">
+            <a:solidFill>
+              <a:srgbClr val="313C4D"/>
+            </a:solidFill>
+            <a:prstDash val="solid"/>
+          </a:ln>
+        </p:spPr>
+        <p:txBody>
+          <a:bodyPr/>
+          <a:lstStyle/>
+          <a:p>
+            <a:endParaRPr lang="pl-PL"/>
+          </a:p>
+        </p:txBody>
+      </p:sp>
+      <p:pic>
+        <p:nvPicPr>
+          <p:cNvPr id="11" name="Obraz 10"/>
+          <p:cNvPicPr>
+            <a:picLocks noChangeAspect="1"/>
+          </p:cNvPicPr>
+          <p:nvPr/>
+        </p:nvPicPr>
+        <p:blipFill>
+          <a:blip r:embed="rId3"/>
+          <a:stretch/>
+        </p:blipFill>
+        <p:spPr>
+          <a:xfrm>
+            <a:off x="948366" y="3116859"/>
+            <a:ext cx="10504818" cy="2636241"/>
+          </a:xfrm>
+          <a:prstGeom prst="roundRect">
+            <a:avLst>
+              <a:gd name="adj" fmla="val 3810"/>
+            </a:avLst>
+          </a:prstGeom>
+        </p:spPr>
+      </p:pic>
+      <p:sp>
+        <p:nvSpPr>
+          <p:cNvPr id="6" name="Prostokąt 5">
+            <a:extLst>
+              <a:ext uri="{FF2B5EF4-FFF2-40B4-BE49-F238E27FC236}">
+                <a16:creationId xmlns:a16="http://schemas.microsoft.com/office/drawing/2014/main" id="{44D382DC-8F8C-4014-B104-98839FC7A5FE}"/>
+              </a:ext>
+            </a:extLst>
+          </p:cNvPr>
+          <p:cNvSpPr>
+            <a:spLocks noGrp="1"/>
+          </p:cNvSpPr>
+          <p:nvPr/>
+        </p:nvSpPr>
+        <p:spPr>
+          <a:xfrm>
+            <a:off x="819150" y="5753100"/>
+            <a:ext cx="9715500" cy="266700"/>
+          </a:xfrm>
+          <a:prstGeom prst="rect">
+            <a:avLst/>
+          </a:prstGeom>
+          <a:noFill/>
+          <a:ln w="0">
+            <a:noFill/>
+            <a:prstDash val="solid"/>
+          </a:ln>
+        </p:spPr>
+        <p:txBody>
+          <a:bodyPr/>
+          <a:lstStyle/>
+          <a:p>
+            <a:pPr>
+              <a:defRPr sz="1350">
+                <a:solidFill>
+                  <a:srgbClr val="B7C0D1"/>
+                </a:solidFill>
+              </a:defRPr>
+            </a:pPr>
+            <a:endParaRPr sz="1350" dirty="0">
+              <a:solidFill>
+                <a:srgbClr val="B7C0D1"/>
+              </a:solidFill>
+            </a:endParaRPr>
+          </a:p>
+        </p:txBody>
+      </p:sp>
+    </p:spTree>
+    <p:extLst>
+      <p:ext uri="{BB962C8B-B14F-4D97-AF65-F5344CB8AC3E}">
+        <p14:creationId xmlns:p14="http://schemas.microsoft.com/office/powerpoint/2010/main" val="1646487058"/>
       </p:ext>
     </p:extLst>
   </p:cSld>
@@ -4742,48 +8645,6 @@
           </a:prstGeom>
         </p:spPr>
       </p:pic>
-      <p:sp>
-        <p:nvSpPr>
-          <p:cNvPr id="8" name="Prostokąt: zaokrąglone rogi 7">
-            <a:extLst>
-              <a:ext uri="{FF2B5EF4-FFF2-40B4-BE49-F238E27FC236}">
-                <a16:creationId xmlns:a16="http://schemas.microsoft.com/office/drawing/2014/main" id="{FE198FEB-DEED-4474-B245-A2A85DA9EE1E}"/>
-              </a:ext>
-            </a:extLst>
-          </p:cNvPr>
-          <p:cNvSpPr>
-            <a:spLocks noGrp="1"/>
-          </p:cNvSpPr>
-          <p:nvPr/>
-        </p:nvSpPr>
-        <p:spPr>
-          <a:xfrm>
-            <a:off x="781050" y="4171950"/>
-            <a:ext cx="2000250" cy="323850"/>
-          </a:xfrm>
-          <a:prstGeom prst="roundRect">
-            <a:avLst>
-              <a:gd name="adj" fmla="val 50000"/>
-            </a:avLst>
-          </a:prstGeom>
-          <a:solidFill>
-            <a:srgbClr val="2B3442"/>
-          </a:solidFill>
-          <a:ln w="9525">
-            <a:solidFill>
-              <a:srgbClr val="4EA1FF"/>
-            </a:solidFill>
-            <a:prstDash val="solid"/>
-          </a:ln>
-        </p:spPr>
-        <p:txBody>
-          <a:bodyPr/>
-          <a:lstStyle/>
-          <a:p>
-            <a:endParaRPr lang="pl-PL"/>
-          </a:p>
-        </p:txBody>
-      </p:sp>
       <p:sp>
         <p:nvSpPr>
           <p:cNvPr id="9" name="Prostokąt 8">
@@ -5118,8 +8979,8 @@
         </p:nvSpPr>
         <p:spPr>
           <a:xfrm>
-            <a:off x="609600" y="1009650"/>
-            <a:ext cx="9334500" cy="848580"/>
+            <a:off x="609599" y="1009650"/>
+            <a:ext cx="11191875" cy="1033246"/>
           </a:xfrm>
           <a:prstGeom prst="rect">
             <a:avLst/>
@@ -5142,191 +9003,469 @@
               </a:defRPr>
             </a:pPr>
             <a:r>
-              <a:rPr lang="pl-PL" sz="1600" dirty="0" err="1"/>
+              <a:rPr lang="pl-PL" sz="1600" dirty="0" err="1">
+                <a:solidFill>
+                  <a:schemeClr val="bg1">
+                    <a:lumMod val="85000"/>
+                  </a:schemeClr>
+                </a:solidFill>
+              </a:rPr>
               <a:t>Changing</a:t>
             </a:r>
             <a:r>
-              <a:rPr lang="pl-PL" sz="1600" dirty="0"/>
+              <a:rPr lang="pl-PL" sz="1600" dirty="0">
+                <a:solidFill>
+                  <a:schemeClr val="bg1">
+                    <a:lumMod val="85000"/>
+                  </a:schemeClr>
+                </a:solidFill>
+              </a:rPr>
               <a:t> a single </a:t>
             </a:r>
             <a:r>
-              <a:rPr lang="pl-PL" sz="1600" dirty="0" err="1"/>
+              <a:rPr lang="pl-PL" sz="1600" dirty="0" err="1">
+                <a:solidFill>
+                  <a:schemeClr val="bg1">
+                    <a:lumMod val="85000"/>
+                  </a:schemeClr>
+                </a:solidFill>
+              </a:rPr>
               <a:t>attribute</a:t>
             </a:r>
             <a:r>
-              <a:rPr lang="pl-PL" sz="1600" dirty="0"/>
-              <a:t> </a:t>
-            </a:r>
-            <a:r>
-              <a:rPr lang="pl-PL" sz="1600" dirty="0" err="1"/>
+              <a:rPr lang="pl-PL" sz="1600" dirty="0">
+                <a:solidFill>
+                  <a:schemeClr val="bg1">
+                    <a:lumMod val="85000"/>
+                  </a:schemeClr>
+                </a:solidFill>
+              </a:rPr>
+              <a:t> </a:t>
+            </a:r>
+            <a:r>
+              <a:rPr lang="pl-PL" sz="1600" dirty="0" err="1">
+                <a:solidFill>
+                  <a:schemeClr val="bg1">
+                    <a:lumMod val="85000"/>
+                  </a:schemeClr>
+                </a:solidFill>
+              </a:rPr>
               <a:t>can</a:t>
             </a:r>
             <a:r>
-              <a:rPr lang="pl-PL" sz="1600" dirty="0"/>
-              <a:t> </a:t>
-            </a:r>
-            <a:r>
-              <a:rPr lang="pl-PL" sz="1600" dirty="0" err="1"/>
+              <a:rPr lang="pl-PL" sz="1600" dirty="0">
+                <a:solidFill>
+                  <a:schemeClr val="bg1">
+                    <a:lumMod val="85000"/>
+                  </a:schemeClr>
+                </a:solidFill>
+              </a:rPr>
+              <a:t> </a:t>
+            </a:r>
+            <a:r>
+              <a:rPr lang="pl-PL" sz="1600" dirty="0" err="1">
+                <a:solidFill>
+                  <a:schemeClr val="bg1">
+                    <a:lumMod val="85000"/>
+                  </a:schemeClr>
+                </a:solidFill>
+              </a:rPr>
               <a:t>affect</a:t>
             </a:r>
             <a:r>
-              <a:rPr lang="pl-PL" sz="1600" dirty="0"/>
-              <a:t> </a:t>
-            </a:r>
-            <a:r>
-              <a:rPr lang="pl-PL" sz="1600" dirty="0" err="1"/>
+              <a:rPr lang="pl-PL" sz="1600" dirty="0">
+                <a:solidFill>
+                  <a:schemeClr val="bg1">
+                    <a:lumMod val="85000"/>
+                  </a:schemeClr>
+                </a:solidFill>
+              </a:rPr>
+              <a:t> </a:t>
+            </a:r>
+            <a:r>
+              <a:rPr lang="pl-PL" sz="1600" dirty="0" err="1">
+                <a:solidFill>
+                  <a:schemeClr val="bg1">
+                    <a:lumMod val="85000"/>
+                  </a:schemeClr>
+                </a:solidFill>
+              </a:rPr>
               <a:t>more</a:t>
             </a:r>
             <a:r>
-              <a:rPr lang="pl-PL" sz="1600" dirty="0"/>
-              <a:t> </a:t>
-            </a:r>
-            <a:r>
-              <a:rPr lang="pl-PL" sz="1600" dirty="0" err="1"/>
+              <a:rPr lang="pl-PL" sz="1600" dirty="0">
+                <a:solidFill>
+                  <a:schemeClr val="bg1">
+                    <a:lumMod val="85000"/>
+                  </a:schemeClr>
+                </a:solidFill>
+              </a:rPr>
+              <a:t> </a:t>
+            </a:r>
+            <a:r>
+              <a:rPr lang="pl-PL" sz="1600" dirty="0" err="1">
+                <a:solidFill>
+                  <a:schemeClr val="bg1">
+                    <a:lumMod val="85000"/>
+                  </a:schemeClr>
+                </a:solidFill>
+              </a:rPr>
               <a:t>than</a:t>
             </a:r>
             <a:r>
-              <a:rPr lang="pl-PL" sz="1600" dirty="0"/>
+              <a:rPr lang="pl-PL" sz="1600" dirty="0">
+                <a:solidFill>
+                  <a:schemeClr val="bg1">
+                    <a:lumMod val="85000"/>
+                  </a:schemeClr>
+                </a:solidFill>
+              </a:rPr>
               <a:t> the </a:t>
             </a:r>
             <a:r>
-              <a:rPr lang="pl-PL" sz="1600" dirty="0" err="1"/>
+              <a:rPr lang="pl-PL" sz="1600" dirty="0" err="1">
+                <a:solidFill>
+                  <a:schemeClr val="bg1">
+                    <a:lumMod val="85000"/>
+                  </a:schemeClr>
+                </a:solidFill>
+              </a:rPr>
               <a:t>intended</a:t>
             </a:r>
             <a:r>
-              <a:rPr lang="pl-PL" sz="1600" dirty="0"/>
-              <a:t> </a:t>
-            </a:r>
-            <a:r>
-              <a:rPr lang="pl-PL" sz="1600" dirty="0" err="1"/>
+              <a:rPr lang="pl-PL" sz="1600" dirty="0">
+                <a:solidFill>
+                  <a:schemeClr val="bg1">
+                    <a:lumMod val="85000"/>
+                  </a:schemeClr>
+                </a:solidFill>
+              </a:rPr>
+              <a:t> </a:t>
+            </a:r>
+            <a:r>
+              <a:rPr lang="pl-PL" sz="1600" dirty="0" err="1">
+                <a:solidFill>
+                  <a:schemeClr val="bg1">
+                    <a:lumMod val="85000"/>
+                  </a:schemeClr>
+                </a:solidFill>
+              </a:rPr>
               <a:t>feature</a:t>
             </a:r>
             <a:r>
-              <a:rPr lang="pl-PL" sz="1600" dirty="0"/>
+              <a:rPr lang="pl-PL" sz="1600" dirty="0">
+                <a:solidFill>
+                  <a:schemeClr val="bg1">
+                    <a:lumMod val="85000"/>
+                  </a:schemeClr>
+                </a:solidFill>
+              </a:rPr>
               <a:t>.</a:t>
             </a:r>
             <a:br>
-              <a:rPr lang="pl-PL" sz="1600" dirty="0"/>
+              <a:rPr lang="pl-PL" sz="1600" dirty="0">
+                <a:solidFill>
+                  <a:schemeClr val="bg1">
+                    <a:lumMod val="85000"/>
+                  </a:schemeClr>
+                </a:solidFill>
+              </a:rPr>
             </a:br>
             <a:r>
-              <a:rPr lang="pl-PL" sz="1600" dirty="0"/>
+              <a:rPr lang="pl-PL" sz="1600" dirty="0">
+                <a:solidFill>
+                  <a:schemeClr val="bg1">
+                    <a:lumMod val="85000"/>
+                  </a:schemeClr>
+                </a:solidFill>
+              </a:rPr>
               <a:t>In </a:t>
             </a:r>
             <a:r>
-              <a:rPr lang="pl-PL" sz="1600" dirty="0" err="1"/>
+              <a:rPr lang="pl-PL" sz="1600" dirty="0" err="1">
+                <a:solidFill>
+                  <a:schemeClr val="bg1">
+                    <a:lumMod val="85000"/>
+                  </a:schemeClr>
+                </a:solidFill>
+              </a:rPr>
               <a:t>this</a:t>
             </a:r>
             <a:r>
-              <a:rPr lang="pl-PL" sz="1600" dirty="0"/>
-              <a:t> </a:t>
-            </a:r>
-            <a:r>
-              <a:rPr lang="pl-PL" sz="1600" dirty="0" err="1"/>
+              <a:rPr lang="pl-PL" sz="1600" dirty="0">
+                <a:solidFill>
+                  <a:schemeClr val="bg1">
+                    <a:lumMod val="85000"/>
+                  </a:schemeClr>
+                </a:solidFill>
+              </a:rPr>
+              <a:t> </a:t>
+            </a:r>
+            <a:r>
+              <a:rPr lang="pl-PL" sz="1600" dirty="0" err="1">
+                <a:solidFill>
+                  <a:schemeClr val="bg1">
+                    <a:lumMod val="85000"/>
+                  </a:schemeClr>
+                </a:solidFill>
+              </a:rPr>
               <a:t>example</a:t>
             </a:r>
             <a:r>
-              <a:rPr lang="pl-PL" sz="1600" dirty="0"/>
+              <a:rPr lang="pl-PL" sz="1600" dirty="0">
+                <a:solidFill>
+                  <a:schemeClr val="bg1">
+                    <a:lumMod val="85000"/>
+                  </a:schemeClr>
+                </a:solidFill>
+              </a:rPr>
               <a:t>, </a:t>
             </a:r>
             <a:r>
-              <a:rPr lang="pl-PL" sz="1600" dirty="0" err="1"/>
+              <a:rPr lang="pl-PL" sz="1600" dirty="0" err="1">
+                <a:solidFill>
+                  <a:schemeClr val="bg1">
+                    <a:lumMod val="85000"/>
+                  </a:schemeClr>
+                </a:solidFill>
+              </a:rPr>
               <a:t>switching</a:t>
             </a:r>
             <a:r>
-              <a:rPr lang="pl-PL" sz="1600" dirty="0"/>
-              <a:t> </a:t>
-            </a:r>
-            <a:r>
-              <a:rPr lang="pl-PL" sz="1600" i="1" dirty="0"/>
+              <a:rPr lang="pl-PL" sz="1600" dirty="0">
+                <a:solidFill>
+                  <a:schemeClr val="bg1">
+                    <a:lumMod val="85000"/>
+                  </a:schemeClr>
+                </a:solidFill>
+              </a:rPr>
+              <a:t> </a:t>
+            </a:r>
+            <a:r>
+              <a:rPr lang="pl-PL" sz="1600" i="1" dirty="0">
+                <a:solidFill>
+                  <a:schemeClr val="bg1">
+                    <a:lumMod val="85000"/>
+                  </a:schemeClr>
+                </a:solidFill>
+              </a:rPr>
               <a:t>Black </a:t>
             </a:r>
             <a:r>
-              <a:rPr lang="pl-PL" sz="1600" i="1" dirty="0" err="1"/>
+              <a:rPr lang="pl-PL" sz="1600" i="1" dirty="0" err="1">
+                <a:solidFill>
+                  <a:schemeClr val="bg1">
+                    <a:lumMod val="85000"/>
+                  </a:schemeClr>
+                </a:solidFill>
+              </a:rPr>
               <a:t>Hair</a:t>
             </a:r>
             <a:r>
-              <a:rPr lang="pl-PL" sz="1600" dirty="0"/>
+              <a:rPr lang="pl-PL" sz="1600" dirty="0">
+                <a:solidFill>
+                  <a:schemeClr val="bg1">
+                    <a:lumMod val="85000"/>
+                  </a:schemeClr>
+                </a:solidFill>
+              </a:rPr>
               <a:t> to </a:t>
             </a:r>
             <a:r>
-              <a:rPr lang="pl-PL" sz="1600" i="1" dirty="0"/>
+              <a:rPr lang="pl-PL" sz="1600" i="1" dirty="0">
+                <a:solidFill>
+                  <a:schemeClr val="bg1">
+                    <a:lumMod val="85000"/>
+                  </a:schemeClr>
+                </a:solidFill>
+              </a:rPr>
               <a:t>Blond </a:t>
             </a:r>
             <a:r>
-              <a:rPr lang="pl-PL" sz="1600" i="1" dirty="0" err="1"/>
+              <a:rPr lang="pl-PL" sz="1600" i="1" dirty="0" err="1">
+                <a:solidFill>
+                  <a:schemeClr val="bg1">
+                    <a:lumMod val="85000"/>
+                  </a:schemeClr>
+                </a:solidFill>
+              </a:rPr>
               <a:t>Hair</a:t>
             </a:r>
             <a:r>
-              <a:rPr lang="pl-PL" sz="1600" dirty="0"/>
-              <a:t> </a:t>
-            </a:r>
-            <a:r>
-              <a:rPr lang="pl-PL" sz="1600" dirty="0" err="1"/>
+              <a:rPr lang="pl-PL" sz="1600" dirty="0">
+                <a:solidFill>
+                  <a:schemeClr val="bg1">
+                    <a:lumMod val="85000"/>
+                  </a:schemeClr>
+                </a:solidFill>
+              </a:rPr>
+              <a:t> </a:t>
+            </a:r>
+            <a:r>
+              <a:rPr lang="pl-PL" sz="1600" dirty="0" err="1">
+                <a:solidFill>
+                  <a:schemeClr val="bg1">
+                    <a:lumMod val="85000"/>
+                  </a:schemeClr>
+                </a:solidFill>
+              </a:rPr>
               <a:t>changes</a:t>
             </a:r>
             <a:r>
-              <a:rPr lang="pl-PL" sz="1600" dirty="0"/>
+              <a:rPr lang="pl-PL" sz="1600" dirty="0">
+                <a:solidFill>
+                  <a:schemeClr val="bg1">
+                    <a:lumMod val="85000"/>
+                  </a:schemeClr>
+                </a:solidFill>
+              </a:rPr>
               <a:t> not </a:t>
             </a:r>
             <a:r>
-              <a:rPr lang="pl-PL" sz="1600" dirty="0" err="1"/>
+              <a:rPr lang="pl-PL" sz="1600" dirty="0" err="1">
+                <a:solidFill>
+                  <a:schemeClr val="bg1">
+                    <a:lumMod val="85000"/>
+                  </a:schemeClr>
+                </a:solidFill>
+              </a:rPr>
               <a:t>only</a:t>
             </a:r>
             <a:r>
-              <a:rPr lang="pl-PL" sz="1600" dirty="0"/>
-              <a:t> </a:t>
-            </a:r>
-            <a:r>
-              <a:rPr lang="pl-PL" sz="1600" dirty="0" err="1"/>
+              <a:rPr lang="pl-PL" sz="1600" dirty="0">
+                <a:solidFill>
+                  <a:schemeClr val="bg1">
+                    <a:lumMod val="85000"/>
+                  </a:schemeClr>
+                </a:solidFill>
+              </a:rPr>
+              <a:t> </a:t>
+            </a:r>
+            <a:r>
+              <a:rPr lang="pl-PL" sz="1600" dirty="0" err="1">
+                <a:solidFill>
+                  <a:schemeClr val="bg1">
+                    <a:lumMod val="85000"/>
+                  </a:schemeClr>
+                </a:solidFill>
+              </a:rPr>
               <a:t>hair</a:t>
             </a:r>
             <a:r>
-              <a:rPr lang="pl-PL" sz="1600" dirty="0"/>
-              <a:t> </a:t>
-            </a:r>
-            <a:r>
-              <a:rPr lang="pl-PL" sz="1600" dirty="0" err="1"/>
+              <a:rPr lang="pl-PL" sz="1600" dirty="0">
+                <a:solidFill>
+                  <a:schemeClr val="bg1">
+                    <a:lumMod val="85000"/>
+                  </a:schemeClr>
+                </a:solidFill>
+              </a:rPr>
+              <a:t> </a:t>
+            </a:r>
+            <a:r>
+              <a:rPr lang="pl-PL" sz="1600" dirty="0" err="1">
+                <a:solidFill>
+                  <a:schemeClr val="bg1">
+                    <a:lumMod val="85000"/>
+                  </a:schemeClr>
+                </a:solidFill>
+              </a:rPr>
               <a:t>color</a:t>
             </a:r>
             <a:r>
-              <a:rPr lang="pl-PL" sz="1600" dirty="0"/>
+              <a:rPr lang="pl-PL" sz="1600" dirty="0">
+                <a:solidFill>
+                  <a:schemeClr val="bg1">
+                    <a:lumMod val="85000"/>
+                  </a:schemeClr>
+                </a:solidFill>
+              </a:rPr>
               <a:t>, but </a:t>
             </a:r>
             <a:r>
-              <a:rPr lang="pl-PL" sz="1600" dirty="0" err="1"/>
+              <a:rPr lang="pl-PL" sz="1600" dirty="0" err="1">
+                <a:solidFill>
+                  <a:schemeClr val="bg1">
+                    <a:lumMod val="85000"/>
+                  </a:schemeClr>
+                </a:solidFill>
+              </a:rPr>
               <a:t>also</a:t>
             </a:r>
             <a:r>
-              <a:rPr lang="pl-PL" sz="1600" dirty="0"/>
+              <a:rPr lang="pl-PL" sz="1600" dirty="0">
+                <a:solidFill>
+                  <a:schemeClr val="bg1">
+                    <a:lumMod val="85000"/>
+                  </a:schemeClr>
+                </a:solidFill>
+              </a:rPr>
               <a:t> skin </a:t>
             </a:r>
             <a:r>
-              <a:rPr lang="pl-PL" sz="1600" dirty="0" err="1"/>
+              <a:rPr lang="pl-PL" sz="1600" dirty="0" err="1">
+                <a:solidFill>
+                  <a:schemeClr val="bg1">
+                    <a:lumMod val="85000"/>
+                  </a:schemeClr>
+                </a:solidFill>
+              </a:rPr>
               <a:t>tone</a:t>
             </a:r>
             <a:r>
-              <a:rPr lang="pl-PL" sz="1600" dirty="0"/>
+              <a:rPr lang="pl-PL" sz="1600" dirty="0">
+                <a:solidFill>
+                  <a:schemeClr val="bg1">
+                    <a:lumMod val="85000"/>
+                  </a:schemeClr>
+                </a:solidFill>
+              </a:rPr>
               <a:t> and the </a:t>
             </a:r>
             <a:r>
-              <a:rPr lang="pl-PL" sz="1600" dirty="0" err="1"/>
+              <a:rPr lang="pl-PL" sz="1600" dirty="0" err="1">
+                <a:solidFill>
+                  <a:schemeClr val="bg1">
+                    <a:lumMod val="85000"/>
+                  </a:schemeClr>
+                </a:solidFill>
+              </a:rPr>
               <a:t>overall</a:t>
             </a:r>
             <a:r>
-              <a:rPr lang="pl-PL" sz="1600" dirty="0"/>
-              <a:t> </a:t>
-            </a:r>
-            <a:r>
-              <a:rPr lang="pl-PL" sz="1600" dirty="0" err="1"/>
+              <a:rPr lang="pl-PL" sz="1600" dirty="0">
+                <a:solidFill>
+                  <a:schemeClr val="bg1">
+                    <a:lumMod val="85000"/>
+                  </a:schemeClr>
+                </a:solidFill>
+              </a:rPr>
+              <a:t> </a:t>
+            </a:r>
+            <a:r>
+              <a:rPr lang="pl-PL" sz="1600" dirty="0" err="1">
+                <a:solidFill>
+                  <a:schemeClr val="bg1">
+                    <a:lumMod val="85000"/>
+                  </a:schemeClr>
+                </a:solidFill>
+              </a:rPr>
               <a:t>appearance</a:t>
             </a:r>
             <a:r>
-              <a:rPr lang="pl-PL" sz="1600" dirty="0"/>
+              <a:rPr lang="pl-PL" sz="1600" dirty="0">
+                <a:solidFill>
+                  <a:schemeClr val="bg1">
+                    <a:lumMod val="85000"/>
+                  </a:schemeClr>
+                </a:solidFill>
+              </a:rPr>
               <a:t> of the face.</a:t>
             </a:r>
             <a:endParaRPr sz="1600" dirty="0">
               <a:solidFill>
-                <a:srgbClr val="B7C0D1"/>
+                <a:schemeClr val="bg1">
+                  <a:lumMod val="85000"/>
+                </a:schemeClr>
               </a:solidFill>
             </a:endParaRPr>
           </a:p>
@@ -5372,7 +9511,7 @@
               </a:defRPr>
             </a:pPr>
             <a:r>
-              <a:rPr sz="1350">
+              <a:rPr sz="1350" dirty="0">
                 <a:solidFill>
                   <a:srgbClr val="B7C0D1"/>
                 </a:solidFill>
@@ -5404,7 +9543,7 @@
         </p:blipFill>
         <p:spPr>
           <a:xfrm>
-            <a:off x="1149615" y="2506042"/>
+            <a:off x="1906603" y="2506042"/>
             <a:ext cx="3134162" cy="3096057"/>
           </a:xfrm>
           <a:prstGeom prst="rect">
@@ -5434,7 +9573,7 @@
         </p:blipFill>
         <p:spPr>
           <a:xfrm>
-            <a:off x="5991626" y="2506042"/>
+            <a:off x="6901056" y="2477580"/>
             <a:ext cx="3134162" cy="3124519"/>
           </a:xfrm>
           <a:prstGeom prst="rect">
@@ -5456,7 +9595,7 @@
         </p:nvSpPr>
         <p:spPr>
           <a:xfrm>
-            <a:off x="1784079" y="2042896"/>
+            <a:off x="2450829" y="2089803"/>
             <a:ext cx="2454965" cy="369332"/>
           </a:xfrm>
           <a:prstGeom prst="rect">
@@ -5514,7 +9653,7 @@
         </p:nvSpPr>
         <p:spPr>
           <a:xfrm>
-            <a:off x="6649276" y="2042896"/>
+            <a:off x="7487476" y="2066575"/>
             <a:ext cx="1818861" cy="646331"/>
           </a:xfrm>
           <a:prstGeom prst="rect">
